--- a/videos/deep-learning/002_transformers_part2/recreated_pptx/slide_031_recreated.pptx
+++ b/videos/deep-learning/002_transformers_part2/recreated_pptx/slide_031_recreated.pptx
@@ -852,7 +852,7 @@
 </file>
 
 <file path=ppt/slides/slide1.xml><?xml version="1.0" encoding="utf-8"?>
-<p:sld xmlns:a="http://schemas.openxmlformats.org/drawingml/2006/main" xmlns:r="http://schemas.openxmlformats.org/officeDocument/2006/relationships" xmlns:p="http://schemas.openxmlformats.org/presentationml/2006/main">
+<p:sld xmlns:mc="http://schemas.openxmlformats.org/markup-compatibility/2006" xmlns:a="http://schemas.openxmlformats.org/drawingml/2006/main" xmlns:r="http://schemas.openxmlformats.org/officeDocument/2006/relationships" xmlns:p="http://schemas.openxmlformats.org/presentationml/2006/main">
   <p:cSld name="Slide 1">
     <p:bg>
       <p:bgPr>
@@ -2337,1398 +2337,6817 @@
           </a:p>
         </p:txBody>
       </p:sp>
-      <p:pic>
-        <p:nvPicPr>
-          <p:cNvPr id="56" name="Image 0" descr="/home/ahmed/Projects/ai_llm_slides/videos/deep-learning/002_transformers_part2/recreated_pptx/build/assets/lv1_r1.png">    </p:cNvPr>
-          <p:cNvPicPr>
-            <a:picLocks noChangeAspect="1"/>
-          </p:cNvPicPr>
-          <p:nvPr/>
-        </p:nvPicPr>
-        <p:blipFill>
-          <a:blip r:embed="rId1"/>
-          <a:stretch>
-            <a:fillRect/>
-          </a:stretch>
-        </p:blipFill>
-        <p:spPr>
-          <a:xfrm>
-            <a:off x="1257808" y="953008"/>
-            <a:ext cx="734568" cy="216408"/>
-          </a:xfrm>
-          <a:prstGeom prst="rect">
-            <a:avLst/>
-          </a:prstGeom>
-        </p:spPr>
-      </p:pic>
-      <p:pic>
-        <p:nvPicPr>
-          <p:cNvPr id="57" name="Image 1" descr="/home/ahmed/Projects/ai_llm_slides/videos/deep-learning/002_transformers_part2/recreated_pptx/build/assets/lv1_r2.png">    </p:cNvPr>
-          <p:cNvPicPr>
-            <a:picLocks noChangeAspect="1"/>
-          </p:cNvPicPr>
-          <p:nvPr/>
-        </p:nvPicPr>
-        <p:blipFill>
-          <a:blip r:embed="rId2"/>
-          <a:stretch>
-            <a:fillRect/>
-          </a:stretch>
-        </p:blipFill>
-        <p:spPr>
-          <a:xfrm>
-            <a:off x="1257808" y="1384808"/>
-            <a:ext cx="774192" cy="213360"/>
-          </a:xfrm>
-          <a:prstGeom prst="rect">
-            <a:avLst/>
-          </a:prstGeom>
-        </p:spPr>
-      </p:pic>
-      <p:pic>
-        <p:nvPicPr>
-          <p:cNvPr id="58" name="Image 2" descr="/home/ahmed/Projects/ai_llm_slides/videos/deep-learning/002_transformers_part2/recreated_pptx/build/assets/lv2_r1.png">    </p:cNvPr>
-          <p:cNvPicPr>
-            <a:picLocks noChangeAspect="1"/>
-          </p:cNvPicPr>
-          <p:nvPr/>
-        </p:nvPicPr>
-        <p:blipFill>
-          <a:blip r:embed="rId3"/>
-          <a:stretch>
-            <a:fillRect/>
-          </a:stretch>
-        </p:blipFill>
-        <p:spPr>
-          <a:xfrm>
-            <a:off x="1410208" y="1892808"/>
-            <a:ext cx="557784" cy="202692"/>
-          </a:xfrm>
-          <a:prstGeom prst="rect">
-            <a:avLst/>
-          </a:prstGeom>
-        </p:spPr>
-      </p:pic>
-      <p:pic>
-        <p:nvPicPr>
-          <p:cNvPr id="59" name="Image 3" descr="/home/ahmed/Projects/ai_llm_slides/videos/deep-learning/002_transformers_part2/recreated_pptx/build/assets/lv2_r2.png">    </p:cNvPr>
-          <p:cNvPicPr>
-            <a:picLocks noChangeAspect="1"/>
-          </p:cNvPicPr>
-          <p:nvPr/>
-        </p:nvPicPr>
-        <p:blipFill>
-          <a:blip r:embed="rId4"/>
-          <a:stretch>
-            <a:fillRect/>
-          </a:stretch>
-        </p:blipFill>
-        <p:spPr>
-          <a:xfrm>
-            <a:off x="1410208" y="2350008"/>
-            <a:ext cx="615696" cy="204216"/>
-          </a:xfrm>
-          <a:prstGeom prst="rect">
-            <a:avLst/>
-          </a:prstGeom>
-        </p:spPr>
-      </p:pic>
-      <p:pic>
-        <p:nvPicPr>
-          <p:cNvPr id="60" name="Image 4" descr="/home/ahmed/Projects/ai_llm_slides/videos/deep-learning/002_transformers_part2/recreated_pptx/build/assets/mva_r1.png">    </p:cNvPr>
-          <p:cNvPicPr>
-            <a:picLocks noChangeAspect="1"/>
-          </p:cNvPicPr>
-          <p:nvPr/>
-        </p:nvPicPr>
-        <p:blipFill>
-          <a:blip r:embed="rId5"/>
-          <a:stretch>
-            <a:fillRect/>
-          </a:stretch>
-        </p:blipFill>
-        <p:spPr>
-          <a:xfrm>
-            <a:off x="2858008" y="978408"/>
-            <a:ext cx="1246632" cy="208788"/>
-          </a:xfrm>
-          <a:prstGeom prst="rect">
-            <a:avLst/>
-          </a:prstGeom>
-        </p:spPr>
-      </p:pic>
-      <p:pic>
-        <p:nvPicPr>
-          <p:cNvPr id="61" name="Image 5" descr="/home/ahmed/Projects/ai_llm_slides/videos/deep-learning/002_transformers_part2/recreated_pptx/build/assets/mva_r2.png">    </p:cNvPr>
-          <p:cNvPicPr>
-            <a:picLocks noChangeAspect="1"/>
-          </p:cNvPicPr>
-          <p:nvPr/>
-        </p:nvPicPr>
-        <p:blipFill>
-          <a:blip r:embed="rId6"/>
-          <a:stretch>
-            <a:fillRect/>
-          </a:stretch>
-        </p:blipFill>
-        <p:spPr>
-          <a:xfrm>
-            <a:off x="2858008" y="1410208"/>
-            <a:ext cx="1211580" cy="202692"/>
-          </a:xfrm>
-          <a:prstGeom prst="rect">
-            <a:avLst/>
-          </a:prstGeom>
-        </p:spPr>
-      </p:pic>
-      <p:pic>
-        <p:nvPicPr>
-          <p:cNvPr id="62" name="Image 6" descr="/home/ahmed/Projects/ai_llm_slides/videos/deep-learning/002_transformers_part2/recreated_pptx/build/assets/dEqMid.png">    </p:cNvPr>
-          <p:cNvPicPr>
-            <a:picLocks noChangeAspect="1"/>
-          </p:cNvPicPr>
-          <p:nvPr/>
-        </p:nvPicPr>
-        <p:blipFill>
-          <a:blip r:embed="rId7"/>
-          <a:stretch>
-            <a:fillRect/>
-          </a:stretch>
-        </p:blipFill>
-        <p:spPr>
-          <a:xfrm>
-            <a:off x="4407408" y="1397508"/>
-            <a:ext cx="201168" cy="103632"/>
-          </a:xfrm>
-          <a:prstGeom prst="rect">
-            <a:avLst/>
-          </a:prstGeom>
-        </p:spPr>
-      </p:pic>
-      <p:pic>
-        <p:nvPicPr>
-          <p:cNvPr id="63" name="Image 7" descr="/home/ahmed/Projects/ai_llm_slides/videos/deep-learning/002_transformers_part2/recreated_pptx/build/assets/mvb1_s1.png">    </p:cNvPr>
-          <p:cNvPicPr>
-            <a:picLocks noChangeAspect="1"/>
-          </p:cNvPicPr>
-          <p:nvPr/>
-        </p:nvPicPr>
-        <p:blipFill>
-          <a:blip r:embed="rId8"/>
-          <a:stretch>
-            <a:fillRect/>
-          </a:stretch>
-        </p:blipFill>
-        <p:spPr>
-          <a:xfrm>
-            <a:off x="4699508" y="1016508"/>
-            <a:ext cx="710184" cy="208788"/>
-          </a:xfrm>
-          <a:prstGeom prst="rect">
-            <a:avLst/>
-          </a:prstGeom>
-        </p:spPr>
-      </p:pic>
-      <p:pic>
-        <p:nvPicPr>
-          <p:cNvPr id="64" name="Image 8" descr="/home/ahmed/Projects/ai_llm_slides/videos/deep-learning/002_transformers_part2/recreated_pptx/build/assets/mvb1_s2.png">    </p:cNvPr>
-          <p:cNvPicPr>
-            <a:picLocks noChangeAspect="1"/>
-          </p:cNvPicPr>
-          <p:nvPr/>
-        </p:nvPicPr>
-        <p:blipFill>
-          <a:blip r:embed="rId9"/>
-          <a:stretch>
-            <a:fillRect/>
-          </a:stretch>
-        </p:blipFill>
-        <p:spPr>
-          <a:xfrm>
-            <a:off x="5499608" y="1016508"/>
-            <a:ext cx="829056" cy="214884"/>
-          </a:xfrm>
-          <a:prstGeom prst="rect">
-            <a:avLst/>
-          </a:prstGeom>
-        </p:spPr>
-      </p:pic>
-      <p:pic>
-        <p:nvPicPr>
-          <p:cNvPr id="65" name="Image 9" descr="/home/ahmed/Projects/ai_llm_slides/videos/deep-learning/002_transformers_part2/recreated_pptx/build/assets/mvb1_s3.png">    </p:cNvPr>
-          <p:cNvPicPr>
-            <a:picLocks noChangeAspect="1"/>
-          </p:cNvPicPr>
-          <p:nvPr/>
-        </p:nvPicPr>
-        <p:blipFill>
-          <a:blip r:embed="rId10"/>
-          <a:stretch>
-            <a:fillRect/>
-          </a:stretch>
-        </p:blipFill>
-        <p:spPr>
-          <a:xfrm>
-            <a:off x="6426708" y="1054608"/>
-            <a:ext cx="124968" cy="126492"/>
-          </a:xfrm>
-          <a:prstGeom prst="rect">
-            <a:avLst/>
-          </a:prstGeom>
-        </p:spPr>
-      </p:pic>
-      <p:pic>
-        <p:nvPicPr>
-          <p:cNvPr id="66" name="Image 10" descr="/home/ahmed/Projects/ai_llm_slides/videos/deep-learning/002_transformers_part2/recreated_pptx/build/assets/mvb1_s4.png">    </p:cNvPr>
-          <p:cNvPicPr>
-            <a:picLocks noChangeAspect="1"/>
-          </p:cNvPicPr>
-          <p:nvPr/>
-        </p:nvPicPr>
-        <p:blipFill>
-          <a:blip r:embed="rId11"/>
-          <a:stretch>
-            <a:fillRect/>
-          </a:stretch>
-        </p:blipFill>
-        <p:spPr>
-          <a:xfrm>
-            <a:off x="6642608" y="1016508"/>
-            <a:ext cx="774192" cy="213360"/>
-          </a:xfrm>
-          <a:prstGeom prst="rect">
-            <a:avLst/>
-          </a:prstGeom>
-        </p:spPr>
-      </p:pic>
-      <p:pic>
-        <p:nvPicPr>
-          <p:cNvPr id="67" name="Image 11" descr="/home/ahmed/Projects/ai_llm_slides/videos/deep-learning/002_transformers_part2/recreated_pptx/build/assets/mvb1_s5.png">    </p:cNvPr>
-          <p:cNvPicPr>
-            <a:picLocks noChangeAspect="1"/>
-          </p:cNvPicPr>
-          <p:nvPr/>
-        </p:nvPicPr>
-        <p:blipFill>
-          <a:blip r:embed="rId12"/>
-          <a:stretch>
-            <a:fillRect/>
-          </a:stretch>
-        </p:blipFill>
-        <p:spPr>
-          <a:xfrm>
-            <a:off x="7506208" y="1016508"/>
-            <a:ext cx="774192" cy="214884"/>
-          </a:xfrm>
-          <a:prstGeom prst="rect">
-            <a:avLst/>
-          </a:prstGeom>
-        </p:spPr>
-      </p:pic>
-      <p:pic>
-        <p:nvPicPr>
-          <p:cNvPr id="68" name="Image 12" descr="/home/ahmed/Projects/ai_llm_slides/videos/deep-learning/002_transformers_part2/recreated_pptx/build/assets/mvb2_s1.png">    </p:cNvPr>
-          <p:cNvPicPr>
-            <a:picLocks noChangeAspect="1"/>
-          </p:cNvPicPr>
-          <p:nvPr/>
-        </p:nvPicPr>
-        <p:blipFill>
-          <a:blip r:embed="rId13"/>
-          <a:stretch>
-            <a:fillRect/>
-          </a:stretch>
-        </p:blipFill>
-        <p:spPr>
-          <a:xfrm>
-            <a:off x="4737608" y="1448308"/>
-            <a:ext cx="728472" cy="201168"/>
-          </a:xfrm>
-          <a:prstGeom prst="rect">
-            <a:avLst/>
-          </a:prstGeom>
-        </p:spPr>
-      </p:pic>
-      <p:pic>
-        <p:nvPicPr>
-          <p:cNvPr id="69" name="Image 13" descr="/home/ahmed/Projects/ai_llm_slides/videos/deep-learning/002_transformers_part2/recreated_pptx/build/assets/mvb2_s2.png">    </p:cNvPr>
-          <p:cNvPicPr>
-            <a:picLocks noChangeAspect="1"/>
-          </p:cNvPicPr>
-          <p:nvPr/>
-        </p:nvPicPr>
-        <p:blipFill>
-          <a:blip r:embed="rId14"/>
-          <a:stretch>
-            <a:fillRect/>
-          </a:stretch>
-        </p:blipFill>
-        <p:spPr>
-          <a:xfrm>
-            <a:off x="5563108" y="1448308"/>
-            <a:ext cx="841248" cy="217932"/>
-          </a:xfrm>
-          <a:prstGeom prst="rect">
-            <a:avLst/>
-          </a:prstGeom>
-        </p:spPr>
-      </p:pic>
-      <p:pic>
-        <p:nvPicPr>
-          <p:cNvPr id="70" name="Image 14" descr="/home/ahmed/Projects/ai_llm_slides/videos/deep-learning/002_transformers_part2/recreated_pptx/build/assets/mvb2_s3.png">    </p:cNvPr>
-          <p:cNvPicPr>
-            <a:picLocks noChangeAspect="1"/>
-          </p:cNvPicPr>
-          <p:nvPr/>
-        </p:nvPicPr>
-        <p:blipFill>
-          <a:blip r:embed="rId15"/>
-          <a:stretch>
-            <a:fillRect/>
-          </a:stretch>
-        </p:blipFill>
-        <p:spPr>
-          <a:xfrm>
-            <a:off x="6490208" y="1511808"/>
-            <a:ext cx="77724" cy="30480"/>
-          </a:xfrm>
-          <a:prstGeom prst="rect">
-            <a:avLst/>
-          </a:prstGeom>
-        </p:spPr>
-      </p:pic>
-      <p:pic>
-        <p:nvPicPr>
-          <p:cNvPr id="71" name="Image 15" descr="/home/ahmed/Projects/ai_llm_slides/videos/deep-learning/002_transformers_part2/recreated_pptx/build/assets/mvb2_s4.png">    </p:cNvPr>
-          <p:cNvPicPr>
-            <a:picLocks noChangeAspect="1"/>
-          </p:cNvPicPr>
-          <p:nvPr/>
-        </p:nvPicPr>
-        <p:blipFill>
-          <a:blip r:embed="rId16"/>
-          <a:stretch>
-            <a:fillRect/>
-          </a:stretch>
-        </p:blipFill>
-        <p:spPr>
-          <a:xfrm>
-            <a:off x="6642608" y="1448308"/>
-            <a:ext cx="710184" cy="208788"/>
-          </a:xfrm>
-          <a:prstGeom prst="rect">
-            <a:avLst/>
-          </a:prstGeom>
-        </p:spPr>
-      </p:pic>
-      <p:pic>
-        <p:nvPicPr>
-          <p:cNvPr id="72" name="Image 16" descr="/home/ahmed/Projects/ai_llm_slides/videos/deep-learning/002_transformers_part2/recreated_pptx/build/assets/mvb2_s5.png">    </p:cNvPr>
-          <p:cNvPicPr>
-            <a:picLocks noChangeAspect="1"/>
-          </p:cNvPicPr>
-          <p:nvPr/>
-        </p:nvPicPr>
-        <p:blipFill>
-          <a:blip r:embed="rId17"/>
-          <a:stretch>
-            <a:fillRect/>
-          </a:stretch>
-        </p:blipFill>
-        <p:spPr>
-          <a:xfrm>
-            <a:off x="7442708" y="1448308"/>
-            <a:ext cx="774192" cy="214884"/>
-          </a:xfrm>
-          <a:prstGeom prst="rect">
-            <a:avLst/>
-          </a:prstGeom>
-        </p:spPr>
-      </p:pic>
-      <p:pic>
-        <p:nvPicPr>
-          <p:cNvPr id="73" name="Image 17" descr="/home/ahmed/Projects/ai_llm_slides/videos/deep-learning/002_transformers_part2/recreated_pptx/build/assets/mvr1_s1.png">    </p:cNvPr>
-          <p:cNvPicPr>
-            <a:picLocks noChangeAspect="1"/>
-          </p:cNvPicPr>
-          <p:nvPr/>
-        </p:nvPicPr>
-        <p:blipFill>
-          <a:blip r:embed="rId18"/>
-          <a:stretch>
-            <a:fillRect/>
-          </a:stretch>
-        </p:blipFill>
-        <p:spPr>
-          <a:xfrm>
-            <a:off x="5017008" y="1981708"/>
-            <a:ext cx="585216" cy="210312"/>
-          </a:xfrm>
-          <a:prstGeom prst="rect">
-            <a:avLst/>
-          </a:prstGeom>
-        </p:spPr>
-      </p:pic>
-      <p:pic>
-        <p:nvPicPr>
-          <p:cNvPr id="74" name="Image 18" descr="/home/ahmed/Projects/ai_llm_slides/videos/deep-learning/002_transformers_part2/recreated_pptx/build/assets/mvr1_s2.png">    </p:cNvPr>
-          <p:cNvPicPr>
-            <a:picLocks noChangeAspect="1"/>
-          </p:cNvPicPr>
-          <p:nvPr/>
-        </p:nvPicPr>
-        <p:blipFill>
-          <a:blip r:embed="rId19"/>
-          <a:stretch>
-            <a:fillRect/>
-          </a:stretch>
-        </p:blipFill>
-        <p:spPr>
-          <a:xfrm>
-            <a:off x="5690108" y="1981708"/>
-            <a:ext cx="710184" cy="231648"/>
-          </a:xfrm>
-          <a:prstGeom prst="rect">
-            <a:avLst/>
-          </a:prstGeom>
-        </p:spPr>
-      </p:pic>
-      <p:pic>
-        <p:nvPicPr>
-          <p:cNvPr id="75" name="Image 19" descr="/home/ahmed/Projects/ai_llm_slides/videos/deep-learning/002_transformers_part2/recreated_pptx/build/assets/mvr1_s3.png">    </p:cNvPr>
-          <p:cNvPicPr>
-            <a:picLocks noChangeAspect="1"/>
-          </p:cNvPicPr>
-          <p:nvPr/>
-        </p:nvPicPr>
-        <p:blipFill>
-          <a:blip r:embed="rId20"/>
-          <a:stretch>
-            <a:fillRect/>
-          </a:stretch>
-        </p:blipFill>
-        <p:spPr>
-          <a:xfrm>
-            <a:off x="6439408" y="2019808"/>
-            <a:ext cx="124968" cy="126492"/>
-          </a:xfrm>
-          <a:prstGeom prst="rect">
-            <a:avLst/>
-          </a:prstGeom>
-        </p:spPr>
-      </p:pic>
-      <p:pic>
-        <p:nvPicPr>
-          <p:cNvPr id="76" name="Image 20" descr="/home/ahmed/Projects/ai_llm_slides/videos/deep-learning/002_transformers_part2/recreated_pptx/build/assets/mvr1_s4.png">    </p:cNvPr>
-          <p:cNvPicPr>
-            <a:picLocks noChangeAspect="1"/>
-          </p:cNvPicPr>
-          <p:nvPr/>
-        </p:nvPicPr>
-        <p:blipFill>
-          <a:blip r:embed="rId21"/>
-          <a:stretch>
-            <a:fillRect/>
-          </a:stretch>
-        </p:blipFill>
-        <p:spPr>
-          <a:xfrm>
-            <a:off x="6642608" y="1981708"/>
-            <a:ext cx="658368" cy="217932"/>
-          </a:xfrm>
-          <a:prstGeom prst="rect">
-            <a:avLst/>
-          </a:prstGeom>
-        </p:spPr>
-      </p:pic>
-      <p:pic>
-        <p:nvPicPr>
-          <p:cNvPr id="77" name="Image 21" descr="/home/ahmed/Projects/ai_llm_slides/videos/deep-learning/002_transformers_part2/recreated_pptx/build/assets/mvr1_s5.png">    </p:cNvPr>
-          <p:cNvPicPr>
-            <a:picLocks noChangeAspect="1"/>
-          </p:cNvPicPr>
-          <p:nvPr/>
-        </p:nvPicPr>
-        <p:blipFill>
-          <a:blip r:embed="rId22"/>
-          <a:stretch>
-            <a:fillRect/>
-          </a:stretch>
-        </p:blipFill>
-        <p:spPr>
-          <a:xfrm>
-            <a:off x="7379208" y="1981708"/>
-            <a:ext cx="594360" cy="211836"/>
-          </a:xfrm>
-          <a:prstGeom prst="rect">
-            <a:avLst/>
-          </a:prstGeom>
-        </p:spPr>
-      </p:pic>
-      <p:pic>
-        <p:nvPicPr>
-          <p:cNvPr id="78" name="Image 22" descr="/home/ahmed/Projects/ai_llm_slides/videos/deep-learning/002_transformers_part2/recreated_pptx/build/assets/mvr2_s1.png">    </p:cNvPr>
-          <p:cNvPicPr>
-            <a:picLocks noChangeAspect="1"/>
-          </p:cNvPicPr>
-          <p:nvPr/>
-        </p:nvPicPr>
-        <p:blipFill>
-          <a:blip r:embed="rId23"/>
-          <a:stretch>
-            <a:fillRect/>
-          </a:stretch>
-        </p:blipFill>
-        <p:spPr>
-          <a:xfrm>
-            <a:off x="4966208" y="2388108"/>
-            <a:ext cx="647700" cy="213360"/>
-          </a:xfrm>
-          <a:prstGeom prst="rect">
-            <a:avLst/>
-          </a:prstGeom>
-        </p:spPr>
-      </p:pic>
-      <p:pic>
-        <p:nvPicPr>
-          <p:cNvPr id="79" name="Image 23" descr="/home/ahmed/Projects/ai_llm_slides/videos/deep-learning/002_transformers_part2/recreated_pptx/build/assets/mvr2_s2.png">    </p:cNvPr>
-          <p:cNvPicPr>
-            <a:picLocks noChangeAspect="1"/>
-          </p:cNvPicPr>
-          <p:nvPr/>
-        </p:nvPicPr>
-        <p:blipFill>
-          <a:blip r:embed="rId24"/>
-          <a:stretch>
-            <a:fillRect/>
-          </a:stretch>
-        </p:blipFill>
-        <p:spPr>
-          <a:xfrm>
-            <a:off x="5702808" y="2388108"/>
-            <a:ext cx="658368" cy="216408"/>
-          </a:xfrm>
-          <a:prstGeom prst="rect">
-            <a:avLst/>
-          </a:prstGeom>
-        </p:spPr>
-      </p:pic>
-      <p:pic>
-        <p:nvPicPr>
-          <p:cNvPr id="80" name="Image 24" descr="/home/ahmed/Projects/ai_llm_slides/videos/deep-learning/002_transformers_part2/recreated_pptx/build/assets/mvr2_s3.png">    </p:cNvPr>
-          <p:cNvPicPr>
-            <a:picLocks noChangeAspect="1"/>
-          </p:cNvPicPr>
-          <p:nvPr/>
-        </p:nvPicPr>
-        <p:blipFill>
-          <a:blip r:embed="rId25"/>
-          <a:stretch>
-            <a:fillRect/>
-          </a:stretch>
-        </p:blipFill>
-        <p:spPr>
-          <a:xfrm>
-            <a:off x="6515608" y="2451608"/>
-            <a:ext cx="77724" cy="30480"/>
-          </a:xfrm>
-          <a:prstGeom prst="rect">
-            <a:avLst/>
-          </a:prstGeom>
-        </p:spPr>
-      </p:pic>
-      <p:pic>
-        <p:nvPicPr>
-          <p:cNvPr id="81" name="Image 25" descr="/home/ahmed/Projects/ai_llm_slides/videos/deep-learning/002_transformers_part2/recreated_pptx/build/assets/mvr2_s4.png">    </p:cNvPr>
-          <p:cNvPicPr>
-            <a:picLocks noChangeAspect="1"/>
-          </p:cNvPicPr>
-          <p:nvPr/>
-        </p:nvPicPr>
-        <p:blipFill>
-          <a:blip r:embed="rId26"/>
-          <a:stretch>
-            <a:fillRect/>
-          </a:stretch>
-        </p:blipFill>
-        <p:spPr>
-          <a:xfrm>
-            <a:off x="6668008" y="2388108"/>
-            <a:ext cx="585216" cy="210312"/>
-          </a:xfrm>
-          <a:prstGeom prst="rect">
-            <a:avLst/>
-          </a:prstGeom>
-        </p:spPr>
-      </p:pic>
-      <p:pic>
-        <p:nvPicPr>
-          <p:cNvPr id="82" name="Image 26" descr="/home/ahmed/Projects/ai_llm_slides/videos/deep-learning/002_transformers_part2/recreated_pptx/build/assets/mvr2_s5.png">    </p:cNvPr>
-          <p:cNvPicPr>
-            <a:picLocks noChangeAspect="1"/>
-          </p:cNvPicPr>
-          <p:nvPr/>
-        </p:nvPicPr>
-        <p:blipFill>
-          <a:blip r:embed="rId27"/>
-          <a:stretch>
-            <a:fillRect/>
-          </a:stretch>
-        </p:blipFill>
-        <p:spPr>
-          <a:xfrm>
-            <a:off x="7341108" y="2388108"/>
-            <a:ext cx="585216" cy="208788"/>
-          </a:xfrm>
-          <a:prstGeom prst="rect">
-            <a:avLst/>
-          </a:prstGeom>
-        </p:spPr>
-      </p:pic>
-      <p:pic>
-        <p:nvPicPr>
-          <p:cNvPr id="83" name="Image 27" descr="/home/ahmed/Projects/ai_llm_slides/videos/deep-learning/002_transformers_part2/recreated_pptx/build/assets/db1_let.png">    </p:cNvPr>
-          <p:cNvPicPr>
-            <a:picLocks noChangeAspect="1"/>
-          </p:cNvPicPr>
-          <p:nvPr/>
-        </p:nvPicPr>
-        <p:blipFill>
-          <a:blip r:embed="rId28"/>
-          <a:stretch>
-            <a:fillRect/>
-          </a:stretch>
-        </p:blipFill>
-        <p:spPr>
-          <a:xfrm>
-            <a:off x="8915908" y="1689608"/>
-            <a:ext cx="291084" cy="164592"/>
-          </a:xfrm>
-          <a:prstGeom prst="rect">
-            <a:avLst/>
-          </a:prstGeom>
-        </p:spPr>
-      </p:pic>
-      <p:pic>
-        <p:nvPicPr>
-          <p:cNvPr id="84" name="Image 28" descr="/home/ahmed/Projects/ai_llm_slides/videos/deep-learning/002_transformers_part2/recreated_pptx/build/assets/db1_a.png">    </p:cNvPr>
-          <p:cNvPicPr>
-            <a:picLocks noChangeAspect="1"/>
-          </p:cNvPicPr>
-          <p:nvPr/>
-        </p:nvPicPr>
-        <p:blipFill>
-          <a:blip r:embed="rId29"/>
-          <a:stretch>
-            <a:fillRect/>
-          </a:stretch>
-        </p:blipFill>
-        <p:spPr>
-          <a:xfrm>
-            <a:off x="9322308" y="1689608"/>
-            <a:ext cx="582168" cy="153924"/>
-          </a:xfrm>
-          <a:prstGeom prst="rect">
-            <a:avLst/>
-          </a:prstGeom>
-        </p:spPr>
-      </p:pic>
-      <p:pic>
-        <p:nvPicPr>
-          <p:cNvPr id="85" name="Image 29" descr="/home/ahmed/Projects/ai_llm_slides/videos/deep-learning/002_transformers_part2/recreated_pptx/build/assets/db1_b.png">    </p:cNvPr>
-          <p:cNvPicPr>
-            <a:picLocks noChangeAspect="1"/>
-          </p:cNvPicPr>
-          <p:nvPr/>
-        </p:nvPicPr>
-        <p:blipFill>
-          <a:blip r:embed="rId30"/>
-          <a:stretch>
-            <a:fillRect/>
-          </a:stretch>
-        </p:blipFill>
-        <p:spPr>
-          <a:xfrm>
-            <a:off x="9982708" y="1689608"/>
-            <a:ext cx="519684" cy="143256"/>
-          </a:xfrm>
-          <a:prstGeom prst="rect">
-            <a:avLst/>
-          </a:prstGeom>
-        </p:spPr>
-      </p:pic>
-      <p:pic>
-        <p:nvPicPr>
-          <p:cNvPr id="86" name="Image 30" descr="/home/ahmed/Projects/ai_llm_slides/videos/deep-learning/002_transformers_part2/recreated_pptx/build/assets/db2.png">    </p:cNvPr>
-          <p:cNvPicPr>
-            <a:picLocks noChangeAspect="1"/>
-          </p:cNvPicPr>
-          <p:nvPr/>
-        </p:nvPicPr>
-        <p:blipFill>
-          <a:blip r:embed="rId31"/>
-          <a:stretch>
-            <a:fillRect/>
-          </a:stretch>
-        </p:blipFill>
-        <p:spPr>
-          <a:xfrm>
-            <a:off x="8776208" y="2223008"/>
-            <a:ext cx="1874520" cy="225552"/>
-          </a:xfrm>
-          <a:prstGeom prst="rect">
-            <a:avLst/>
-          </a:prstGeom>
-        </p:spPr>
-      </p:pic>
-      <p:pic>
-        <p:nvPicPr>
-          <p:cNvPr id="87" name="Image 31" descr="/home/ahmed/Projects/ai_llm_slides/videos/deep-learning/002_transformers_part2/recreated_pptx/build/assets/dR2.png">    </p:cNvPr>
-          <p:cNvPicPr>
-            <a:picLocks noChangeAspect="1"/>
-          </p:cNvPicPr>
-          <p:nvPr/>
-        </p:nvPicPr>
-        <p:blipFill>
-          <a:blip r:embed="rId32"/>
-          <a:stretch>
-            <a:fillRect/>
-          </a:stretch>
-        </p:blipFill>
-        <p:spPr>
-          <a:xfrm>
-            <a:off x="1067308" y="3785108"/>
-            <a:ext cx="8394192" cy="260604"/>
-          </a:xfrm>
-          <a:prstGeom prst="rect">
-            <a:avLst/>
-          </a:prstGeom>
-        </p:spPr>
-      </p:pic>
-      <p:pic>
-        <p:nvPicPr>
-          <p:cNvPr id="88" name="Image 32" descr="/home/ahmed/Projects/ai_llm_slides/videos/deep-learning/002_transformers_part2/recreated_pptx/build/assets/dR3.png">    </p:cNvPr>
-          <p:cNvPicPr>
-            <a:picLocks noChangeAspect="1"/>
-          </p:cNvPicPr>
-          <p:nvPr/>
-        </p:nvPicPr>
-        <p:blipFill>
-          <a:blip r:embed="rId33"/>
-          <a:stretch>
-            <a:fillRect/>
-          </a:stretch>
-        </p:blipFill>
-        <p:spPr>
-          <a:xfrm>
-            <a:off x="1105408" y="4280408"/>
-            <a:ext cx="7706868" cy="245364"/>
-          </a:xfrm>
-          <a:prstGeom prst="rect">
-            <a:avLst/>
-          </a:prstGeom>
-        </p:spPr>
-      </p:pic>
-      <p:pic>
-        <p:nvPicPr>
-          <p:cNvPr id="89" name="Image 33" descr="/home/ahmed/Projects/ai_llm_slides/videos/deep-learning/002_transformers_part2/recreated_pptx/build/assets/dR4.png">    </p:cNvPr>
-          <p:cNvPicPr>
-            <a:picLocks noChangeAspect="1"/>
-          </p:cNvPicPr>
-          <p:nvPr/>
-        </p:nvPicPr>
-        <p:blipFill>
-          <a:blip r:embed="rId34"/>
-          <a:stretch>
-            <a:fillRect/>
-          </a:stretch>
-        </p:blipFill>
-        <p:spPr>
-          <a:xfrm>
-            <a:off x="1105408" y="4572508"/>
-            <a:ext cx="7240524" cy="236220"/>
-          </a:xfrm>
-          <a:prstGeom prst="rect">
-            <a:avLst/>
-          </a:prstGeom>
-        </p:spPr>
-      </p:pic>
-      <p:pic>
-        <p:nvPicPr>
-          <p:cNvPr id="90" name="Image 34" descr="/home/ahmed/Projects/ai_llm_slides/videos/deep-learning/002_transformers_part2/recreated_pptx/build/assets/dR5.png">    </p:cNvPr>
-          <p:cNvPicPr>
-            <a:picLocks noChangeAspect="1"/>
-          </p:cNvPicPr>
-          <p:nvPr/>
-        </p:nvPicPr>
-        <p:blipFill>
-          <a:blip r:embed="rId35"/>
-          <a:stretch>
-            <a:fillRect/>
-          </a:stretch>
-        </p:blipFill>
-        <p:spPr>
-          <a:xfrm>
-            <a:off x="1118108" y="5029708"/>
-            <a:ext cx="7554468" cy="240792"/>
-          </a:xfrm>
-          <a:prstGeom prst="rect">
-            <a:avLst/>
-          </a:prstGeom>
-        </p:spPr>
-      </p:pic>
-      <p:pic>
-        <p:nvPicPr>
-          <p:cNvPr id="91" name="Image 35" descr="/home/ahmed/Projects/ai_llm_slides/videos/deep-learning/002_transformers_part2/recreated_pptx/build/assets/dR6.png">    </p:cNvPr>
-          <p:cNvPicPr>
-            <a:picLocks noChangeAspect="1"/>
-          </p:cNvPicPr>
-          <p:nvPr/>
-        </p:nvPicPr>
-        <p:blipFill>
-          <a:blip r:embed="rId36"/>
-          <a:stretch>
-            <a:fillRect/>
-          </a:stretch>
-        </p:blipFill>
-        <p:spPr>
-          <a:xfrm>
-            <a:off x="1041908" y="5461508"/>
-            <a:ext cx="8269224" cy="230124"/>
-          </a:xfrm>
-          <a:prstGeom prst="rect">
-            <a:avLst/>
-          </a:prstGeom>
-        </p:spPr>
-      </p:pic>
-      <p:pic>
-        <p:nvPicPr>
-          <p:cNvPr id="92" name="Image 36" descr="/home/ahmed/Projects/ai_llm_slides/videos/deep-learning/002_transformers_part2/recreated_pptx/build/assets/r1_s01.png">    </p:cNvPr>
-          <p:cNvPicPr>
-            <a:picLocks noChangeAspect="1"/>
-          </p:cNvPicPr>
-          <p:nvPr/>
-        </p:nvPicPr>
-        <p:blipFill>
-          <a:blip r:embed="rId37"/>
-          <a:stretch>
-            <a:fillRect/>
-          </a:stretch>
-        </p:blipFill>
-        <p:spPr>
-          <a:xfrm>
-            <a:off x="1067308" y="3366008"/>
-            <a:ext cx="82296" cy="275844"/>
-          </a:xfrm>
-          <a:prstGeom prst="rect">
-            <a:avLst/>
-          </a:prstGeom>
-        </p:spPr>
-      </p:pic>
-      <p:pic>
-        <p:nvPicPr>
-          <p:cNvPr id="93" name="Image 37" descr="/home/ahmed/Projects/ai_llm_slides/videos/deep-learning/002_transformers_part2/recreated_pptx/build/assets/r1_s02.png">    </p:cNvPr>
-          <p:cNvPicPr>
-            <a:picLocks noChangeAspect="1"/>
-          </p:cNvPicPr>
-          <p:nvPr/>
-        </p:nvPicPr>
-        <p:blipFill>
-          <a:blip r:embed="rId38"/>
-          <a:stretch>
-            <a:fillRect/>
-          </a:stretch>
-        </p:blipFill>
-        <p:spPr>
-          <a:xfrm>
-            <a:off x="1207008" y="3378708"/>
-            <a:ext cx="533400" cy="193548"/>
-          </a:xfrm>
-          <a:prstGeom prst="rect">
-            <a:avLst/>
-          </a:prstGeom>
-        </p:spPr>
-      </p:pic>
-      <p:pic>
-        <p:nvPicPr>
-          <p:cNvPr id="94" name="Image 38" descr="/home/ahmed/Projects/ai_llm_slides/videos/deep-learning/002_transformers_part2/recreated_pptx/build/assets/r1_s03.png">    </p:cNvPr>
-          <p:cNvPicPr>
-            <a:picLocks noChangeAspect="1"/>
-          </p:cNvPicPr>
-          <p:nvPr/>
-        </p:nvPicPr>
-        <p:blipFill>
-          <a:blip r:embed="rId39"/>
-          <a:stretch>
-            <a:fillRect/>
-          </a:stretch>
-        </p:blipFill>
-        <p:spPr>
-          <a:xfrm>
-            <a:off x="1816608" y="3378708"/>
-            <a:ext cx="781812" cy="187452"/>
-          </a:xfrm>
-          <a:prstGeom prst="rect">
-            <a:avLst/>
-          </a:prstGeom>
-        </p:spPr>
-      </p:pic>
-      <p:pic>
-        <p:nvPicPr>
-          <p:cNvPr id="95" name="Image 39" descr="/home/ahmed/Projects/ai_llm_slides/videos/deep-learning/002_transformers_part2/recreated_pptx/build/assets/r1_s04.png">    </p:cNvPr>
-          <p:cNvPicPr>
-            <a:picLocks noChangeAspect="1"/>
-          </p:cNvPicPr>
-          <p:nvPr/>
-        </p:nvPicPr>
-        <p:blipFill>
-          <a:blip r:embed="rId40"/>
-          <a:stretch>
-            <a:fillRect/>
-          </a:stretch>
-        </p:blipFill>
-        <p:spPr>
-          <a:xfrm>
-            <a:off x="2680208" y="3378708"/>
-            <a:ext cx="579120" cy="193548"/>
-          </a:xfrm>
-          <a:prstGeom prst="rect">
-            <a:avLst/>
-          </a:prstGeom>
-        </p:spPr>
-      </p:pic>
-      <p:pic>
-        <p:nvPicPr>
-          <p:cNvPr id="96" name="Image 40" descr="/home/ahmed/Projects/ai_llm_slides/videos/deep-learning/002_transformers_part2/recreated_pptx/build/assets/r1_s05.png">    </p:cNvPr>
-          <p:cNvPicPr>
-            <a:picLocks noChangeAspect="1"/>
-          </p:cNvPicPr>
-          <p:nvPr/>
-        </p:nvPicPr>
-        <p:blipFill>
-          <a:blip r:embed="rId41"/>
-          <a:stretch>
-            <a:fillRect/>
-          </a:stretch>
-        </p:blipFill>
-        <p:spPr>
-          <a:xfrm>
-            <a:off x="3340608" y="3378708"/>
-            <a:ext cx="694944" cy="178308"/>
-          </a:xfrm>
-          <a:prstGeom prst="rect">
-            <a:avLst/>
-          </a:prstGeom>
-        </p:spPr>
-      </p:pic>
-      <p:pic>
-        <p:nvPicPr>
-          <p:cNvPr id="97" name="Image 41" descr="/home/ahmed/Projects/ai_llm_slides/videos/deep-learning/002_transformers_part2/recreated_pptx/build/assets/r1_s06.png">    </p:cNvPr>
-          <p:cNvPicPr>
-            <a:picLocks noChangeAspect="1"/>
-          </p:cNvPicPr>
-          <p:nvPr/>
-        </p:nvPicPr>
-        <p:blipFill>
-          <a:blip r:embed="rId42"/>
-          <a:stretch>
-            <a:fillRect/>
-          </a:stretch>
-        </p:blipFill>
-        <p:spPr>
-          <a:xfrm>
-            <a:off x="4115308" y="3378708"/>
-            <a:ext cx="557784" cy="202692"/>
-          </a:xfrm>
-          <a:prstGeom prst="rect">
-            <a:avLst/>
-          </a:prstGeom>
-        </p:spPr>
-      </p:pic>
-      <p:pic>
-        <p:nvPicPr>
-          <p:cNvPr id="98" name="Image 42" descr="/home/ahmed/Projects/ai_llm_slides/videos/deep-learning/002_transformers_part2/recreated_pptx/build/assets/r1_s07.png">    </p:cNvPr>
-          <p:cNvPicPr>
-            <a:picLocks noChangeAspect="1"/>
-          </p:cNvPicPr>
-          <p:nvPr/>
-        </p:nvPicPr>
-        <p:blipFill>
-          <a:blip r:embed="rId43"/>
-          <a:stretch>
-            <a:fillRect/>
-          </a:stretch>
-        </p:blipFill>
-        <p:spPr>
-          <a:xfrm>
-            <a:off x="4737608" y="3378708"/>
-            <a:ext cx="888492" cy="268224"/>
-          </a:xfrm>
-          <a:prstGeom prst="rect">
-            <a:avLst/>
-          </a:prstGeom>
-        </p:spPr>
-      </p:pic>
-      <p:pic>
-        <p:nvPicPr>
-          <p:cNvPr id="99" name="Image 43" descr="/home/ahmed/Projects/ai_llm_slides/videos/deep-learning/002_transformers_part2/recreated_pptx/build/assets/r1_s08.png">    </p:cNvPr>
-          <p:cNvPicPr>
-            <a:picLocks noChangeAspect="1"/>
-          </p:cNvPicPr>
-          <p:nvPr/>
-        </p:nvPicPr>
-        <p:blipFill>
-          <a:blip r:embed="rId44"/>
-          <a:stretch>
-            <a:fillRect/>
-          </a:stretch>
-        </p:blipFill>
-        <p:spPr>
-          <a:xfrm>
-            <a:off x="5639308" y="3378708"/>
-            <a:ext cx="533400" cy="193548"/>
-          </a:xfrm>
-          <a:prstGeom prst="rect">
-            <a:avLst/>
-          </a:prstGeom>
-        </p:spPr>
-      </p:pic>
-      <p:pic>
-        <p:nvPicPr>
-          <p:cNvPr id="100" name="Image 44" descr="/home/ahmed/Projects/ai_llm_slides/videos/deep-learning/002_transformers_part2/recreated_pptx/build/assets/r1_s09.png">    </p:cNvPr>
-          <p:cNvPicPr>
-            <a:picLocks noChangeAspect="1"/>
-          </p:cNvPicPr>
-          <p:nvPr/>
-        </p:nvPicPr>
-        <p:blipFill>
-          <a:blip r:embed="rId45"/>
-          <a:stretch>
-            <a:fillRect/>
-          </a:stretch>
-        </p:blipFill>
-        <p:spPr>
-          <a:xfrm>
-            <a:off x="6248908" y="3378708"/>
-            <a:ext cx="743712" cy="190500"/>
-          </a:xfrm>
-          <a:prstGeom prst="rect">
-            <a:avLst/>
-          </a:prstGeom>
-        </p:spPr>
-      </p:pic>
-      <p:pic>
-        <p:nvPicPr>
-          <p:cNvPr id="101" name="Image 45" descr="/home/ahmed/Projects/ai_llm_slides/videos/deep-learning/002_transformers_part2/recreated_pptx/build/assets/r1_s10.png">    </p:cNvPr>
-          <p:cNvPicPr>
-            <a:picLocks noChangeAspect="1"/>
-          </p:cNvPicPr>
-          <p:nvPr/>
-        </p:nvPicPr>
-        <p:blipFill>
-          <a:blip r:embed="rId46"/>
-          <a:stretch>
-            <a:fillRect/>
-          </a:stretch>
-        </p:blipFill>
-        <p:spPr>
-          <a:xfrm>
-            <a:off x="7087108" y="3378708"/>
-            <a:ext cx="566928" cy="188976"/>
-          </a:xfrm>
-          <a:prstGeom prst="rect">
-            <a:avLst/>
-          </a:prstGeom>
-        </p:spPr>
-      </p:pic>
-      <p:pic>
-        <p:nvPicPr>
-          <p:cNvPr id="102" name="Image 46" descr="/home/ahmed/Projects/ai_llm_slides/videos/deep-learning/002_transformers_part2/recreated_pptx/build/assets/r1_s11.png">    </p:cNvPr>
-          <p:cNvPicPr>
-            <a:picLocks noChangeAspect="1"/>
-          </p:cNvPicPr>
-          <p:nvPr/>
-        </p:nvPicPr>
-        <p:blipFill>
-          <a:blip r:embed="rId47"/>
-          <a:stretch>
-            <a:fillRect/>
-          </a:stretch>
-        </p:blipFill>
-        <p:spPr>
-          <a:xfrm>
-            <a:off x="7734808" y="3378708"/>
-            <a:ext cx="733044" cy="178308"/>
-          </a:xfrm>
-          <a:prstGeom prst="rect">
-            <a:avLst/>
-          </a:prstGeom>
-        </p:spPr>
-      </p:pic>
-      <p:pic>
-        <p:nvPicPr>
-          <p:cNvPr id="103" name="Image 47" descr="/home/ahmed/Projects/ai_llm_slides/videos/deep-learning/002_transformers_part2/recreated_pptx/build/assets/r1_s12.png">    </p:cNvPr>
-          <p:cNvPicPr>
-            <a:picLocks noChangeAspect="1"/>
-          </p:cNvPicPr>
-          <p:nvPr/>
-        </p:nvPicPr>
-        <p:blipFill>
-          <a:blip r:embed="rId48"/>
-          <a:stretch>
-            <a:fillRect/>
-          </a:stretch>
-        </p:blipFill>
-        <p:spPr>
-          <a:xfrm>
-            <a:off x="8547608" y="3378708"/>
-            <a:ext cx="589788" cy="196596"/>
-          </a:xfrm>
-          <a:prstGeom prst="rect">
-            <a:avLst/>
-          </a:prstGeom>
-        </p:spPr>
-      </p:pic>
-      <p:pic>
-        <p:nvPicPr>
-          <p:cNvPr id="104" name="Image 48" descr="/home/ahmed/Projects/ai_llm_slides/videos/deep-learning/002_transformers_part2/recreated_pptx/build/assets/r1_s13.png">    </p:cNvPr>
-          <p:cNvPicPr>
-            <a:picLocks noChangeAspect="1"/>
-          </p:cNvPicPr>
-          <p:nvPr/>
-        </p:nvPicPr>
-        <p:blipFill>
-          <a:blip r:embed="rId49"/>
-          <a:stretch>
-            <a:fillRect/>
-          </a:stretch>
-        </p:blipFill>
-        <p:spPr>
-          <a:xfrm>
-            <a:off x="9169908" y="3378708"/>
-            <a:ext cx="179832" cy="272796"/>
-          </a:xfrm>
-          <a:prstGeom prst="rect">
-            <a:avLst/>
-          </a:prstGeom>
-        </p:spPr>
-      </p:pic>
-      <p:pic>
-        <p:nvPicPr>
-          <p:cNvPr id="105" name="Image 49" descr="/home/ahmed/Projects/ai_llm_slides/videos/deep-learning/002_transformers_part2/recreated_pptx/build/assets/dR7_s1.png">    </p:cNvPr>
-          <p:cNvPicPr>
-            <a:picLocks noChangeAspect="1"/>
-          </p:cNvPicPr>
-          <p:nvPr/>
-        </p:nvPicPr>
-        <p:blipFill>
-          <a:blip r:embed="rId50"/>
-          <a:stretch>
-            <a:fillRect/>
-          </a:stretch>
-        </p:blipFill>
-        <p:spPr>
-          <a:xfrm>
-            <a:off x="965708" y="5994908"/>
-            <a:ext cx="679704" cy="228600"/>
-          </a:xfrm>
-          <a:prstGeom prst="rect">
-            <a:avLst/>
-          </a:prstGeom>
-        </p:spPr>
-      </p:pic>
-      <p:pic>
-        <p:nvPicPr>
-          <p:cNvPr id="106" name="Image 50" descr="/home/ahmed/Projects/ai_llm_slides/videos/deep-learning/002_transformers_part2/recreated_pptx/build/assets/dR7_s2.png">    </p:cNvPr>
-          <p:cNvPicPr>
-            <a:picLocks noChangeAspect="1"/>
-          </p:cNvPicPr>
-          <p:nvPr/>
-        </p:nvPicPr>
-        <p:blipFill>
-          <a:blip r:embed="rId51"/>
-          <a:stretch>
-            <a:fillRect/>
-          </a:stretch>
-        </p:blipFill>
-        <p:spPr>
-          <a:xfrm>
-            <a:off x="1715008" y="5994908"/>
-            <a:ext cx="1507236" cy="195072"/>
-          </a:xfrm>
-          <a:prstGeom prst="rect">
-            <a:avLst/>
-          </a:prstGeom>
-        </p:spPr>
-      </p:pic>
-      <p:pic>
-        <p:nvPicPr>
-          <p:cNvPr id="107" name="Image 51" descr="/home/ahmed/Projects/ai_llm_slides/videos/deep-learning/002_transformers_part2/recreated_pptx/build/assets/dR7_s3.png">    </p:cNvPr>
-          <p:cNvPicPr>
-            <a:picLocks noChangeAspect="1"/>
-          </p:cNvPicPr>
-          <p:nvPr/>
-        </p:nvPicPr>
-        <p:blipFill>
-          <a:blip r:embed="rId52"/>
-          <a:stretch>
-            <a:fillRect/>
-          </a:stretch>
-        </p:blipFill>
-        <p:spPr>
-          <a:xfrm>
-            <a:off x="3162808" y="5994908"/>
-            <a:ext cx="640080" cy="231648"/>
-          </a:xfrm>
-          <a:prstGeom prst="rect">
-            <a:avLst/>
-          </a:prstGeom>
-        </p:spPr>
-      </p:pic>
-      <p:pic>
-        <p:nvPicPr>
-          <p:cNvPr id="108" name="Image 52" descr="/home/ahmed/Projects/ai_llm_slides/videos/deep-learning/002_transformers_part2/recreated_pptx/build/assets/dR7_s4.png">    </p:cNvPr>
-          <p:cNvPicPr>
-            <a:picLocks noChangeAspect="1"/>
-          </p:cNvPicPr>
-          <p:nvPr/>
-        </p:nvPicPr>
-        <p:blipFill>
-          <a:blip r:embed="rId53"/>
-          <a:stretch>
-            <a:fillRect/>
-          </a:stretch>
-        </p:blipFill>
-        <p:spPr>
-          <a:xfrm>
-            <a:off x="3874008" y="5994908"/>
-            <a:ext cx="2674620" cy="181356"/>
-          </a:xfrm>
-          <a:prstGeom prst="rect">
-            <a:avLst/>
-          </a:prstGeom>
-        </p:spPr>
-      </p:pic>
-      <p:pic>
-        <p:nvPicPr>
-          <p:cNvPr id="109" name="Image 53" descr="/home/ahmed/Projects/ai_llm_slides/videos/deep-learning/002_transformers_part2/recreated_pptx/build/assets/dEq.png">    </p:cNvPr>
-          <p:cNvPicPr>
-            <a:picLocks noChangeAspect="1"/>
-          </p:cNvPicPr>
-          <p:nvPr/>
-        </p:nvPicPr>
-        <p:blipFill>
-          <a:blip r:embed="rId54"/>
-          <a:stretch>
-            <a:fillRect/>
-          </a:stretch>
-        </p:blipFill>
-        <p:spPr>
-          <a:xfrm>
-            <a:off x="9728708" y="3429508"/>
-            <a:ext cx="150876" cy="82296"/>
-          </a:xfrm>
-          <a:prstGeom prst="rect">
-            <a:avLst/>
-          </a:prstGeom>
-        </p:spPr>
-      </p:pic>
-      <p:pic>
-        <p:nvPicPr>
-          <p:cNvPr id="110" name="Image 54" descr="/home/ahmed/Projects/ai_llm_slides/videos/deep-learning/002_transformers_part2/recreated_pptx/build/assets/dEq.png">    </p:cNvPr>
-          <p:cNvPicPr>
-            <a:picLocks noChangeAspect="1"/>
-          </p:cNvPicPr>
-          <p:nvPr/>
-        </p:nvPicPr>
-        <p:blipFill>
-          <a:blip r:embed="rId55"/>
-          <a:stretch>
-            <a:fillRect/>
-          </a:stretch>
-        </p:blipFill>
-        <p:spPr>
-          <a:xfrm>
-            <a:off x="9741408" y="3861308"/>
-            <a:ext cx="150876" cy="82296"/>
-          </a:xfrm>
-          <a:prstGeom prst="rect">
-            <a:avLst/>
-          </a:prstGeom>
-        </p:spPr>
-      </p:pic>
-      <p:pic>
-        <p:nvPicPr>
-          <p:cNvPr id="111" name="Image 55" descr="/home/ahmed/Projects/ai_llm_slides/videos/deep-learning/002_transformers_part2/recreated_pptx/build/assets/dEq.png">    </p:cNvPr>
-          <p:cNvPicPr>
-            <a:picLocks noChangeAspect="1"/>
-          </p:cNvPicPr>
-          <p:nvPr/>
-        </p:nvPicPr>
-        <p:blipFill>
-          <a:blip r:embed="rId56"/>
-          <a:stretch>
-            <a:fillRect/>
-          </a:stretch>
-        </p:blipFill>
-        <p:spPr>
-          <a:xfrm>
-            <a:off x="9792208" y="4636008"/>
-            <a:ext cx="150876" cy="82296"/>
-          </a:xfrm>
-          <a:prstGeom prst="rect">
-            <a:avLst/>
-          </a:prstGeom>
-        </p:spPr>
-      </p:pic>
-      <p:pic>
-        <p:nvPicPr>
-          <p:cNvPr id="112" name="Image 56" descr="/home/ahmed/Projects/ai_llm_slides/videos/deep-learning/002_transformers_part2/recreated_pptx/build/assets/dEq.png">    </p:cNvPr>
-          <p:cNvPicPr>
-            <a:picLocks noChangeAspect="1"/>
-          </p:cNvPicPr>
-          <p:nvPr/>
-        </p:nvPicPr>
-        <p:blipFill>
-          <a:blip r:embed="rId57"/>
-          <a:stretch>
-            <a:fillRect/>
-          </a:stretch>
-        </p:blipFill>
-        <p:spPr>
-          <a:xfrm>
-            <a:off x="9817608" y="5105908"/>
-            <a:ext cx="150876" cy="82296"/>
-          </a:xfrm>
-          <a:prstGeom prst="rect">
-            <a:avLst/>
-          </a:prstGeom>
-        </p:spPr>
-      </p:pic>
-      <p:pic>
-        <p:nvPicPr>
-          <p:cNvPr id="113" name="Image 57" descr="/home/ahmed/Projects/ai_llm_slides/videos/deep-learning/002_transformers_part2/recreated_pptx/build/assets/dEq.png">    </p:cNvPr>
-          <p:cNvPicPr>
-            <a:picLocks noChangeAspect="1"/>
-          </p:cNvPicPr>
-          <p:nvPr/>
-        </p:nvPicPr>
-        <p:blipFill>
-          <a:blip r:embed="rId58"/>
-          <a:stretch>
-            <a:fillRect/>
-          </a:stretch>
-        </p:blipFill>
-        <p:spPr>
-          <a:xfrm>
-            <a:off x="9830308" y="5537708"/>
-            <a:ext cx="150876" cy="82296"/>
-          </a:xfrm>
-          <a:prstGeom prst="rect">
-            <a:avLst/>
-          </a:prstGeom>
-        </p:spPr>
-      </p:pic>
+      <mc:AlternateContent>
+        <mc:Choice xmlns:a14="http://schemas.microsoft.com/office/drawing/2010/main" Requires="a14">
+          <p:sp>
+            <p:nvSpPr>
+              <p:cNvPr id="56" name="Equation OMML" descr="\mathrm{sin}(\omega t)"/>
+              <p:cNvSpPr txBox="1"/>
+              <p:nvPr/>
+            </p:nvSpPr>
+            <p:spPr>
+              <a:xfrm>
+                <a:off x="1257808" y="953008"/>
+                <a:ext cx="734568" cy="216408"/>
+              </a:xfrm>
+              <a:prstGeom prst="rect">
+                <a:avLst/>
+              </a:prstGeom>
+              <a:noFill/>
+            </p:spPr>
+            <p:txBody>
+              <a:bodyPr lIns="0" tIns="0" rIns="0" bIns="0" anchor="ctr">
+                <a:noAutofit/>
+              </a:bodyPr>
+              <a:lstStyle/>
+              <a:p>
+                <a:pPr algn="ctr">
+                  <a:buNone/>
+                </a:pPr>
+                <a14:m>
+                  <m:oMathPara xmlns:m="http://schemas.openxmlformats.org/officeDocument/2006/math" xmlns:a="http://schemas.openxmlformats.org/drawingml/2006/main">
+                    <m:oMathParaPr>
+                      <m:jc m:val="centerGroup"/>
+                    </m:oMathParaPr>
+                    <m:oMath xmlns:m="http://schemas.openxmlformats.org/officeDocument/2006/math">
+                      <m:r>
+                        <m:rPr>
+                          <m:sty m:val="p"/>
+                        </m:rPr>
+                        <a:rPr lang="en-US" i="0" smtClean="0" sz="1697">
+                          <a:solidFill>
+                            <a:srgbClr val="C00000"/>
+                          </a:solidFill>
+                          <a:latin typeface="Cambria Math" panose="02040503050406030204" pitchFamily="18" charset="0"/>
+                        </a:rPr>
+                        <m:t xml:space="preserve">sin</m:t>
+                      </m:r>
+                      <m:r>
+                        <a:rPr lang="en-US" i="1" smtClean="0" sz="1697">
+                          <a:solidFill>
+                            <a:srgbClr val="C00000"/>
+                          </a:solidFill>
+                          <a:latin typeface="Cambria Math" panose="02040503050406030204" pitchFamily="18" charset="0"/>
+                        </a:rPr>
+                        <m:t xml:space="preserve">(ωt)</m:t>
+                      </m:r>
+                    </m:oMath>
+                  </m:oMathPara>
+                </a14:m>
+                <a:endParaRPr lang="en-US" dirty="0"/>
+              </a:p>
+            </p:txBody>
+          </p:sp>
+        </mc:Choice>
+        <mc:Fallback>
+          <p:pic>
+            <p:nvPicPr>
+              <p:cNvPr id="56" name="Image 0" descr="/home/ahmed/Projects/ai_llm_slides/videos/deep-learning/002_transformers_part2/recreated_pptx/build/assets/lv1_r1.png">    </p:cNvPr>
+              <p:cNvPicPr>
+                <a:picLocks noChangeAspect="1"/>
+              </p:cNvPicPr>
+              <p:nvPr/>
+            </p:nvPicPr>
+            <p:blipFill>
+              <a:blip r:embed="rId1"/>
+              <a:stretch>
+                <a:fillRect/>
+              </a:stretch>
+            </p:blipFill>
+            <p:spPr>
+              <a:xfrm>
+                <a:off x="1257808" y="953008"/>
+                <a:ext cx="734568" cy="216408"/>
+              </a:xfrm>
+              <a:prstGeom prst="rect">
+                <a:avLst/>
+              </a:prstGeom>
+            </p:spPr>
+          </p:pic>
+        </mc:Fallback>
+      </mc:AlternateContent>
+      <mc:AlternateContent>
+        <mc:Choice xmlns:a14="http://schemas.microsoft.com/office/drawing/2010/main" Requires="a14">
+          <p:sp>
+            <p:nvSpPr>
+              <p:cNvPr id="57" name="Equation OMML" descr="\mathrm{cos}(\omega t)"/>
+              <p:cNvSpPr txBox="1"/>
+              <p:nvPr/>
+            </p:nvSpPr>
+            <p:spPr>
+              <a:xfrm>
+                <a:off x="1257808" y="1384808"/>
+                <a:ext cx="774192" cy="213360"/>
+              </a:xfrm>
+              <a:prstGeom prst="rect">
+                <a:avLst/>
+              </a:prstGeom>
+              <a:noFill/>
+            </p:spPr>
+            <p:txBody>
+              <a:bodyPr lIns="0" tIns="0" rIns="0" bIns="0" anchor="ctr">
+                <a:noAutofit/>
+              </a:bodyPr>
+              <a:lstStyle/>
+              <a:p>
+                <a:pPr algn="ctr">
+                  <a:buNone/>
+                </a:pPr>
+                <a14:m>
+                  <m:oMathPara xmlns:m="http://schemas.openxmlformats.org/officeDocument/2006/math" xmlns:a="http://schemas.openxmlformats.org/drawingml/2006/main">
+                    <m:oMathParaPr>
+                      <m:jc m:val="centerGroup"/>
+                    </m:oMathParaPr>
+                    <m:oMath xmlns:m="http://schemas.openxmlformats.org/officeDocument/2006/math">
+                      <m:r>
+                        <m:rPr>
+                          <m:sty m:val="p"/>
+                        </m:rPr>
+                        <a:rPr lang="en-US" i="0" smtClean="0" sz="1665">
+                          <a:solidFill>
+                            <a:srgbClr val="C00000"/>
+                          </a:solidFill>
+                          <a:latin typeface="Cambria Math" panose="02040503050406030204" pitchFamily="18" charset="0"/>
+                        </a:rPr>
+                        <m:t xml:space="preserve">cos</m:t>
+                      </m:r>
+                      <m:r>
+                        <a:rPr lang="en-US" i="1" smtClean="0" sz="1665">
+                          <a:solidFill>
+                            <a:srgbClr val="C00000"/>
+                          </a:solidFill>
+                          <a:latin typeface="Cambria Math" panose="02040503050406030204" pitchFamily="18" charset="0"/>
+                        </a:rPr>
+                        <m:t xml:space="preserve">(ωt)</m:t>
+                      </m:r>
+                    </m:oMath>
+                  </m:oMathPara>
+                </a14:m>
+                <a:endParaRPr lang="en-US" dirty="0"/>
+              </a:p>
+            </p:txBody>
+          </p:sp>
+        </mc:Choice>
+        <mc:Fallback>
+          <p:pic>
+            <p:nvPicPr>
+              <p:cNvPr id="57" name="Image 1" descr="/home/ahmed/Projects/ai_llm_slides/videos/deep-learning/002_transformers_part2/recreated_pptx/build/assets/lv1_r2.png">    </p:cNvPr>
+              <p:cNvPicPr>
+                <a:picLocks noChangeAspect="1"/>
+              </p:cNvPicPr>
+              <p:nvPr/>
+            </p:nvPicPr>
+            <p:blipFill>
+              <a:blip r:embed="rId2"/>
+              <a:stretch>
+                <a:fillRect/>
+              </a:stretch>
+            </p:blipFill>
+            <p:spPr>
+              <a:xfrm>
+                <a:off x="1257808" y="1384808"/>
+                <a:ext cx="774192" cy="213360"/>
+              </a:xfrm>
+              <a:prstGeom prst="rect">
+                <a:avLst/>
+              </a:prstGeom>
+            </p:spPr>
+          </p:pic>
+        </mc:Fallback>
+      </mc:AlternateContent>
+      <mc:AlternateContent>
+        <mc:Choice xmlns:a14="http://schemas.microsoft.com/office/drawing/2010/main" Requires="a14">
+          <p:sp>
+            <p:nvSpPr>
+              <p:cNvPr id="58" name="Equation OMML" descr="\mathrm{sin}(a)"/>
+              <p:cNvSpPr txBox="1"/>
+              <p:nvPr/>
+            </p:nvSpPr>
+            <p:spPr>
+              <a:xfrm>
+                <a:off x="1410208" y="1892808"/>
+                <a:ext cx="557784" cy="202692"/>
+              </a:xfrm>
+              <a:prstGeom prst="rect">
+                <a:avLst/>
+              </a:prstGeom>
+              <a:noFill/>
+            </p:spPr>
+            <p:txBody>
+              <a:bodyPr lIns="0" tIns="0" rIns="0" bIns="0" anchor="ctr">
+                <a:noAutofit/>
+              </a:bodyPr>
+              <a:lstStyle/>
+              <a:p>
+                <a:pPr algn="ctr">
+                  <a:buNone/>
+                </a:pPr>
+                <a14:m>
+                  <m:oMathPara xmlns:m="http://schemas.openxmlformats.org/officeDocument/2006/math" xmlns:a="http://schemas.openxmlformats.org/drawingml/2006/main">
+                    <m:oMathParaPr>
+                      <m:jc m:val="centerGroup"/>
+                    </m:oMathParaPr>
+                    <m:oMath xmlns:m="http://schemas.openxmlformats.org/officeDocument/2006/math">
+                      <m:r>
+                        <m:rPr>
+                          <m:sty m:val="p"/>
+                        </m:rPr>
+                        <a:rPr lang="en-US" i="0" smtClean="0" sz="1568">
+                          <a:solidFill>
+                            <a:srgbClr val="C00000"/>
+                          </a:solidFill>
+                          <a:latin typeface="Cambria Math" panose="02040503050406030204" pitchFamily="18" charset="0"/>
+                        </a:rPr>
+                        <m:t xml:space="preserve">sin</m:t>
+                      </m:r>
+                      <m:r>
+                        <a:rPr lang="en-US" i="1" smtClean="0" sz="1568">
+                          <a:solidFill>
+                            <a:srgbClr val="C00000"/>
+                          </a:solidFill>
+                          <a:latin typeface="Cambria Math" panose="02040503050406030204" pitchFamily="18" charset="0"/>
+                        </a:rPr>
+                        <m:t xml:space="preserve">(a)</m:t>
+                      </m:r>
+                    </m:oMath>
+                  </m:oMathPara>
+                </a14:m>
+                <a:endParaRPr lang="en-US" dirty="0"/>
+              </a:p>
+            </p:txBody>
+          </p:sp>
+        </mc:Choice>
+        <mc:Fallback>
+          <p:pic>
+            <p:nvPicPr>
+              <p:cNvPr id="58" name="Image 2" descr="/home/ahmed/Projects/ai_llm_slides/videos/deep-learning/002_transformers_part2/recreated_pptx/build/assets/lv2_r1.png">    </p:cNvPr>
+              <p:cNvPicPr>
+                <a:picLocks noChangeAspect="1"/>
+              </p:cNvPicPr>
+              <p:nvPr/>
+            </p:nvPicPr>
+            <p:blipFill>
+              <a:blip r:embed="rId3"/>
+              <a:stretch>
+                <a:fillRect/>
+              </a:stretch>
+            </p:blipFill>
+            <p:spPr>
+              <a:xfrm>
+                <a:off x="1410208" y="1892808"/>
+                <a:ext cx="557784" cy="202692"/>
+              </a:xfrm>
+              <a:prstGeom prst="rect">
+                <a:avLst/>
+              </a:prstGeom>
+            </p:spPr>
+          </p:pic>
+        </mc:Fallback>
+      </mc:AlternateContent>
+      <mc:AlternateContent>
+        <mc:Choice xmlns:a14="http://schemas.microsoft.com/office/drawing/2010/main" Requires="a14">
+          <p:sp>
+            <p:nvSpPr>
+              <p:cNvPr id="59" name="Equation OMML" descr="\mathrm{cos}(a)"/>
+              <p:cNvSpPr txBox="1"/>
+              <p:nvPr/>
+            </p:nvSpPr>
+            <p:spPr>
+              <a:xfrm>
+                <a:off x="1410208" y="2350008"/>
+                <a:ext cx="615696" cy="204216"/>
+              </a:xfrm>
+              <a:prstGeom prst="rect">
+                <a:avLst/>
+              </a:prstGeom>
+              <a:noFill/>
+            </p:spPr>
+            <p:txBody>
+              <a:bodyPr lIns="0" tIns="0" rIns="0" bIns="0" anchor="ctr">
+                <a:noAutofit/>
+              </a:bodyPr>
+              <a:lstStyle/>
+              <a:p>
+                <a:pPr algn="ctr">
+                  <a:buNone/>
+                </a:pPr>
+                <a14:m>
+                  <m:oMathPara xmlns:m="http://schemas.openxmlformats.org/officeDocument/2006/math" xmlns:a="http://schemas.openxmlformats.org/drawingml/2006/main">
+                    <m:oMathParaPr>
+                      <m:jc m:val="centerGroup"/>
+                    </m:oMathParaPr>
+                    <m:oMath xmlns:m="http://schemas.openxmlformats.org/officeDocument/2006/math">
+                      <m:r>
+                        <m:rPr>
+                          <m:sty m:val="p"/>
+                        </m:rPr>
+                        <a:rPr lang="en-US" i="0" smtClean="0" sz="1586">
+                          <a:solidFill>
+                            <a:srgbClr val="C00000"/>
+                          </a:solidFill>
+                          <a:latin typeface="Cambria Math" panose="02040503050406030204" pitchFamily="18" charset="0"/>
+                        </a:rPr>
+                        <m:t xml:space="preserve">cos</m:t>
+                      </m:r>
+                      <m:r>
+                        <a:rPr lang="en-US" i="1" smtClean="0" sz="1586">
+                          <a:solidFill>
+                            <a:srgbClr val="C00000"/>
+                          </a:solidFill>
+                          <a:latin typeface="Cambria Math" panose="02040503050406030204" pitchFamily="18" charset="0"/>
+                        </a:rPr>
+                        <m:t xml:space="preserve">(a)</m:t>
+                      </m:r>
+                    </m:oMath>
+                  </m:oMathPara>
+                </a14:m>
+                <a:endParaRPr lang="en-US" dirty="0"/>
+              </a:p>
+            </p:txBody>
+          </p:sp>
+        </mc:Choice>
+        <mc:Fallback>
+          <p:pic>
+            <p:nvPicPr>
+              <p:cNvPr id="59" name="Image 3" descr="/home/ahmed/Projects/ai_llm_slides/videos/deep-learning/002_transformers_part2/recreated_pptx/build/assets/lv2_r2.png">    </p:cNvPr>
+              <p:cNvPicPr>
+                <a:picLocks noChangeAspect="1"/>
+              </p:cNvPicPr>
+              <p:nvPr/>
+            </p:nvPicPr>
+            <p:blipFill>
+              <a:blip r:embed="rId4"/>
+              <a:stretch>
+                <a:fillRect/>
+              </a:stretch>
+            </p:blipFill>
+            <p:spPr>
+              <a:xfrm>
+                <a:off x="1410208" y="2350008"/>
+                <a:ext cx="615696" cy="204216"/>
+              </a:xfrm>
+              <a:prstGeom prst="rect">
+                <a:avLst/>
+              </a:prstGeom>
+            </p:spPr>
+          </p:pic>
+        </mc:Fallback>
+      </mc:AlternateContent>
+      <mc:AlternateContent>
+        <mc:Choice xmlns:a14="http://schemas.microsoft.com/office/drawing/2010/main" Requires="a14">
+          <p:sp>
+            <p:nvSpPr>
+              <p:cNvPr id="60" name="Equation OMML" descr="\mathrm{Sin}\;(\omega(t{+}\delta))"/>
+              <p:cNvSpPr txBox="1"/>
+              <p:nvPr/>
+            </p:nvSpPr>
+            <p:spPr>
+              <a:xfrm>
+                <a:off x="2858008" y="978408"/>
+                <a:ext cx="1246632" cy="208788"/>
+              </a:xfrm>
+              <a:prstGeom prst="rect">
+                <a:avLst/>
+              </a:prstGeom>
+              <a:noFill/>
+            </p:spPr>
+            <p:txBody>
+              <a:bodyPr lIns="0" tIns="0" rIns="0" bIns="0" anchor="ctr">
+                <a:noAutofit/>
+              </a:bodyPr>
+              <a:lstStyle/>
+              <a:p>
+                <a:pPr algn="ctr">
+                  <a:buNone/>
+                </a:pPr>
+                <a14:m>
+                  <m:oMathPara xmlns:m="http://schemas.openxmlformats.org/officeDocument/2006/math" xmlns:a="http://schemas.openxmlformats.org/drawingml/2006/main">
+                    <m:oMathParaPr>
+                      <m:jc m:val="centerGroup"/>
+                    </m:oMathParaPr>
+                    <m:oMath xmlns:m="http://schemas.openxmlformats.org/officeDocument/2006/math">
+                      <m:r>
+                        <m:rPr>
+                          <m:sty m:val="p"/>
+                        </m:rPr>
+                        <a:rPr lang="en-US" i="0" smtClean="0" sz="1631">
+                          <a:solidFill>
+                            <a:srgbClr val="000000"/>
+                          </a:solidFill>
+                          <a:latin typeface="Cambria Math" panose="02040503050406030204" pitchFamily="18" charset="0"/>
+                        </a:rPr>
+                        <m:t xml:space="preserve">Sin</m:t>
+                      </m:r>
+                      <m:r>
+                        <a:rPr lang="en-US" i="1" smtClean="0" sz="1631">
+                          <a:solidFill>
+                            <a:srgbClr val="000000"/>
+                          </a:solidFill>
+                          <a:latin typeface="Cambria Math" panose="02040503050406030204" pitchFamily="18" charset="0"/>
+                        </a:rPr>
+                        <m:t xml:space="preserve"> (ω(t+δ))</m:t>
+                      </m:r>
+                    </m:oMath>
+                  </m:oMathPara>
+                </a14:m>
+                <a:endParaRPr lang="en-US" dirty="0"/>
+              </a:p>
+            </p:txBody>
+          </p:sp>
+        </mc:Choice>
+        <mc:Fallback>
+          <p:pic>
+            <p:nvPicPr>
+              <p:cNvPr id="60" name="Image 4" descr="/home/ahmed/Projects/ai_llm_slides/videos/deep-learning/002_transformers_part2/recreated_pptx/build/assets/mva_r1.png">    </p:cNvPr>
+              <p:cNvPicPr>
+                <a:picLocks noChangeAspect="1"/>
+              </p:cNvPicPr>
+              <p:nvPr/>
+            </p:nvPicPr>
+            <p:blipFill>
+              <a:blip r:embed="rId5"/>
+              <a:stretch>
+                <a:fillRect/>
+              </a:stretch>
+            </p:blipFill>
+            <p:spPr>
+              <a:xfrm>
+                <a:off x="2858008" y="978408"/>
+                <a:ext cx="1246632" cy="208788"/>
+              </a:xfrm>
+              <a:prstGeom prst="rect">
+                <a:avLst/>
+              </a:prstGeom>
+            </p:spPr>
+          </p:pic>
+        </mc:Fallback>
+      </mc:AlternateContent>
+      <mc:AlternateContent>
+        <mc:Choice xmlns:a14="http://schemas.microsoft.com/office/drawing/2010/main" Requires="a14">
+          <p:sp>
+            <p:nvSpPr>
+              <p:cNvPr id="61" name="Equation OMML" descr="\mathrm{cos}\,(\omega(t{+}\delta))"/>
+              <p:cNvSpPr txBox="1"/>
+              <p:nvPr/>
+            </p:nvSpPr>
+            <p:spPr>
+              <a:xfrm>
+                <a:off x="2858008" y="1410208"/>
+                <a:ext cx="1211580" cy="202692"/>
+              </a:xfrm>
+              <a:prstGeom prst="rect">
+                <a:avLst/>
+              </a:prstGeom>
+              <a:noFill/>
+            </p:spPr>
+            <p:txBody>
+              <a:bodyPr lIns="0" tIns="0" rIns="0" bIns="0" anchor="ctr">
+                <a:noAutofit/>
+              </a:bodyPr>
+              <a:lstStyle/>
+              <a:p>
+                <a:pPr algn="ctr">
+                  <a:buNone/>
+                </a:pPr>
+                <a14:m>
+                  <m:oMathPara xmlns:m="http://schemas.openxmlformats.org/officeDocument/2006/math" xmlns:a="http://schemas.openxmlformats.org/drawingml/2006/main">
+                    <m:oMathParaPr>
+                      <m:jc m:val="centerGroup"/>
+                    </m:oMathParaPr>
+                    <m:oMath xmlns:m="http://schemas.openxmlformats.org/officeDocument/2006/math">
+                      <m:r>
+                        <m:rPr>
+                          <m:sty m:val="p"/>
+                        </m:rPr>
+                        <a:rPr lang="en-US" i="0" smtClean="0" sz="1574">
+                          <a:solidFill>
+                            <a:srgbClr val="000000"/>
+                          </a:solidFill>
+                          <a:latin typeface="Cambria Math" panose="02040503050406030204" pitchFamily="18" charset="0"/>
+                        </a:rPr>
+                        <m:t xml:space="preserve">cos</m:t>
+                      </m:r>
+                      <m:r>
+                        <a:rPr lang="en-US" i="1" smtClean="0" sz="1574">
+                          <a:solidFill>
+                            <a:srgbClr val="000000"/>
+                          </a:solidFill>
+                          <a:latin typeface="Cambria Math" panose="02040503050406030204" pitchFamily="18" charset="0"/>
+                        </a:rPr>
+                        <m:t xml:space="preserve"> (ω(t+δ))</m:t>
+                      </m:r>
+                    </m:oMath>
+                  </m:oMathPara>
+                </a14:m>
+                <a:endParaRPr lang="en-US" dirty="0"/>
+              </a:p>
+            </p:txBody>
+          </p:sp>
+        </mc:Choice>
+        <mc:Fallback>
+          <p:pic>
+            <p:nvPicPr>
+              <p:cNvPr id="61" name="Image 5" descr="/home/ahmed/Projects/ai_llm_slides/videos/deep-learning/002_transformers_part2/recreated_pptx/build/assets/mva_r2.png">    </p:cNvPr>
+              <p:cNvPicPr>
+                <a:picLocks noChangeAspect="1"/>
+              </p:cNvPicPr>
+              <p:nvPr/>
+            </p:nvPicPr>
+            <p:blipFill>
+              <a:blip r:embed="rId6"/>
+              <a:stretch>
+                <a:fillRect/>
+              </a:stretch>
+            </p:blipFill>
+            <p:spPr>
+              <a:xfrm>
+                <a:off x="2858008" y="1410208"/>
+                <a:ext cx="1211580" cy="202692"/>
+              </a:xfrm>
+              <a:prstGeom prst="rect">
+                <a:avLst/>
+              </a:prstGeom>
+            </p:spPr>
+          </p:pic>
+        </mc:Fallback>
+      </mc:AlternateContent>
+      <mc:AlternateContent>
+        <mc:Choice xmlns:a14="http://schemas.microsoft.com/office/drawing/2010/main" Requires="a14">
+          <p:sp>
+            <p:nvSpPr>
+              <p:cNvPr id="62" name="Equation OMML" descr="="/>
+              <p:cNvSpPr txBox="1"/>
+              <p:nvPr/>
+            </p:nvSpPr>
+            <p:spPr>
+              <a:xfrm>
+                <a:off x="4407408" y="1397508"/>
+                <a:ext cx="201168" cy="103632"/>
+              </a:xfrm>
+              <a:prstGeom prst="rect">
+                <a:avLst/>
+              </a:prstGeom>
+              <a:noFill/>
+            </p:spPr>
+            <p:txBody>
+              <a:bodyPr lIns="0" tIns="0" rIns="0" bIns="0" anchor="ctr">
+                <a:noAutofit/>
+              </a:bodyPr>
+              <a:lstStyle/>
+              <a:p>
+                <a:pPr algn="ctr">
+                  <a:buNone/>
+                </a:pPr>
+                <a14:m>
+                  <m:oMathPara xmlns:m="http://schemas.openxmlformats.org/officeDocument/2006/math" xmlns:a="http://schemas.openxmlformats.org/drawingml/2006/main">
+                    <m:oMathParaPr>
+                      <m:jc m:val="centerGroup"/>
+                    </m:oMathParaPr>
+                    <m:oMath xmlns:m="http://schemas.openxmlformats.org/officeDocument/2006/math">
+                      <m:r>
+                        <a:rPr lang="en-US" i="1" smtClean="0" sz="2213">
+                          <a:solidFill>
+                            <a:srgbClr val="000000"/>
+                          </a:solidFill>
+                          <a:latin typeface="Cambria Math" panose="02040503050406030204" pitchFamily="18" charset="0"/>
+                        </a:rPr>
+                        <m:t xml:space="preserve">=</m:t>
+                      </m:r>
+                    </m:oMath>
+                  </m:oMathPara>
+                </a14:m>
+                <a:endParaRPr lang="en-US" dirty="0"/>
+              </a:p>
+            </p:txBody>
+          </p:sp>
+        </mc:Choice>
+        <mc:Fallback>
+          <p:pic>
+            <p:nvPicPr>
+              <p:cNvPr id="62" name="Image 6" descr="/home/ahmed/Projects/ai_llm_slides/videos/deep-learning/002_transformers_part2/recreated_pptx/build/assets/dEqMid.png">    </p:cNvPr>
+              <p:cNvPicPr>
+                <a:picLocks noChangeAspect="1"/>
+              </p:cNvPicPr>
+              <p:nvPr/>
+            </p:nvPicPr>
+            <p:blipFill>
+              <a:blip r:embed="rId7"/>
+              <a:stretch>
+                <a:fillRect/>
+              </a:stretch>
+            </p:blipFill>
+            <p:spPr>
+              <a:xfrm>
+                <a:off x="4407408" y="1397508"/>
+                <a:ext cx="201168" cy="103632"/>
+              </a:xfrm>
+              <a:prstGeom prst="rect">
+                <a:avLst/>
+              </a:prstGeom>
+            </p:spPr>
+          </p:pic>
+        </mc:Fallback>
+      </mc:AlternateContent>
+      <mc:AlternateContent>
+        <mc:Choice xmlns:a14="http://schemas.microsoft.com/office/drawing/2010/main" Requires="a14">
+          <p:sp>
+            <p:nvSpPr>
+              <p:cNvPr id="63" name="Equation OMML" descr="\mathrm{sin}(\omega t)"/>
+              <p:cNvSpPr txBox="1"/>
+              <p:nvPr/>
+            </p:nvSpPr>
+            <p:spPr>
+              <a:xfrm>
+                <a:off x="4699508" y="1016508"/>
+                <a:ext cx="710184" cy="208788"/>
+              </a:xfrm>
+              <a:prstGeom prst="rect">
+                <a:avLst/>
+              </a:prstGeom>
+              <a:noFill/>
+            </p:spPr>
+            <p:txBody>
+              <a:bodyPr lIns="0" tIns="0" rIns="0" bIns="0" anchor="ctr">
+                <a:noAutofit/>
+              </a:bodyPr>
+              <a:lstStyle/>
+              <a:p>
+                <a:pPr algn="ctr">
+                  <a:buNone/>
+                </a:pPr>
+                <a14:m>
+                  <m:oMathPara xmlns:m="http://schemas.openxmlformats.org/officeDocument/2006/math" xmlns:a="http://schemas.openxmlformats.org/drawingml/2006/main">
+                    <m:oMathParaPr>
+                      <m:jc m:val="centerGroup"/>
+                    </m:oMathParaPr>
+                    <m:oMath xmlns:m="http://schemas.openxmlformats.org/officeDocument/2006/math">
+                      <m:r>
+                        <m:rPr>
+                          <m:sty m:val="p"/>
+                        </m:rPr>
+                        <a:rPr lang="en-US" i="0" smtClean="0" sz="1637">
+                          <a:solidFill>
+                            <a:srgbClr val="C00000"/>
+                          </a:solidFill>
+                          <a:latin typeface="Cambria Math" panose="02040503050406030204" pitchFamily="18" charset="0"/>
+                        </a:rPr>
+                        <m:t xml:space="preserve">sin</m:t>
+                      </m:r>
+                      <m:r>
+                        <a:rPr lang="en-US" i="1" smtClean="0" sz="1637">
+                          <a:solidFill>
+                            <a:srgbClr val="C00000"/>
+                          </a:solidFill>
+                          <a:latin typeface="Cambria Math" panose="02040503050406030204" pitchFamily="18" charset="0"/>
+                        </a:rPr>
+                        <m:t xml:space="preserve">(ωt)</m:t>
+                      </m:r>
+                    </m:oMath>
+                  </m:oMathPara>
+                </a14:m>
+                <a:endParaRPr lang="en-US" dirty="0"/>
+              </a:p>
+            </p:txBody>
+          </p:sp>
+        </mc:Choice>
+        <mc:Fallback>
+          <p:pic>
+            <p:nvPicPr>
+              <p:cNvPr id="63" name="Image 7" descr="/home/ahmed/Projects/ai_llm_slides/videos/deep-learning/002_transformers_part2/recreated_pptx/build/assets/mvb1_s1.png">    </p:cNvPr>
+              <p:cNvPicPr>
+                <a:picLocks noChangeAspect="1"/>
+              </p:cNvPicPr>
+              <p:nvPr/>
+            </p:nvPicPr>
+            <p:blipFill>
+              <a:blip r:embed="rId8"/>
+              <a:stretch>
+                <a:fillRect/>
+              </a:stretch>
+            </p:blipFill>
+            <p:spPr>
+              <a:xfrm>
+                <a:off x="4699508" y="1016508"/>
+                <a:ext cx="710184" cy="208788"/>
+              </a:xfrm>
+              <a:prstGeom prst="rect">
+                <a:avLst/>
+              </a:prstGeom>
+            </p:spPr>
+          </p:pic>
+        </mc:Fallback>
+      </mc:AlternateContent>
+      <mc:AlternateContent>
+        <mc:Choice xmlns:a14="http://schemas.microsoft.com/office/drawing/2010/main" Requires="a14">
+          <p:sp>
+            <p:nvSpPr>
+              <p:cNvPr id="64" name="Equation OMML" descr="\mathrm{cos}(\omega \delta)"/>
+              <p:cNvSpPr txBox="1"/>
+              <p:nvPr/>
+            </p:nvSpPr>
+            <p:spPr>
+              <a:xfrm>
+                <a:off x="5499608" y="1016508"/>
+                <a:ext cx="829056" cy="214884"/>
+              </a:xfrm>
+              <a:prstGeom prst="rect">
+                <a:avLst/>
+              </a:prstGeom>
+              <a:noFill/>
+            </p:spPr>
+            <p:txBody>
+              <a:bodyPr lIns="0" tIns="0" rIns="0" bIns="0" anchor="ctr">
+                <a:noAutofit/>
+              </a:bodyPr>
+              <a:lstStyle/>
+              <a:p>
+                <a:pPr algn="ctr">
+                  <a:buNone/>
+                </a:pPr>
+                <a14:m>
+                  <m:oMathPara xmlns:m="http://schemas.openxmlformats.org/officeDocument/2006/math" xmlns:a="http://schemas.openxmlformats.org/drawingml/2006/main">
+                    <m:oMathParaPr>
+                      <m:jc m:val="centerGroup"/>
+                    </m:oMathParaPr>
+                    <m:oMath xmlns:m="http://schemas.openxmlformats.org/officeDocument/2006/math">
+                      <m:r>
+                        <m:rPr>
+                          <m:sty m:val="p"/>
+                        </m:rPr>
+                        <a:rPr lang="en-US" i="0" smtClean="0" sz="1679">
+                          <a:solidFill>
+                            <a:srgbClr val="0000CC"/>
+                          </a:solidFill>
+                          <a:latin typeface="Cambria Math" panose="02040503050406030204" pitchFamily="18" charset="0"/>
+                        </a:rPr>
+                        <m:t xml:space="preserve">cos</m:t>
+                      </m:r>
+                      <m:r>
+                        <a:rPr lang="en-US" i="1" smtClean="0" sz="1679">
+                          <a:solidFill>
+                            <a:srgbClr val="0000CC"/>
+                          </a:solidFill>
+                          <a:latin typeface="Cambria Math" panose="02040503050406030204" pitchFamily="18" charset="0"/>
+                        </a:rPr>
+                        <m:t xml:space="preserve">(ωδ)</m:t>
+                      </m:r>
+                    </m:oMath>
+                  </m:oMathPara>
+                </a14:m>
+                <a:endParaRPr lang="en-US" dirty="0"/>
+              </a:p>
+            </p:txBody>
+          </p:sp>
+        </mc:Choice>
+        <mc:Fallback>
+          <p:pic>
+            <p:nvPicPr>
+              <p:cNvPr id="64" name="Image 8" descr="/home/ahmed/Projects/ai_llm_slides/videos/deep-learning/002_transformers_part2/recreated_pptx/build/assets/mvb1_s2.png">    </p:cNvPr>
+              <p:cNvPicPr>
+                <a:picLocks noChangeAspect="1"/>
+              </p:cNvPicPr>
+              <p:nvPr/>
+            </p:nvPicPr>
+            <p:blipFill>
+              <a:blip r:embed="rId9"/>
+              <a:stretch>
+                <a:fillRect/>
+              </a:stretch>
+            </p:blipFill>
+            <p:spPr>
+              <a:xfrm>
+                <a:off x="5499608" y="1016508"/>
+                <a:ext cx="829056" cy="214884"/>
+              </a:xfrm>
+              <a:prstGeom prst="rect">
+                <a:avLst/>
+              </a:prstGeom>
+            </p:spPr>
+          </p:pic>
+        </mc:Fallback>
+      </mc:AlternateContent>
+      <mc:AlternateContent>
+        <mc:Choice xmlns:a14="http://schemas.microsoft.com/office/drawing/2010/main" Requires="a14">
+          <p:sp>
+            <p:nvSpPr>
+              <p:cNvPr id="65" name="Equation OMML" descr="+"/>
+              <p:cNvSpPr txBox="1"/>
+              <p:nvPr/>
+            </p:nvSpPr>
+            <p:spPr>
+              <a:xfrm>
+                <a:off x="6426708" y="1054608"/>
+                <a:ext cx="124968" cy="126492"/>
+              </a:xfrm>
+              <a:prstGeom prst="rect">
+                <a:avLst/>
+              </a:prstGeom>
+              <a:noFill/>
+            </p:spPr>
+            <p:txBody>
+              <a:bodyPr lIns="0" tIns="0" rIns="0" bIns="0" anchor="ctr">
+                <a:noAutofit/>
+              </a:bodyPr>
+              <a:lstStyle/>
+              <a:p>
+                <a:pPr algn="ctr">
+                  <a:buNone/>
+                </a:pPr>
+                <a14:m>
+                  <m:oMathPara xmlns:m="http://schemas.openxmlformats.org/officeDocument/2006/math" xmlns:a="http://schemas.openxmlformats.org/drawingml/2006/main">
+                    <m:oMathParaPr>
+                      <m:jc m:val="centerGroup"/>
+                    </m:oMathParaPr>
+                    <m:oMath xmlns:m="http://schemas.openxmlformats.org/officeDocument/2006/math">
+                      <m:r>
+                        <a:rPr lang="en-US" i="1" smtClean="0" sz="1266">
+                          <a:solidFill>
+                            <a:srgbClr val="000000"/>
+                          </a:solidFill>
+                          <a:latin typeface="Cambria Math" panose="02040503050406030204" pitchFamily="18" charset="0"/>
+                        </a:rPr>
+                        <m:t xml:space="preserve">+</m:t>
+                      </m:r>
+                    </m:oMath>
+                  </m:oMathPara>
+                </a14:m>
+                <a:endParaRPr lang="en-US" dirty="0"/>
+              </a:p>
+            </p:txBody>
+          </p:sp>
+        </mc:Choice>
+        <mc:Fallback>
+          <p:pic>
+            <p:nvPicPr>
+              <p:cNvPr id="65" name="Image 9" descr="/home/ahmed/Projects/ai_llm_slides/videos/deep-learning/002_transformers_part2/recreated_pptx/build/assets/mvb1_s3.png">    </p:cNvPr>
+              <p:cNvPicPr>
+                <a:picLocks noChangeAspect="1"/>
+              </p:cNvPicPr>
+              <p:nvPr/>
+            </p:nvPicPr>
+            <p:blipFill>
+              <a:blip r:embed="rId10"/>
+              <a:stretch>
+                <a:fillRect/>
+              </a:stretch>
+            </p:blipFill>
+            <p:spPr>
+              <a:xfrm>
+                <a:off x="6426708" y="1054608"/>
+                <a:ext cx="124968" cy="126492"/>
+              </a:xfrm>
+              <a:prstGeom prst="rect">
+                <a:avLst/>
+              </a:prstGeom>
+            </p:spPr>
+          </p:pic>
+        </mc:Fallback>
+      </mc:AlternateContent>
+      <mc:AlternateContent>
+        <mc:Choice xmlns:a14="http://schemas.microsoft.com/office/drawing/2010/main" Requires="a14">
+          <p:sp>
+            <p:nvSpPr>
+              <p:cNvPr id="66" name="Equation OMML" descr="\mathrm{cos}(\omega t)"/>
+              <p:cNvSpPr txBox="1"/>
+              <p:nvPr/>
+            </p:nvSpPr>
+            <p:spPr>
+              <a:xfrm>
+                <a:off x="6642608" y="1016508"/>
+                <a:ext cx="774192" cy="213360"/>
+              </a:xfrm>
+              <a:prstGeom prst="rect">
+                <a:avLst/>
+              </a:prstGeom>
+              <a:noFill/>
+            </p:spPr>
+            <p:txBody>
+              <a:bodyPr lIns="0" tIns="0" rIns="0" bIns="0" anchor="ctr">
+                <a:noAutofit/>
+              </a:bodyPr>
+              <a:lstStyle/>
+              <a:p>
+                <a:pPr algn="ctr">
+                  <a:buNone/>
+                </a:pPr>
+                <a14:m>
+                  <m:oMathPara xmlns:m="http://schemas.openxmlformats.org/officeDocument/2006/math" xmlns:a="http://schemas.openxmlformats.org/drawingml/2006/main">
+                    <m:oMathParaPr>
+                      <m:jc m:val="centerGroup"/>
+                    </m:oMathParaPr>
+                    <m:oMath xmlns:m="http://schemas.openxmlformats.org/officeDocument/2006/math">
+                      <m:r>
+                        <m:rPr>
+                          <m:sty m:val="p"/>
+                        </m:rPr>
+                        <a:rPr lang="en-US" i="0" smtClean="0" sz="1665">
+                          <a:solidFill>
+                            <a:srgbClr val="C00000"/>
+                          </a:solidFill>
+                          <a:latin typeface="Cambria Math" panose="02040503050406030204" pitchFamily="18" charset="0"/>
+                        </a:rPr>
+                        <m:t xml:space="preserve">cos</m:t>
+                      </m:r>
+                      <m:r>
+                        <a:rPr lang="en-US" i="1" smtClean="0" sz="1665">
+                          <a:solidFill>
+                            <a:srgbClr val="C00000"/>
+                          </a:solidFill>
+                          <a:latin typeface="Cambria Math" panose="02040503050406030204" pitchFamily="18" charset="0"/>
+                        </a:rPr>
+                        <m:t xml:space="preserve">(ωt)</m:t>
+                      </m:r>
+                    </m:oMath>
+                  </m:oMathPara>
+                </a14:m>
+                <a:endParaRPr lang="en-US" dirty="0"/>
+              </a:p>
+            </p:txBody>
+          </p:sp>
+        </mc:Choice>
+        <mc:Fallback>
+          <p:pic>
+            <p:nvPicPr>
+              <p:cNvPr id="66" name="Image 10" descr="/home/ahmed/Projects/ai_llm_slides/videos/deep-learning/002_transformers_part2/recreated_pptx/build/assets/mvb1_s4.png">    </p:cNvPr>
+              <p:cNvPicPr>
+                <a:picLocks noChangeAspect="1"/>
+              </p:cNvPicPr>
+              <p:nvPr/>
+            </p:nvPicPr>
+            <p:blipFill>
+              <a:blip r:embed="rId11"/>
+              <a:stretch>
+                <a:fillRect/>
+              </a:stretch>
+            </p:blipFill>
+            <p:spPr>
+              <a:xfrm>
+                <a:off x="6642608" y="1016508"/>
+                <a:ext cx="774192" cy="213360"/>
+              </a:xfrm>
+              <a:prstGeom prst="rect">
+                <a:avLst/>
+              </a:prstGeom>
+            </p:spPr>
+          </p:pic>
+        </mc:Fallback>
+      </mc:AlternateContent>
+      <mc:AlternateContent>
+        <mc:Choice xmlns:a14="http://schemas.microsoft.com/office/drawing/2010/main" Requires="a14">
+          <p:sp>
+            <p:nvSpPr>
+              <p:cNvPr id="67" name="Equation OMML" descr="\mathrm{sin}(\omega \delta)"/>
+              <p:cNvSpPr txBox="1"/>
+              <p:nvPr/>
+            </p:nvSpPr>
+            <p:spPr>
+              <a:xfrm>
+                <a:off x="7506208" y="1016508"/>
+                <a:ext cx="774192" cy="214884"/>
+              </a:xfrm>
+              <a:prstGeom prst="rect">
+                <a:avLst/>
+              </a:prstGeom>
+              <a:noFill/>
+            </p:spPr>
+            <p:txBody>
+              <a:bodyPr lIns="0" tIns="0" rIns="0" bIns="0" anchor="ctr">
+                <a:noAutofit/>
+              </a:bodyPr>
+              <a:lstStyle/>
+              <a:p>
+                <a:pPr algn="ctr">
+                  <a:buNone/>
+                </a:pPr>
+                <a14:m>
+                  <m:oMathPara xmlns:m="http://schemas.openxmlformats.org/officeDocument/2006/math" xmlns:a="http://schemas.openxmlformats.org/drawingml/2006/main">
+                    <m:oMathParaPr>
+                      <m:jc m:val="centerGroup"/>
+                    </m:oMathParaPr>
+                    <m:oMath xmlns:m="http://schemas.openxmlformats.org/officeDocument/2006/math">
+                      <m:r>
+                        <m:rPr>
+                          <m:sty m:val="p"/>
+                        </m:rPr>
+                        <a:rPr lang="en-US" i="0" smtClean="0" sz="1677">
+                          <a:solidFill>
+                            <a:srgbClr val="0000CC"/>
+                          </a:solidFill>
+                          <a:latin typeface="Cambria Math" panose="02040503050406030204" pitchFamily="18" charset="0"/>
+                        </a:rPr>
+                        <m:t xml:space="preserve">sin</m:t>
+                      </m:r>
+                      <m:r>
+                        <a:rPr lang="en-US" i="1" smtClean="0" sz="1677">
+                          <a:solidFill>
+                            <a:srgbClr val="0000CC"/>
+                          </a:solidFill>
+                          <a:latin typeface="Cambria Math" panose="02040503050406030204" pitchFamily="18" charset="0"/>
+                        </a:rPr>
+                        <m:t xml:space="preserve">(ωδ)</m:t>
+                      </m:r>
+                    </m:oMath>
+                  </m:oMathPara>
+                </a14:m>
+                <a:endParaRPr lang="en-US" dirty="0"/>
+              </a:p>
+            </p:txBody>
+          </p:sp>
+        </mc:Choice>
+        <mc:Fallback>
+          <p:pic>
+            <p:nvPicPr>
+              <p:cNvPr id="67" name="Image 11" descr="/home/ahmed/Projects/ai_llm_slides/videos/deep-learning/002_transformers_part2/recreated_pptx/build/assets/mvb1_s5.png">    </p:cNvPr>
+              <p:cNvPicPr>
+                <a:picLocks noChangeAspect="1"/>
+              </p:cNvPicPr>
+              <p:nvPr/>
+            </p:nvPicPr>
+            <p:blipFill>
+              <a:blip r:embed="rId12"/>
+              <a:stretch>
+                <a:fillRect/>
+              </a:stretch>
+            </p:blipFill>
+            <p:spPr>
+              <a:xfrm>
+                <a:off x="7506208" y="1016508"/>
+                <a:ext cx="774192" cy="214884"/>
+              </a:xfrm>
+              <a:prstGeom prst="rect">
+                <a:avLst/>
+              </a:prstGeom>
+            </p:spPr>
+          </p:pic>
+        </mc:Fallback>
+      </mc:AlternateContent>
+      <mc:AlternateContent>
+        <mc:Choice xmlns:a14="http://schemas.microsoft.com/office/drawing/2010/main" Requires="a14">
+          <p:sp>
+            <p:nvSpPr>
+              <p:cNvPr id="68" name="Equation OMML" descr="\mathrm{cos}(\omega t)"/>
+              <p:cNvSpPr txBox="1"/>
+              <p:nvPr/>
+            </p:nvSpPr>
+            <p:spPr>
+              <a:xfrm>
+                <a:off x="4737608" y="1448308"/>
+                <a:ext cx="728472" cy="201168"/>
+              </a:xfrm>
+              <a:prstGeom prst="rect">
+                <a:avLst/>
+              </a:prstGeom>
+              <a:noFill/>
+            </p:spPr>
+            <p:txBody>
+              <a:bodyPr lIns="0" tIns="0" rIns="0" bIns="0" anchor="ctr">
+                <a:noAutofit/>
+              </a:bodyPr>
+              <a:lstStyle/>
+              <a:p>
+                <a:pPr algn="ctr">
+                  <a:buNone/>
+                </a:pPr>
+                <a14:m>
+                  <m:oMathPara xmlns:m="http://schemas.openxmlformats.org/officeDocument/2006/math" xmlns:a="http://schemas.openxmlformats.org/drawingml/2006/main">
+                    <m:oMathParaPr>
+                      <m:jc m:val="centerGroup"/>
+                    </m:oMathParaPr>
+                    <m:oMath xmlns:m="http://schemas.openxmlformats.org/officeDocument/2006/math">
+                      <m:r>
+                        <m:rPr>
+                          <m:sty m:val="p"/>
+                        </m:rPr>
+                        <a:rPr lang="en-US" i="0" smtClean="0" sz="1563">
+                          <a:solidFill>
+                            <a:srgbClr val="C00000"/>
+                          </a:solidFill>
+                          <a:latin typeface="Cambria Math" panose="02040503050406030204" pitchFamily="18" charset="0"/>
+                        </a:rPr>
+                        <m:t xml:space="preserve">cos</m:t>
+                      </m:r>
+                      <m:r>
+                        <a:rPr lang="en-US" i="1" smtClean="0" sz="1563">
+                          <a:solidFill>
+                            <a:srgbClr val="C00000"/>
+                          </a:solidFill>
+                          <a:latin typeface="Cambria Math" panose="02040503050406030204" pitchFamily="18" charset="0"/>
+                        </a:rPr>
+                        <m:t xml:space="preserve">(ωt)</m:t>
+                      </m:r>
+                    </m:oMath>
+                  </m:oMathPara>
+                </a14:m>
+                <a:endParaRPr lang="en-US" dirty="0"/>
+              </a:p>
+            </p:txBody>
+          </p:sp>
+        </mc:Choice>
+        <mc:Fallback>
+          <p:pic>
+            <p:nvPicPr>
+              <p:cNvPr id="68" name="Image 12" descr="/home/ahmed/Projects/ai_llm_slides/videos/deep-learning/002_transformers_part2/recreated_pptx/build/assets/mvb2_s1.png">    </p:cNvPr>
+              <p:cNvPicPr>
+                <a:picLocks noChangeAspect="1"/>
+              </p:cNvPicPr>
+              <p:nvPr/>
+            </p:nvPicPr>
+            <p:blipFill>
+              <a:blip r:embed="rId13"/>
+              <a:stretch>
+                <a:fillRect/>
+              </a:stretch>
+            </p:blipFill>
+            <p:spPr>
+              <a:xfrm>
+                <a:off x="4737608" y="1448308"/>
+                <a:ext cx="728472" cy="201168"/>
+              </a:xfrm>
+              <a:prstGeom prst="rect">
+                <a:avLst/>
+              </a:prstGeom>
+            </p:spPr>
+          </p:pic>
+        </mc:Fallback>
+      </mc:AlternateContent>
+      <mc:AlternateContent>
+        <mc:Choice xmlns:a14="http://schemas.microsoft.com/office/drawing/2010/main" Requires="a14">
+          <p:sp>
+            <p:nvSpPr>
+              <p:cNvPr id="69" name="Equation OMML" descr="\mathrm{cos}(\omega \delta)"/>
+              <p:cNvSpPr txBox="1"/>
+              <p:nvPr/>
+            </p:nvSpPr>
+            <p:spPr>
+              <a:xfrm>
+                <a:off x="5563108" y="1448308"/>
+                <a:ext cx="841248" cy="217932"/>
+              </a:xfrm>
+              <a:prstGeom prst="rect">
+                <a:avLst/>
+              </a:prstGeom>
+              <a:noFill/>
+            </p:spPr>
+            <p:txBody>
+              <a:bodyPr lIns="0" tIns="0" rIns="0" bIns="0" anchor="ctr">
+                <a:noAutofit/>
+              </a:bodyPr>
+              <a:lstStyle/>
+              <a:p>
+                <a:pPr algn="ctr">
+                  <a:buNone/>
+                </a:pPr>
+                <a14:m>
+                  <m:oMathPara xmlns:m="http://schemas.openxmlformats.org/officeDocument/2006/math" xmlns:a="http://schemas.openxmlformats.org/drawingml/2006/main">
+                    <m:oMathParaPr>
+                      <m:jc m:val="centerGroup"/>
+                    </m:oMathParaPr>
+                    <m:oMath xmlns:m="http://schemas.openxmlformats.org/officeDocument/2006/math">
+                      <m:r>
+                        <m:rPr>
+                          <m:sty m:val="p"/>
+                        </m:rPr>
+                        <a:rPr lang="en-US" i="0" smtClean="0" sz="1705">
+                          <a:solidFill>
+                            <a:srgbClr val="0000CC"/>
+                          </a:solidFill>
+                          <a:latin typeface="Cambria Math" panose="02040503050406030204" pitchFamily="18" charset="0"/>
+                        </a:rPr>
+                        <m:t xml:space="preserve">cos</m:t>
+                      </m:r>
+                      <m:r>
+                        <a:rPr lang="en-US" i="1" smtClean="0" sz="1705">
+                          <a:solidFill>
+                            <a:srgbClr val="0000CC"/>
+                          </a:solidFill>
+                          <a:latin typeface="Cambria Math" panose="02040503050406030204" pitchFamily="18" charset="0"/>
+                        </a:rPr>
+                        <m:t xml:space="preserve">(ωδ)</m:t>
+                      </m:r>
+                    </m:oMath>
+                  </m:oMathPara>
+                </a14:m>
+                <a:endParaRPr lang="en-US" dirty="0"/>
+              </a:p>
+            </p:txBody>
+          </p:sp>
+        </mc:Choice>
+        <mc:Fallback>
+          <p:pic>
+            <p:nvPicPr>
+              <p:cNvPr id="69" name="Image 13" descr="/home/ahmed/Projects/ai_llm_slides/videos/deep-learning/002_transformers_part2/recreated_pptx/build/assets/mvb2_s2.png">    </p:cNvPr>
+              <p:cNvPicPr>
+                <a:picLocks noChangeAspect="1"/>
+              </p:cNvPicPr>
+              <p:nvPr/>
+            </p:nvPicPr>
+            <p:blipFill>
+              <a:blip r:embed="rId14"/>
+              <a:stretch>
+                <a:fillRect/>
+              </a:stretch>
+            </p:blipFill>
+            <p:spPr>
+              <a:xfrm>
+                <a:off x="5563108" y="1448308"/>
+                <a:ext cx="841248" cy="217932"/>
+              </a:xfrm>
+              <a:prstGeom prst="rect">
+                <a:avLst/>
+              </a:prstGeom>
+            </p:spPr>
+          </p:pic>
+        </mc:Fallback>
+      </mc:AlternateContent>
+      <mc:AlternateContent>
+        <mc:Choice xmlns:a14="http://schemas.microsoft.com/office/drawing/2010/main" Requires="a14">
+          <p:sp>
+            <p:nvSpPr>
+              <p:cNvPr id="70" name="Equation OMML" descr="-"/>
+              <p:cNvSpPr txBox="1"/>
+              <p:nvPr/>
+            </p:nvSpPr>
+            <p:spPr>
+              <a:xfrm>
+                <a:off x="6490208" y="1511808"/>
+                <a:ext cx="77724" cy="30480"/>
+              </a:xfrm>
+              <a:prstGeom prst="rect">
+                <a:avLst/>
+              </a:prstGeom>
+              <a:noFill/>
+            </p:spPr>
+            <p:txBody>
+              <a:bodyPr lIns="0" tIns="0" rIns="0" bIns="0" anchor="ctr">
+                <a:noAutofit/>
+              </a:bodyPr>
+              <a:lstStyle/>
+              <a:p>
+                <a:pPr algn="ctr">
+                  <a:buNone/>
+                </a:pPr>
+                <a14:m>
+                  <m:oMathPara xmlns:m="http://schemas.openxmlformats.org/officeDocument/2006/math" xmlns:a="http://schemas.openxmlformats.org/drawingml/2006/main">
+                    <m:oMathParaPr>
+                      <m:jc m:val="centerGroup"/>
+                    </m:oMathParaPr>
+                    <m:oMath xmlns:m="http://schemas.openxmlformats.org/officeDocument/2006/math">
+                      <m:r>
+                        <a:rPr lang="en-US" i="1" smtClean="0" sz="678">
+                          <a:solidFill>
+                            <a:srgbClr val="000000"/>
+                          </a:solidFill>
+                          <a:latin typeface="Cambria Math" panose="02040503050406030204" pitchFamily="18" charset="0"/>
+                        </a:rPr>
+                        <m:t xml:space="preserve">-</m:t>
+                      </m:r>
+                    </m:oMath>
+                  </m:oMathPara>
+                </a14:m>
+                <a:endParaRPr lang="en-US" dirty="0"/>
+              </a:p>
+            </p:txBody>
+          </p:sp>
+        </mc:Choice>
+        <mc:Fallback>
+          <p:pic>
+            <p:nvPicPr>
+              <p:cNvPr id="70" name="Image 14" descr="/home/ahmed/Projects/ai_llm_slides/videos/deep-learning/002_transformers_part2/recreated_pptx/build/assets/mvb2_s3.png">    </p:cNvPr>
+              <p:cNvPicPr>
+                <a:picLocks noChangeAspect="1"/>
+              </p:cNvPicPr>
+              <p:nvPr/>
+            </p:nvPicPr>
+            <p:blipFill>
+              <a:blip r:embed="rId15"/>
+              <a:stretch>
+                <a:fillRect/>
+              </a:stretch>
+            </p:blipFill>
+            <p:spPr>
+              <a:xfrm>
+                <a:off x="6490208" y="1511808"/>
+                <a:ext cx="77724" cy="30480"/>
+              </a:xfrm>
+              <a:prstGeom prst="rect">
+                <a:avLst/>
+              </a:prstGeom>
+            </p:spPr>
+          </p:pic>
+        </mc:Fallback>
+      </mc:AlternateContent>
+      <mc:AlternateContent>
+        <mc:Choice xmlns:a14="http://schemas.microsoft.com/office/drawing/2010/main" Requires="a14">
+          <p:sp>
+            <p:nvSpPr>
+              <p:cNvPr id="71" name="Equation OMML" descr="\mathrm{sin}(\omega t)"/>
+              <p:cNvSpPr txBox="1"/>
+              <p:nvPr/>
+            </p:nvSpPr>
+            <p:spPr>
+              <a:xfrm>
+                <a:off x="6642608" y="1448308"/>
+                <a:ext cx="710184" cy="208788"/>
+              </a:xfrm>
+              <a:prstGeom prst="rect">
+                <a:avLst/>
+              </a:prstGeom>
+              <a:noFill/>
+            </p:spPr>
+            <p:txBody>
+              <a:bodyPr lIns="0" tIns="0" rIns="0" bIns="0" anchor="ctr">
+                <a:noAutofit/>
+              </a:bodyPr>
+              <a:lstStyle/>
+              <a:p>
+                <a:pPr algn="ctr">
+                  <a:buNone/>
+                </a:pPr>
+                <a14:m>
+                  <m:oMathPara xmlns:m="http://schemas.openxmlformats.org/officeDocument/2006/math" xmlns:a="http://schemas.openxmlformats.org/drawingml/2006/main">
+                    <m:oMathParaPr>
+                      <m:jc m:val="centerGroup"/>
+                    </m:oMathParaPr>
+                    <m:oMath xmlns:m="http://schemas.openxmlformats.org/officeDocument/2006/math">
+                      <m:r>
+                        <m:rPr>
+                          <m:sty m:val="p"/>
+                        </m:rPr>
+                        <a:rPr lang="en-US" i="0" smtClean="0" sz="1637">
+                          <a:solidFill>
+                            <a:srgbClr val="C00000"/>
+                          </a:solidFill>
+                          <a:latin typeface="Cambria Math" panose="02040503050406030204" pitchFamily="18" charset="0"/>
+                        </a:rPr>
+                        <m:t xml:space="preserve">sin</m:t>
+                      </m:r>
+                      <m:r>
+                        <a:rPr lang="en-US" i="1" smtClean="0" sz="1637">
+                          <a:solidFill>
+                            <a:srgbClr val="C00000"/>
+                          </a:solidFill>
+                          <a:latin typeface="Cambria Math" panose="02040503050406030204" pitchFamily="18" charset="0"/>
+                        </a:rPr>
+                        <m:t xml:space="preserve">(ωt)</m:t>
+                      </m:r>
+                    </m:oMath>
+                  </m:oMathPara>
+                </a14:m>
+                <a:endParaRPr lang="en-US" dirty="0"/>
+              </a:p>
+            </p:txBody>
+          </p:sp>
+        </mc:Choice>
+        <mc:Fallback>
+          <p:pic>
+            <p:nvPicPr>
+              <p:cNvPr id="71" name="Image 15" descr="/home/ahmed/Projects/ai_llm_slides/videos/deep-learning/002_transformers_part2/recreated_pptx/build/assets/mvb2_s4.png">    </p:cNvPr>
+              <p:cNvPicPr>
+                <a:picLocks noChangeAspect="1"/>
+              </p:cNvPicPr>
+              <p:nvPr/>
+            </p:nvPicPr>
+            <p:blipFill>
+              <a:blip r:embed="rId16"/>
+              <a:stretch>
+                <a:fillRect/>
+              </a:stretch>
+            </p:blipFill>
+            <p:spPr>
+              <a:xfrm>
+                <a:off x="6642608" y="1448308"/>
+                <a:ext cx="710184" cy="208788"/>
+              </a:xfrm>
+              <a:prstGeom prst="rect">
+                <a:avLst/>
+              </a:prstGeom>
+            </p:spPr>
+          </p:pic>
+        </mc:Fallback>
+      </mc:AlternateContent>
+      <mc:AlternateContent>
+        <mc:Choice xmlns:a14="http://schemas.microsoft.com/office/drawing/2010/main" Requires="a14">
+          <p:sp>
+            <p:nvSpPr>
+              <p:cNvPr id="72" name="Equation OMML" descr="\mathrm{sin}(\omega \delta)"/>
+              <p:cNvSpPr txBox="1"/>
+              <p:nvPr/>
+            </p:nvSpPr>
+            <p:spPr>
+              <a:xfrm>
+                <a:off x="7442708" y="1448308"/>
+                <a:ext cx="774192" cy="214884"/>
+              </a:xfrm>
+              <a:prstGeom prst="rect">
+                <a:avLst/>
+              </a:prstGeom>
+              <a:noFill/>
+            </p:spPr>
+            <p:txBody>
+              <a:bodyPr lIns="0" tIns="0" rIns="0" bIns="0" anchor="ctr">
+                <a:noAutofit/>
+              </a:bodyPr>
+              <a:lstStyle/>
+              <a:p>
+                <a:pPr algn="ctr">
+                  <a:buNone/>
+                </a:pPr>
+                <a14:m>
+                  <m:oMathPara xmlns:m="http://schemas.openxmlformats.org/officeDocument/2006/math" xmlns:a="http://schemas.openxmlformats.org/drawingml/2006/main">
+                    <m:oMathParaPr>
+                      <m:jc m:val="centerGroup"/>
+                    </m:oMathParaPr>
+                    <m:oMath xmlns:m="http://schemas.openxmlformats.org/officeDocument/2006/math">
+                      <m:r>
+                        <m:rPr>
+                          <m:sty m:val="p"/>
+                        </m:rPr>
+                        <a:rPr lang="en-US" i="0" smtClean="0" sz="1677">
+                          <a:solidFill>
+                            <a:srgbClr val="0000CC"/>
+                          </a:solidFill>
+                          <a:latin typeface="Cambria Math" panose="02040503050406030204" pitchFamily="18" charset="0"/>
+                        </a:rPr>
+                        <m:t xml:space="preserve">sin</m:t>
+                      </m:r>
+                      <m:r>
+                        <a:rPr lang="en-US" i="1" smtClean="0" sz="1677">
+                          <a:solidFill>
+                            <a:srgbClr val="0000CC"/>
+                          </a:solidFill>
+                          <a:latin typeface="Cambria Math" panose="02040503050406030204" pitchFamily="18" charset="0"/>
+                        </a:rPr>
+                        <m:t xml:space="preserve">(ωδ)</m:t>
+                      </m:r>
+                    </m:oMath>
+                  </m:oMathPara>
+                </a14:m>
+                <a:endParaRPr lang="en-US" dirty="0"/>
+              </a:p>
+            </p:txBody>
+          </p:sp>
+        </mc:Choice>
+        <mc:Fallback>
+          <p:pic>
+            <p:nvPicPr>
+              <p:cNvPr id="72" name="Image 16" descr="/home/ahmed/Projects/ai_llm_slides/videos/deep-learning/002_transformers_part2/recreated_pptx/build/assets/mvb2_s5.png">    </p:cNvPr>
+              <p:cNvPicPr>
+                <a:picLocks noChangeAspect="1"/>
+              </p:cNvPicPr>
+              <p:nvPr/>
+            </p:nvPicPr>
+            <p:blipFill>
+              <a:blip r:embed="rId17"/>
+              <a:stretch>
+                <a:fillRect/>
+              </a:stretch>
+            </p:blipFill>
+            <p:spPr>
+              <a:xfrm>
+                <a:off x="7442708" y="1448308"/>
+                <a:ext cx="774192" cy="214884"/>
+              </a:xfrm>
+              <a:prstGeom prst="rect">
+                <a:avLst/>
+              </a:prstGeom>
+            </p:spPr>
+          </p:pic>
+        </mc:Fallback>
+      </mc:AlternateContent>
+      <mc:AlternateContent>
+        <mc:Choice xmlns:a14="http://schemas.microsoft.com/office/drawing/2010/main" Requires="a14">
+          <p:sp>
+            <p:nvSpPr>
+              <p:cNvPr id="73" name="Equation OMML" descr="\mathrm{sin}(a)"/>
+              <p:cNvSpPr txBox="1"/>
+              <p:nvPr/>
+            </p:nvSpPr>
+            <p:spPr>
+              <a:xfrm>
+                <a:off x="5017008" y="1981708"/>
+                <a:ext cx="585216" cy="210312"/>
+              </a:xfrm>
+              <a:prstGeom prst="rect">
+                <a:avLst/>
+              </a:prstGeom>
+              <a:noFill/>
+            </p:spPr>
+            <p:txBody>
+              <a:bodyPr lIns="0" tIns="0" rIns="0" bIns="0" anchor="ctr">
+                <a:noAutofit/>
+              </a:bodyPr>
+              <a:lstStyle/>
+              <a:p>
+                <a:pPr algn="ctr">
+                  <a:buNone/>
+                </a:pPr>
+                <a14:m>
+                  <m:oMathPara xmlns:m="http://schemas.openxmlformats.org/officeDocument/2006/math" xmlns:a="http://schemas.openxmlformats.org/drawingml/2006/main">
+                    <m:oMathParaPr>
+                      <m:jc m:val="centerGroup"/>
+                    </m:oMathParaPr>
+                    <m:oMath xmlns:m="http://schemas.openxmlformats.org/officeDocument/2006/math">
+                      <m:r>
+                        <m:rPr>
+                          <m:sty m:val="p"/>
+                        </m:rPr>
+                        <a:rPr lang="en-US" i="0" smtClean="0" sz="1641">
+                          <a:solidFill>
+                            <a:srgbClr val="C00000"/>
+                          </a:solidFill>
+                          <a:latin typeface="Cambria Math" panose="02040503050406030204" pitchFamily="18" charset="0"/>
+                        </a:rPr>
+                        <m:t xml:space="preserve">sin</m:t>
+                      </m:r>
+                      <m:r>
+                        <a:rPr lang="en-US" i="1" smtClean="0" sz="1641">
+                          <a:solidFill>
+                            <a:srgbClr val="C00000"/>
+                          </a:solidFill>
+                          <a:latin typeface="Cambria Math" panose="02040503050406030204" pitchFamily="18" charset="0"/>
+                        </a:rPr>
+                        <m:t xml:space="preserve">(a)</m:t>
+                      </m:r>
+                    </m:oMath>
+                  </m:oMathPara>
+                </a14:m>
+                <a:endParaRPr lang="en-US" dirty="0"/>
+              </a:p>
+            </p:txBody>
+          </p:sp>
+        </mc:Choice>
+        <mc:Fallback>
+          <p:pic>
+            <p:nvPicPr>
+              <p:cNvPr id="73" name="Image 17" descr="/home/ahmed/Projects/ai_llm_slides/videos/deep-learning/002_transformers_part2/recreated_pptx/build/assets/mvr1_s1.png">    </p:cNvPr>
+              <p:cNvPicPr>
+                <a:picLocks noChangeAspect="1"/>
+              </p:cNvPicPr>
+              <p:nvPr/>
+            </p:nvPicPr>
+            <p:blipFill>
+              <a:blip r:embed="rId18"/>
+              <a:stretch>
+                <a:fillRect/>
+              </a:stretch>
+            </p:blipFill>
+            <p:spPr>
+              <a:xfrm>
+                <a:off x="5017008" y="1981708"/>
+                <a:ext cx="585216" cy="210312"/>
+              </a:xfrm>
+              <a:prstGeom prst="rect">
+                <a:avLst/>
+              </a:prstGeom>
+            </p:spPr>
+          </p:pic>
+        </mc:Fallback>
+      </mc:AlternateContent>
+      <mc:AlternateContent>
+        <mc:Choice xmlns:a14="http://schemas.microsoft.com/office/drawing/2010/main" Requires="a14">
+          <p:sp>
+            <p:nvSpPr>
+              <p:cNvPr id="74" name="Equation OMML" descr="\mathrm{cos}(b)"/>
+              <p:cNvSpPr txBox="1"/>
+              <p:nvPr/>
+            </p:nvSpPr>
+            <p:spPr>
+              <a:xfrm>
+                <a:off x="5690108" y="1981708"/>
+                <a:ext cx="710184" cy="231648"/>
+              </a:xfrm>
+              <a:prstGeom prst="rect">
+                <a:avLst/>
+              </a:prstGeom>
+              <a:noFill/>
+            </p:spPr>
+            <p:txBody>
+              <a:bodyPr lIns="0" tIns="0" rIns="0" bIns="0" anchor="ctr">
+                <a:noAutofit/>
+              </a:bodyPr>
+              <a:lstStyle/>
+              <a:p>
+                <a:pPr algn="ctr">
+                  <a:buNone/>
+                </a:pPr>
+                <a14:m>
+                  <m:oMathPara xmlns:m="http://schemas.openxmlformats.org/officeDocument/2006/math" xmlns:a="http://schemas.openxmlformats.org/drawingml/2006/main">
+                    <m:oMathParaPr>
+                      <m:jc m:val="centerGroup"/>
+                    </m:oMathParaPr>
+                    <m:oMath xmlns:m="http://schemas.openxmlformats.org/officeDocument/2006/math">
+                      <m:r>
+                        <m:rPr>
+                          <m:sty m:val="p"/>
+                        </m:rPr>
+                        <a:rPr lang="en-US" i="0" smtClean="0" sz="1829">
+                          <a:solidFill>
+                            <a:srgbClr val="0000CC"/>
+                          </a:solidFill>
+                          <a:latin typeface="Cambria Math" panose="02040503050406030204" pitchFamily="18" charset="0"/>
+                        </a:rPr>
+                        <m:t xml:space="preserve">cos</m:t>
+                      </m:r>
+                      <m:r>
+                        <a:rPr lang="en-US" i="1" smtClean="0" sz="1829">
+                          <a:solidFill>
+                            <a:srgbClr val="0000CC"/>
+                          </a:solidFill>
+                          <a:latin typeface="Cambria Math" panose="02040503050406030204" pitchFamily="18" charset="0"/>
+                        </a:rPr>
+                        <m:t xml:space="preserve">(b)</m:t>
+                      </m:r>
+                    </m:oMath>
+                  </m:oMathPara>
+                </a14:m>
+                <a:endParaRPr lang="en-US" dirty="0"/>
+              </a:p>
+            </p:txBody>
+          </p:sp>
+        </mc:Choice>
+        <mc:Fallback>
+          <p:pic>
+            <p:nvPicPr>
+              <p:cNvPr id="74" name="Image 18" descr="/home/ahmed/Projects/ai_llm_slides/videos/deep-learning/002_transformers_part2/recreated_pptx/build/assets/mvr1_s2.png">    </p:cNvPr>
+              <p:cNvPicPr>
+                <a:picLocks noChangeAspect="1"/>
+              </p:cNvPicPr>
+              <p:nvPr/>
+            </p:nvPicPr>
+            <p:blipFill>
+              <a:blip r:embed="rId19"/>
+              <a:stretch>
+                <a:fillRect/>
+              </a:stretch>
+            </p:blipFill>
+            <p:spPr>
+              <a:xfrm>
+                <a:off x="5690108" y="1981708"/>
+                <a:ext cx="710184" cy="231648"/>
+              </a:xfrm>
+              <a:prstGeom prst="rect">
+                <a:avLst/>
+              </a:prstGeom>
+            </p:spPr>
+          </p:pic>
+        </mc:Fallback>
+      </mc:AlternateContent>
+      <mc:AlternateContent>
+        <mc:Choice xmlns:a14="http://schemas.microsoft.com/office/drawing/2010/main" Requires="a14">
+          <p:sp>
+            <p:nvSpPr>
+              <p:cNvPr id="75" name="Equation OMML" descr="+"/>
+              <p:cNvSpPr txBox="1"/>
+              <p:nvPr/>
+            </p:nvSpPr>
+            <p:spPr>
+              <a:xfrm>
+                <a:off x="6439408" y="2019808"/>
+                <a:ext cx="124968" cy="126492"/>
+              </a:xfrm>
+              <a:prstGeom prst="rect">
+                <a:avLst/>
+              </a:prstGeom>
+              <a:noFill/>
+            </p:spPr>
+            <p:txBody>
+              <a:bodyPr lIns="0" tIns="0" rIns="0" bIns="0" anchor="ctr">
+                <a:noAutofit/>
+              </a:bodyPr>
+              <a:lstStyle/>
+              <a:p>
+                <a:pPr algn="ctr">
+                  <a:buNone/>
+                </a:pPr>
+                <a14:m>
+                  <m:oMathPara xmlns:m="http://schemas.openxmlformats.org/officeDocument/2006/math" xmlns:a="http://schemas.openxmlformats.org/drawingml/2006/main">
+                    <m:oMathParaPr>
+                      <m:jc m:val="centerGroup"/>
+                    </m:oMathParaPr>
+                    <m:oMath xmlns:m="http://schemas.openxmlformats.org/officeDocument/2006/math">
+                      <m:r>
+                        <a:rPr lang="en-US" i="1" smtClean="0" sz="1266">
+                          <a:solidFill>
+                            <a:srgbClr val="000000"/>
+                          </a:solidFill>
+                          <a:latin typeface="Cambria Math" panose="02040503050406030204" pitchFamily="18" charset="0"/>
+                        </a:rPr>
+                        <m:t xml:space="preserve">+</m:t>
+                      </m:r>
+                    </m:oMath>
+                  </m:oMathPara>
+                </a14:m>
+                <a:endParaRPr lang="en-US" dirty="0"/>
+              </a:p>
+            </p:txBody>
+          </p:sp>
+        </mc:Choice>
+        <mc:Fallback>
+          <p:pic>
+            <p:nvPicPr>
+              <p:cNvPr id="75" name="Image 19" descr="/home/ahmed/Projects/ai_llm_slides/videos/deep-learning/002_transformers_part2/recreated_pptx/build/assets/mvr1_s3.png">    </p:cNvPr>
+              <p:cNvPicPr>
+                <a:picLocks noChangeAspect="1"/>
+              </p:cNvPicPr>
+              <p:nvPr/>
+            </p:nvPicPr>
+            <p:blipFill>
+              <a:blip r:embed="rId20"/>
+              <a:stretch>
+                <a:fillRect/>
+              </a:stretch>
+            </p:blipFill>
+            <p:spPr>
+              <a:xfrm>
+                <a:off x="6439408" y="2019808"/>
+                <a:ext cx="124968" cy="126492"/>
+              </a:xfrm>
+              <a:prstGeom prst="rect">
+                <a:avLst/>
+              </a:prstGeom>
+            </p:spPr>
+          </p:pic>
+        </mc:Fallback>
+      </mc:AlternateContent>
+      <mc:AlternateContent>
+        <mc:Choice xmlns:a14="http://schemas.microsoft.com/office/drawing/2010/main" Requires="a14">
+          <p:sp>
+            <p:nvSpPr>
+              <p:cNvPr id="76" name="Equation OMML" descr="\mathrm{cos}(a)"/>
+              <p:cNvSpPr txBox="1"/>
+              <p:nvPr/>
+            </p:nvSpPr>
+            <p:spPr>
+              <a:xfrm>
+                <a:off x="6642608" y="1981708"/>
+                <a:ext cx="658368" cy="217932"/>
+              </a:xfrm>
+              <a:prstGeom prst="rect">
+                <a:avLst/>
+              </a:prstGeom>
+              <a:noFill/>
+            </p:spPr>
+            <p:txBody>
+              <a:bodyPr lIns="0" tIns="0" rIns="0" bIns="0" anchor="ctr">
+                <a:noAutofit/>
+              </a:bodyPr>
+              <a:lstStyle/>
+              <a:p>
+                <a:pPr algn="ctr">
+                  <a:buNone/>
+                </a:pPr>
+                <a14:m>
+                  <m:oMathPara xmlns:m="http://schemas.openxmlformats.org/officeDocument/2006/math" xmlns:a="http://schemas.openxmlformats.org/drawingml/2006/main">
+                    <m:oMathParaPr>
+                      <m:jc m:val="centerGroup"/>
+                    </m:oMathParaPr>
+                    <m:oMath xmlns:m="http://schemas.openxmlformats.org/officeDocument/2006/math">
+                      <m:r>
+                        <m:rPr>
+                          <m:sty m:val="p"/>
+                        </m:rPr>
+                        <a:rPr lang="en-US" i="0" smtClean="0" sz="1704">
+                          <a:solidFill>
+                            <a:srgbClr val="C00000"/>
+                          </a:solidFill>
+                          <a:latin typeface="Cambria Math" panose="02040503050406030204" pitchFamily="18" charset="0"/>
+                        </a:rPr>
+                        <m:t xml:space="preserve">cos</m:t>
+                      </m:r>
+                      <m:r>
+                        <a:rPr lang="en-US" i="1" smtClean="0" sz="1704">
+                          <a:solidFill>
+                            <a:srgbClr val="C00000"/>
+                          </a:solidFill>
+                          <a:latin typeface="Cambria Math" panose="02040503050406030204" pitchFamily="18" charset="0"/>
+                        </a:rPr>
+                        <m:t xml:space="preserve">(a)</m:t>
+                      </m:r>
+                    </m:oMath>
+                  </m:oMathPara>
+                </a14:m>
+                <a:endParaRPr lang="en-US" dirty="0"/>
+              </a:p>
+            </p:txBody>
+          </p:sp>
+        </mc:Choice>
+        <mc:Fallback>
+          <p:pic>
+            <p:nvPicPr>
+              <p:cNvPr id="76" name="Image 20" descr="/home/ahmed/Projects/ai_llm_slides/videos/deep-learning/002_transformers_part2/recreated_pptx/build/assets/mvr1_s4.png">    </p:cNvPr>
+              <p:cNvPicPr>
+                <a:picLocks noChangeAspect="1"/>
+              </p:cNvPicPr>
+              <p:nvPr/>
+            </p:nvPicPr>
+            <p:blipFill>
+              <a:blip r:embed="rId21"/>
+              <a:stretch>
+                <a:fillRect/>
+              </a:stretch>
+            </p:blipFill>
+            <p:spPr>
+              <a:xfrm>
+                <a:off x="6642608" y="1981708"/>
+                <a:ext cx="658368" cy="217932"/>
+              </a:xfrm>
+              <a:prstGeom prst="rect">
+                <a:avLst/>
+              </a:prstGeom>
+            </p:spPr>
+          </p:pic>
+        </mc:Fallback>
+      </mc:AlternateContent>
+      <mc:AlternateContent>
+        <mc:Choice xmlns:a14="http://schemas.microsoft.com/office/drawing/2010/main" Requires="a14">
+          <p:sp>
+            <p:nvSpPr>
+              <p:cNvPr id="77" name="Equation OMML" descr="\mathrm{sin}(b)"/>
+              <p:cNvSpPr txBox="1"/>
+              <p:nvPr/>
+            </p:nvSpPr>
+            <p:spPr>
+              <a:xfrm>
+                <a:off x="7379208" y="1981708"/>
+                <a:ext cx="594360" cy="211836"/>
+              </a:xfrm>
+              <a:prstGeom prst="rect">
+                <a:avLst/>
+              </a:prstGeom>
+              <a:noFill/>
+            </p:spPr>
+            <p:txBody>
+              <a:bodyPr lIns="0" tIns="0" rIns="0" bIns="0" anchor="ctr">
+                <a:noAutofit/>
+              </a:bodyPr>
+              <a:lstStyle/>
+              <a:p>
+                <a:pPr algn="ctr">
+                  <a:buNone/>
+                </a:pPr>
+                <a14:m>
+                  <m:oMathPara xmlns:m="http://schemas.openxmlformats.org/officeDocument/2006/math" xmlns:a="http://schemas.openxmlformats.org/drawingml/2006/main">
+                    <m:oMathParaPr>
+                      <m:jc m:val="centerGroup"/>
+                    </m:oMathParaPr>
+                    <m:oMath xmlns:m="http://schemas.openxmlformats.org/officeDocument/2006/math">
+                      <m:r>
+                        <m:rPr>
+                          <m:sty m:val="p"/>
+                        </m:rPr>
+                        <a:rPr lang="en-US" i="0" smtClean="0" sz="1662">
+                          <a:solidFill>
+                            <a:srgbClr val="0000CC"/>
+                          </a:solidFill>
+                          <a:latin typeface="Cambria Math" panose="02040503050406030204" pitchFamily="18" charset="0"/>
+                        </a:rPr>
+                        <m:t xml:space="preserve">sin</m:t>
+                      </m:r>
+                      <m:r>
+                        <a:rPr lang="en-US" i="1" smtClean="0" sz="1662">
+                          <a:solidFill>
+                            <a:srgbClr val="0000CC"/>
+                          </a:solidFill>
+                          <a:latin typeface="Cambria Math" panose="02040503050406030204" pitchFamily="18" charset="0"/>
+                        </a:rPr>
+                        <m:t xml:space="preserve">(b)</m:t>
+                      </m:r>
+                    </m:oMath>
+                  </m:oMathPara>
+                </a14:m>
+                <a:endParaRPr lang="en-US" dirty="0"/>
+              </a:p>
+            </p:txBody>
+          </p:sp>
+        </mc:Choice>
+        <mc:Fallback>
+          <p:pic>
+            <p:nvPicPr>
+              <p:cNvPr id="77" name="Image 21" descr="/home/ahmed/Projects/ai_llm_slides/videos/deep-learning/002_transformers_part2/recreated_pptx/build/assets/mvr1_s5.png">    </p:cNvPr>
+              <p:cNvPicPr>
+                <a:picLocks noChangeAspect="1"/>
+              </p:cNvPicPr>
+              <p:nvPr/>
+            </p:nvPicPr>
+            <p:blipFill>
+              <a:blip r:embed="rId22"/>
+              <a:stretch>
+                <a:fillRect/>
+              </a:stretch>
+            </p:blipFill>
+            <p:spPr>
+              <a:xfrm>
+                <a:off x="7379208" y="1981708"/>
+                <a:ext cx="594360" cy="211836"/>
+              </a:xfrm>
+              <a:prstGeom prst="rect">
+                <a:avLst/>
+              </a:prstGeom>
+            </p:spPr>
+          </p:pic>
+        </mc:Fallback>
+      </mc:AlternateContent>
+      <mc:AlternateContent>
+        <mc:Choice xmlns:a14="http://schemas.microsoft.com/office/drawing/2010/main" Requires="a14">
+          <p:sp>
+            <p:nvSpPr>
+              <p:cNvPr id="78" name="Equation OMML" descr="\mathrm{cos}(a)"/>
+              <p:cNvSpPr txBox="1"/>
+              <p:nvPr/>
+            </p:nvSpPr>
+            <p:spPr>
+              <a:xfrm>
+                <a:off x="4966208" y="2388108"/>
+                <a:ext cx="647700" cy="213360"/>
+              </a:xfrm>
+              <a:prstGeom prst="rect">
+                <a:avLst/>
+              </a:prstGeom>
+              <a:noFill/>
+            </p:spPr>
+            <p:txBody>
+              <a:bodyPr lIns="0" tIns="0" rIns="0" bIns="0" anchor="ctr">
+                <a:noAutofit/>
+              </a:bodyPr>
+              <a:lstStyle/>
+              <a:p>
+                <a:pPr algn="ctr">
+                  <a:buNone/>
+                </a:pPr>
+                <a14:m>
+                  <m:oMathPara xmlns:m="http://schemas.openxmlformats.org/officeDocument/2006/math" xmlns:a="http://schemas.openxmlformats.org/drawingml/2006/main">
+                    <m:oMathParaPr>
+                      <m:jc m:val="centerGroup"/>
+                    </m:oMathParaPr>
+                    <m:oMath xmlns:m="http://schemas.openxmlformats.org/officeDocument/2006/math">
+                      <m:r>
+                        <m:rPr>
+                          <m:sty m:val="p"/>
+                        </m:rPr>
+                        <a:rPr lang="en-US" i="0" smtClean="0" sz="1674">
+                          <a:solidFill>
+                            <a:srgbClr val="C00000"/>
+                          </a:solidFill>
+                          <a:latin typeface="Cambria Math" panose="02040503050406030204" pitchFamily="18" charset="0"/>
+                        </a:rPr>
+                        <m:t xml:space="preserve">cos</m:t>
+                      </m:r>
+                      <m:r>
+                        <a:rPr lang="en-US" i="1" smtClean="0" sz="1674">
+                          <a:solidFill>
+                            <a:srgbClr val="C00000"/>
+                          </a:solidFill>
+                          <a:latin typeface="Cambria Math" panose="02040503050406030204" pitchFamily="18" charset="0"/>
+                        </a:rPr>
+                        <m:t xml:space="preserve">(a)</m:t>
+                      </m:r>
+                    </m:oMath>
+                  </m:oMathPara>
+                </a14:m>
+                <a:endParaRPr lang="en-US" dirty="0"/>
+              </a:p>
+            </p:txBody>
+          </p:sp>
+        </mc:Choice>
+        <mc:Fallback>
+          <p:pic>
+            <p:nvPicPr>
+              <p:cNvPr id="78" name="Image 22" descr="/home/ahmed/Projects/ai_llm_slides/videos/deep-learning/002_transformers_part2/recreated_pptx/build/assets/mvr2_s1.png">    </p:cNvPr>
+              <p:cNvPicPr>
+                <a:picLocks noChangeAspect="1"/>
+              </p:cNvPicPr>
+              <p:nvPr/>
+            </p:nvPicPr>
+            <p:blipFill>
+              <a:blip r:embed="rId23"/>
+              <a:stretch>
+                <a:fillRect/>
+              </a:stretch>
+            </p:blipFill>
+            <p:spPr>
+              <a:xfrm>
+                <a:off x="4966208" y="2388108"/>
+                <a:ext cx="647700" cy="213360"/>
+              </a:xfrm>
+              <a:prstGeom prst="rect">
+                <a:avLst/>
+              </a:prstGeom>
+            </p:spPr>
+          </p:pic>
+        </mc:Fallback>
+      </mc:AlternateContent>
+      <mc:AlternateContent>
+        <mc:Choice xmlns:a14="http://schemas.microsoft.com/office/drawing/2010/main" Requires="a14">
+          <p:sp>
+            <p:nvSpPr>
+              <p:cNvPr id="79" name="Equation OMML" descr="\mathrm{cos}(b)"/>
+              <p:cNvSpPr txBox="1"/>
+              <p:nvPr/>
+            </p:nvSpPr>
+            <p:spPr>
+              <a:xfrm>
+                <a:off x="5702808" y="2388108"/>
+                <a:ext cx="658368" cy="216408"/>
+              </a:xfrm>
+              <a:prstGeom prst="rect">
+                <a:avLst/>
+              </a:prstGeom>
+              <a:noFill/>
+            </p:spPr>
+            <p:txBody>
+              <a:bodyPr lIns="0" tIns="0" rIns="0" bIns="0" anchor="ctr">
+                <a:noAutofit/>
+              </a:bodyPr>
+              <a:lstStyle/>
+              <a:p>
+                <a:pPr algn="ctr">
+                  <a:buNone/>
+                </a:pPr>
+                <a14:m>
+                  <m:oMathPara xmlns:m="http://schemas.openxmlformats.org/officeDocument/2006/math" xmlns:a="http://schemas.openxmlformats.org/drawingml/2006/main">
+                    <m:oMathParaPr>
+                      <m:jc m:val="centerGroup"/>
+                    </m:oMathParaPr>
+                    <m:oMath xmlns:m="http://schemas.openxmlformats.org/officeDocument/2006/math">
+                      <m:r>
+                        <m:rPr>
+                          <m:sty m:val="p"/>
+                        </m:rPr>
+                        <a:rPr lang="en-US" i="0" smtClean="0" sz="1691">
+                          <a:solidFill>
+                            <a:srgbClr val="0000CC"/>
+                          </a:solidFill>
+                          <a:latin typeface="Cambria Math" panose="02040503050406030204" pitchFamily="18" charset="0"/>
+                        </a:rPr>
+                        <m:t xml:space="preserve">cos</m:t>
+                      </m:r>
+                      <m:r>
+                        <a:rPr lang="en-US" i="1" smtClean="0" sz="1691">
+                          <a:solidFill>
+                            <a:srgbClr val="0000CC"/>
+                          </a:solidFill>
+                          <a:latin typeface="Cambria Math" panose="02040503050406030204" pitchFamily="18" charset="0"/>
+                        </a:rPr>
+                        <m:t xml:space="preserve">(b)</m:t>
+                      </m:r>
+                    </m:oMath>
+                  </m:oMathPara>
+                </a14:m>
+                <a:endParaRPr lang="en-US" dirty="0"/>
+              </a:p>
+            </p:txBody>
+          </p:sp>
+        </mc:Choice>
+        <mc:Fallback>
+          <p:pic>
+            <p:nvPicPr>
+              <p:cNvPr id="79" name="Image 23" descr="/home/ahmed/Projects/ai_llm_slides/videos/deep-learning/002_transformers_part2/recreated_pptx/build/assets/mvr2_s2.png">    </p:cNvPr>
+              <p:cNvPicPr>
+                <a:picLocks noChangeAspect="1"/>
+              </p:cNvPicPr>
+              <p:nvPr/>
+            </p:nvPicPr>
+            <p:blipFill>
+              <a:blip r:embed="rId24"/>
+              <a:stretch>
+                <a:fillRect/>
+              </a:stretch>
+            </p:blipFill>
+            <p:spPr>
+              <a:xfrm>
+                <a:off x="5702808" y="2388108"/>
+                <a:ext cx="658368" cy="216408"/>
+              </a:xfrm>
+              <a:prstGeom prst="rect">
+                <a:avLst/>
+              </a:prstGeom>
+            </p:spPr>
+          </p:pic>
+        </mc:Fallback>
+      </mc:AlternateContent>
+      <mc:AlternateContent>
+        <mc:Choice xmlns:a14="http://schemas.microsoft.com/office/drawing/2010/main" Requires="a14">
+          <p:sp>
+            <p:nvSpPr>
+              <p:cNvPr id="80" name="Equation OMML" descr="-"/>
+              <p:cNvSpPr txBox="1"/>
+              <p:nvPr/>
+            </p:nvSpPr>
+            <p:spPr>
+              <a:xfrm>
+                <a:off x="6515608" y="2451608"/>
+                <a:ext cx="77724" cy="30480"/>
+              </a:xfrm>
+              <a:prstGeom prst="rect">
+                <a:avLst/>
+              </a:prstGeom>
+              <a:noFill/>
+            </p:spPr>
+            <p:txBody>
+              <a:bodyPr lIns="0" tIns="0" rIns="0" bIns="0" anchor="ctr">
+                <a:noAutofit/>
+              </a:bodyPr>
+              <a:lstStyle/>
+              <a:p>
+                <a:pPr algn="ctr">
+                  <a:buNone/>
+                </a:pPr>
+                <a14:m>
+                  <m:oMathPara xmlns:m="http://schemas.openxmlformats.org/officeDocument/2006/math" xmlns:a="http://schemas.openxmlformats.org/drawingml/2006/main">
+                    <m:oMathParaPr>
+                      <m:jc m:val="centerGroup"/>
+                    </m:oMathParaPr>
+                    <m:oMath xmlns:m="http://schemas.openxmlformats.org/officeDocument/2006/math">
+                      <m:r>
+                        <a:rPr lang="en-US" i="1" smtClean="0" sz="678">
+                          <a:solidFill>
+                            <a:srgbClr val="000000"/>
+                          </a:solidFill>
+                          <a:latin typeface="Cambria Math" panose="02040503050406030204" pitchFamily="18" charset="0"/>
+                        </a:rPr>
+                        <m:t xml:space="preserve">-</m:t>
+                      </m:r>
+                    </m:oMath>
+                  </m:oMathPara>
+                </a14:m>
+                <a:endParaRPr lang="en-US" dirty="0"/>
+              </a:p>
+            </p:txBody>
+          </p:sp>
+        </mc:Choice>
+        <mc:Fallback>
+          <p:pic>
+            <p:nvPicPr>
+              <p:cNvPr id="80" name="Image 24" descr="/home/ahmed/Projects/ai_llm_slides/videos/deep-learning/002_transformers_part2/recreated_pptx/build/assets/mvr2_s3.png">    </p:cNvPr>
+              <p:cNvPicPr>
+                <a:picLocks noChangeAspect="1"/>
+              </p:cNvPicPr>
+              <p:nvPr/>
+            </p:nvPicPr>
+            <p:blipFill>
+              <a:blip r:embed="rId25"/>
+              <a:stretch>
+                <a:fillRect/>
+              </a:stretch>
+            </p:blipFill>
+            <p:spPr>
+              <a:xfrm>
+                <a:off x="6515608" y="2451608"/>
+                <a:ext cx="77724" cy="30480"/>
+              </a:xfrm>
+              <a:prstGeom prst="rect">
+                <a:avLst/>
+              </a:prstGeom>
+            </p:spPr>
+          </p:pic>
+        </mc:Fallback>
+      </mc:AlternateContent>
+      <mc:AlternateContent>
+        <mc:Choice xmlns:a14="http://schemas.microsoft.com/office/drawing/2010/main" Requires="a14">
+          <p:sp>
+            <p:nvSpPr>
+              <p:cNvPr id="81" name="Equation OMML" descr="\mathrm{sin}(a)"/>
+              <p:cNvSpPr txBox="1"/>
+              <p:nvPr/>
+            </p:nvSpPr>
+            <p:spPr>
+              <a:xfrm>
+                <a:off x="6668008" y="2388108"/>
+                <a:ext cx="585216" cy="210312"/>
+              </a:xfrm>
+              <a:prstGeom prst="rect">
+                <a:avLst/>
+              </a:prstGeom>
+              <a:noFill/>
+            </p:spPr>
+            <p:txBody>
+              <a:bodyPr lIns="0" tIns="0" rIns="0" bIns="0" anchor="ctr">
+                <a:noAutofit/>
+              </a:bodyPr>
+              <a:lstStyle/>
+              <a:p>
+                <a:pPr algn="ctr">
+                  <a:buNone/>
+                </a:pPr>
+                <a14:m>
+                  <m:oMathPara xmlns:m="http://schemas.openxmlformats.org/officeDocument/2006/math" xmlns:a="http://schemas.openxmlformats.org/drawingml/2006/main">
+                    <m:oMathParaPr>
+                      <m:jc m:val="centerGroup"/>
+                    </m:oMathParaPr>
+                    <m:oMath xmlns:m="http://schemas.openxmlformats.org/officeDocument/2006/math">
+                      <m:r>
+                        <m:rPr>
+                          <m:sty m:val="p"/>
+                        </m:rPr>
+                        <a:rPr lang="en-US" i="0" smtClean="0" sz="1641">
+                          <a:solidFill>
+                            <a:srgbClr val="C00000"/>
+                          </a:solidFill>
+                          <a:latin typeface="Cambria Math" panose="02040503050406030204" pitchFamily="18" charset="0"/>
+                        </a:rPr>
+                        <m:t xml:space="preserve">sin</m:t>
+                      </m:r>
+                      <m:r>
+                        <a:rPr lang="en-US" i="1" smtClean="0" sz="1641">
+                          <a:solidFill>
+                            <a:srgbClr val="C00000"/>
+                          </a:solidFill>
+                          <a:latin typeface="Cambria Math" panose="02040503050406030204" pitchFamily="18" charset="0"/>
+                        </a:rPr>
+                        <m:t xml:space="preserve">(a)</m:t>
+                      </m:r>
+                    </m:oMath>
+                  </m:oMathPara>
+                </a14:m>
+                <a:endParaRPr lang="en-US" dirty="0"/>
+              </a:p>
+            </p:txBody>
+          </p:sp>
+        </mc:Choice>
+        <mc:Fallback>
+          <p:pic>
+            <p:nvPicPr>
+              <p:cNvPr id="81" name="Image 25" descr="/home/ahmed/Projects/ai_llm_slides/videos/deep-learning/002_transformers_part2/recreated_pptx/build/assets/mvr2_s4.png">    </p:cNvPr>
+              <p:cNvPicPr>
+                <a:picLocks noChangeAspect="1"/>
+              </p:cNvPicPr>
+              <p:nvPr/>
+            </p:nvPicPr>
+            <p:blipFill>
+              <a:blip r:embed="rId26"/>
+              <a:stretch>
+                <a:fillRect/>
+              </a:stretch>
+            </p:blipFill>
+            <p:spPr>
+              <a:xfrm>
+                <a:off x="6668008" y="2388108"/>
+                <a:ext cx="585216" cy="210312"/>
+              </a:xfrm>
+              <a:prstGeom prst="rect">
+                <a:avLst/>
+              </a:prstGeom>
+            </p:spPr>
+          </p:pic>
+        </mc:Fallback>
+      </mc:AlternateContent>
+      <mc:AlternateContent>
+        <mc:Choice xmlns:a14="http://schemas.microsoft.com/office/drawing/2010/main" Requires="a14">
+          <p:sp>
+            <p:nvSpPr>
+              <p:cNvPr id="82" name="Equation OMML" descr="\mathrm{sin}(b)"/>
+              <p:cNvSpPr txBox="1"/>
+              <p:nvPr/>
+            </p:nvSpPr>
+            <p:spPr>
+              <a:xfrm>
+                <a:off x="7341108" y="2388108"/>
+                <a:ext cx="585216" cy="208788"/>
+              </a:xfrm>
+              <a:prstGeom prst="rect">
+                <a:avLst/>
+              </a:prstGeom>
+              <a:noFill/>
+            </p:spPr>
+            <p:txBody>
+              <a:bodyPr lIns="0" tIns="0" rIns="0" bIns="0" anchor="ctr">
+                <a:noAutofit/>
+              </a:bodyPr>
+              <a:lstStyle/>
+              <a:p>
+                <a:pPr algn="ctr">
+                  <a:buNone/>
+                </a:pPr>
+                <a14:m>
+                  <m:oMathPara xmlns:m="http://schemas.openxmlformats.org/officeDocument/2006/math" xmlns:a="http://schemas.openxmlformats.org/drawingml/2006/main">
+                    <m:oMathParaPr>
+                      <m:jc m:val="centerGroup"/>
+                    </m:oMathParaPr>
+                    <m:oMath xmlns:m="http://schemas.openxmlformats.org/officeDocument/2006/math">
+                      <m:r>
+                        <m:rPr>
+                          <m:sty m:val="p"/>
+                        </m:rPr>
+                        <a:rPr lang="en-US" i="0" smtClean="0" sz="1630">
+                          <a:solidFill>
+                            <a:srgbClr val="0000CC"/>
+                          </a:solidFill>
+                          <a:latin typeface="Cambria Math" panose="02040503050406030204" pitchFamily="18" charset="0"/>
+                        </a:rPr>
+                        <m:t xml:space="preserve">sin</m:t>
+                      </m:r>
+                      <m:r>
+                        <a:rPr lang="en-US" i="1" smtClean="0" sz="1630">
+                          <a:solidFill>
+                            <a:srgbClr val="0000CC"/>
+                          </a:solidFill>
+                          <a:latin typeface="Cambria Math" panose="02040503050406030204" pitchFamily="18" charset="0"/>
+                        </a:rPr>
+                        <m:t xml:space="preserve">(b)</m:t>
+                      </m:r>
+                    </m:oMath>
+                  </m:oMathPara>
+                </a14:m>
+                <a:endParaRPr lang="en-US" dirty="0"/>
+              </a:p>
+            </p:txBody>
+          </p:sp>
+        </mc:Choice>
+        <mc:Fallback>
+          <p:pic>
+            <p:nvPicPr>
+              <p:cNvPr id="82" name="Image 26" descr="/home/ahmed/Projects/ai_llm_slides/videos/deep-learning/002_transformers_part2/recreated_pptx/build/assets/mvr2_s5.png">    </p:cNvPr>
+              <p:cNvPicPr>
+                <a:picLocks noChangeAspect="1"/>
+              </p:cNvPicPr>
+              <p:nvPr/>
+            </p:nvPicPr>
+            <p:blipFill>
+              <a:blip r:embed="rId27"/>
+              <a:stretch>
+                <a:fillRect/>
+              </a:stretch>
+            </p:blipFill>
+            <p:spPr>
+              <a:xfrm>
+                <a:off x="7341108" y="2388108"/>
+                <a:ext cx="585216" cy="208788"/>
+              </a:xfrm>
+              <a:prstGeom prst="rect">
+                <a:avLst/>
+              </a:prstGeom>
+            </p:spPr>
+          </p:pic>
+        </mc:Fallback>
+      </mc:AlternateContent>
+      <mc:AlternateContent>
+        <mc:Choice xmlns:a14="http://schemas.microsoft.com/office/drawing/2010/main" Requires="a14">
+          <p:sp>
+            <p:nvSpPr>
+              <p:cNvPr id="83" name="Equation OMML" descr="\mathrm{Let}"/>
+              <p:cNvSpPr txBox="1"/>
+              <p:nvPr/>
+            </p:nvSpPr>
+            <p:spPr>
+              <a:xfrm>
+                <a:off x="8915908" y="1689608"/>
+                <a:ext cx="291084" cy="164592"/>
+              </a:xfrm>
+              <a:prstGeom prst="rect">
+                <a:avLst/>
+              </a:prstGeom>
+              <a:noFill/>
+            </p:spPr>
+            <p:txBody>
+              <a:bodyPr lIns="0" tIns="0" rIns="0" bIns="0" anchor="ctr">
+                <a:noAutofit/>
+              </a:bodyPr>
+              <a:lstStyle/>
+              <a:p>
+                <a:pPr algn="ctr">
+                  <a:buNone/>
+                </a:pPr>
+                <a14:m>
+                  <m:oMathPara xmlns:m="http://schemas.openxmlformats.org/officeDocument/2006/math" xmlns:a="http://schemas.openxmlformats.org/drawingml/2006/main">
+                    <m:oMathParaPr>
+                      <m:jc m:val="centerGroup"/>
+                    </m:oMathParaPr>
+                    <m:oMath xmlns:m="http://schemas.openxmlformats.org/officeDocument/2006/math">
+                      <m:r>
+                        <m:rPr>
+                          <m:sty m:val="p"/>
+                        </m:rPr>
+                        <a:rPr lang="en-US" i="0" smtClean="0" sz="1476">
+                          <a:solidFill>
+                            <a:srgbClr val="000000"/>
+                          </a:solidFill>
+                          <a:latin typeface="Cambria Math" panose="02040503050406030204" pitchFamily="18" charset="0"/>
+                        </a:rPr>
+                        <m:t xml:space="preserve">Let</m:t>
+                      </m:r>
+                    </m:oMath>
+                  </m:oMathPara>
+                </a14:m>
+                <a:endParaRPr lang="en-US" dirty="0"/>
+              </a:p>
+            </p:txBody>
+          </p:sp>
+        </mc:Choice>
+        <mc:Fallback>
+          <p:pic>
+            <p:nvPicPr>
+              <p:cNvPr id="83" name="Image 27" descr="/home/ahmed/Projects/ai_llm_slides/videos/deep-learning/002_transformers_part2/recreated_pptx/build/assets/db1_let.png">    </p:cNvPr>
+              <p:cNvPicPr>
+                <a:picLocks noChangeAspect="1"/>
+              </p:cNvPicPr>
+              <p:nvPr/>
+            </p:nvPicPr>
+            <p:blipFill>
+              <a:blip r:embed="rId28"/>
+              <a:stretch>
+                <a:fillRect/>
+              </a:stretch>
+            </p:blipFill>
+            <p:spPr>
+              <a:xfrm>
+                <a:off x="8915908" y="1689608"/>
+                <a:ext cx="291084" cy="164592"/>
+              </a:xfrm>
+              <a:prstGeom prst="rect">
+                <a:avLst/>
+              </a:prstGeom>
+            </p:spPr>
+          </p:pic>
+        </mc:Fallback>
+      </mc:AlternateContent>
+      <mc:AlternateContent>
+        <mc:Choice xmlns:a14="http://schemas.microsoft.com/office/drawing/2010/main" Requires="a14">
+          <p:sp>
+            <p:nvSpPr>
+              <p:cNvPr id="84" name="Equation OMML" descr="\omega t=a\;,"/>
+              <p:cNvSpPr txBox="1"/>
+              <p:nvPr/>
+            </p:nvSpPr>
+            <p:spPr>
+              <a:xfrm>
+                <a:off x="9322308" y="1689608"/>
+                <a:ext cx="582168" cy="153924"/>
+              </a:xfrm>
+              <a:prstGeom prst="rect">
+                <a:avLst/>
+              </a:prstGeom>
+              <a:noFill/>
+            </p:spPr>
+            <p:txBody>
+              <a:bodyPr lIns="0" tIns="0" rIns="0" bIns="0" anchor="ctr">
+                <a:noAutofit/>
+              </a:bodyPr>
+              <a:lstStyle/>
+              <a:p>
+                <a:pPr algn="ctr">
+                  <a:buNone/>
+                </a:pPr>
+                <a14:m>
+                  <m:oMathPara xmlns:m="http://schemas.openxmlformats.org/officeDocument/2006/math" xmlns:a="http://schemas.openxmlformats.org/drawingml/2006/main">
+                    <m:oMathParaPr>
+                      <m:jc m:val="centerGroup"/>
+                    </m:oMathParaPr>
+                    <m:oMath xmlns:m="http://schemas.openxmlformats.org/officeDocument/2006/math">
+                      <m:r>
+                        <a:rPr lang="en-US" i="1" smtClean="0" sz="1253">
+                          <a:solidFill>
+                            <a:srgbClr val="C00000"/>
+                          </a:solidFill>
+                          <a:latin typeface="Cambria Math" panose="02040503050406030204" pitchFamily="18" charset="0"/>
+                        </a:rPr>
+                        <m:t xml:space="preserve">ωt=a ,</m:t>
+                      </m:r>
+                    </m:oMath>
+                  </m:oMathPara>
+                </a14:m>
+                <a:endParaRPr lang="en-US" dirty="0"/>
+              </a:p>
+            </p:txBody>
+          </p:sp>
+        </mc:Choice>
+        <mc:Fallback>
+          <p:pic>
+            <p:nvPicPr>
+              <p:cNvPr id="84" name="Image 28" descr="/home/ahmed/Projects/ai_llm_slides/videos/deep-learning/002_transformers_part2/recreated_pptx/build/assets/db1_a.png">    </p:cNvPr>
+              <p:cNvPicPr>
+                <a:picLocks noChangeAspect="1"/>
+              </p:cNvPicPr>
+              <p:nvPr/>
+            </p:nvPicPr>
+            <p:blipFill>
+              <a:blip r:embed="rId29"/>
+              <a:stretch>
+                <a:fillRect/>
+              </a:stretch>
+            </p:blipFill>
+            <p:spPr>
+              <a:xfrm>
+                <a:off x="9322308" y="1689608"/>
+                <a:ext cx="582168" cy="153924"/>
+              </a:xfrm>
+              <a:prstGeom prst="rect">
+                <a:avLst/>
+              </a:prstGeom>
+            </p:spPr>
+          </p:pic>
+        </mc:Fallback>
+      </mc:AlternateContent>
+      <mc:AlternateContent>
+        <mc:Choice xmlns:a14="http://schemas.microsoft.com/office/drawing/2010/main" Requires="a14">
+          <p:sp>
+            <p:nvSpPr>
+              <p:cNvPr id="85" name="Equation OMML" descr="\omega \delta=b"/>
+              <p:cNvSpPr txBox="1"/>
+              <p:nvPr/>
+            </p:nvSpPr>
+            <p:spPr>
+              <a:xfrm>
+                <a:off x="9982708" y="1689608"/>
+                <a:ext cx="519684" cy="143256"/>
+              </a:xfrm>
+              <a:prstGeom prst="rect">
+                <a:avLst/>
+              </a:prstGeom>
+              <a:noFill/>
+            </p:spPr>
+            <p:txBody>
+              <a:bodyPr lIns="0" tIns="0" rIns="0" bIns="0" anchor="ctr">
+                <a:noAutofit/>
+              </a:bodyPr>
+              <a:lstStyle/>
+              <a:p>
+                <a:pPr algn="ctr">
+                  <a:buNone/>
+                </a:pPr>
+                <a14:m>
+                  <m:oMathPara xmlns:m="http://schemas.openxmlformats.org/officeDocument/2006/math" xmlns:a="http://schemas.openxmlformats.org/drawingml/2006/main">
+                    <m:oMathParaPr>
+                      <m:jc m:val="centerGroup"/>
+                    </m:oMathParaPr>
+                    <m:oMath xmlns:m="http://schemas.openxmlformats.org/officeDocument/2006/math">
+                      <m:r>
+                        <a:rPr lang="en-US" i="1" smtClean="0" sz="1217">
+                          <a:solidFill>
+                            <a:srgbClr val="0000CC"/>
+                          </a:solidFill>
+                          <a:latin typeface="Cambria Math" panose="02040503050406030204" pitchFamily="18" charset="0"/>
+                        </a:rPr>
+                        <m:t xml:space="preserve">ωδ=b</m:t>
+                      </m:r>
+                    </m:oMath>
+                  </m:oMathPara>
+                </a14:m>
+                <a:endParaRPr lang="en-US" dirty="0"/>
+              </a:p>
+            </p:txBody>
+          </p:sp>
+        </mc:Choice>
+        <mc:Fallback>
+          <p:pic>
+            <p:nvPicPr>
+              <p:cNvPr id="85" name="Image 29" descr="/home/ahmed/Projects/ai_llm_slides/videos/deep-learning/002_transformers_part2/recreated_pptx/build/assets/db1_b.png">    </p:cNvPr>
+              <p:cNvPicPr>
+                <a:picLocks noChangeAspect="1"/>
+              </p:cNvPicPr>
+              <p:nvPr/>
+            </p:nvPicPr>
+            <p:blipFill>
+              <a:blip r:embed="rId30"/>
+              <a:stretch>
+                <a:fillRect/>
+              </a:stretch>
+            </p:blipFill>
+            <p:spPr>
+              <a:xfrm>
+                <a:off x="9982708" y="1689608"/>
+                <a:ext cx="519684" cy="143256"/>
+              </a:xfrm>
+              <a:prstGeom prst="rect">
+                <a:avLst/>
+              </a:prstGeom>
+            </p:spPr>
+          </p:pic>
+        </mc:Fallback>
+      </mc:AlternateContent>
+      <mc:AlternateContent>
+        <mc:Choice xmlns:a14="http://schemas.microsoft.com/office/drawing/2010/main" Requires="a14">
+          <p:sp>
+            <p:nvSpPr>
+              <p:cNvPr id="86" name="Equation OMML" descr="\mathrm{sin}^{2}(a)+\mathrm{cos}^{2}(a)=1"/>
+              <p:cNvSpPr txBox="1"/>
+              <p:nvPr/>
+            </p:nvSpPr>
+            <p:spPr>
+              <a:xfrm>
+                <a:off x="8776208" y="2223008"/>
+                <a:ext cx="1874520" cy="225552"/>
+              </a:xfrm>
+              <a:prstGeom prst="rect">
+                <a:avLst/>
+              </a:prstGeom>
+              <a:noFill/>
+            </p:spPr>
+            <p:txBody>
+              <a:bodyPr lIns="0" tIns="0" rIns="0" bIns="0" anchor="ctr">
+                <a:noAutofit/>
+              </a:bodyPr>
+              <a:lstStyle/>
+              <a:p>
+                <a:pPr algn="ctr">
+                  <a:buNone/>
+                </a:pPr>
+                <a14:m>
+                  <m:oMathPara xmlns:m="http://schemas.openxmlformats.org/officeDocument/2006/math" xmlns:a="http://schemas.openxmlformats.org/drawingml/2006/main">
+                    <m:oMathParaPr>
+                      <m:jc m:val="centerGroup"/>
+                    </m:oMathParaPr>
+                    <m:oMath xmlns:m="http://schemas.openxmlformats.org/officeDocument/2006/math">
+                      <m:sSup>
+                        <m:sSupPr>
+                          <m:ctrlPr>
+                            <a:rPr lang="en-US" i="1" smtClean="0" sz="1484">
+                              <a:solidFill>
+                                <a:srgbClr val="000000"/>
+                              </a:solidFill>
+                              <a:latin typeface="Cambria Math" panose="02040503050406030204" pitchFamily="18" charset="0"/>
+                            </a:rPr>
+                          </m:ctrlPr>
+                        </m:sSupPr>
+                        <m:e>
+                          <m:r>
+                            <m:rPr>
+                              <m:sty m:val="p"/>
+                            </m:rPr>
+                            <a:rPr lang="en-US" i="0" smtClean="0" sz="1484">
+                              <a:solidFill>
+                                <a:srgbClr val="000000"/>
+                              </a:solidFill>
+                              <a:latin typeface="Cambria Math" panose="02040503050406030204" pitchFamily="18" charset="0"/>
+                            </a:rPr>
+                            <m:t xml:space="preserve">sin</m:t>
+                          </m:r>
+                        </m:e>
+                        <m:sup>
+                          <m:r>
+                            <a:rPr lang="en-US" i="1" smtClean="0" sz="1484">
+                              <a:solidFill>
+                                <a:srgbClr val="000000"/>
+                              </a:solidFill>
+                              <a:latin typeface="Cambria Math" panose="02040503050406030204" pitchFamily="18" charset="0"/>
+                            </a:rPr>
+                            <m:t xml:space="preserve">2</m:t>
+                          </m:r>
+                        </m:sup>
+                      </m:sSup>
+                      <m:r>
+                        <a:rPr lang="en-US" i="1" smtClean="0" sz="1484">
+                          <a:solidFill>
+                            <a:srgbClr val="000000"/>
+                          </a:solidFill>
+                          <a:latin typeface="Cambria Math" panose="02040503050406030204" pitchFamily="18" charset="0"/>
+                        </a:rPr>
+                        <m:t xml:space="preserve">(a)+</m:t>
+                      </m:r>
+                      <m:sSup>
+                        <m:sSupPr>
+                          <m:ctrlPr>
+                            <a:rPr lang="en-US" i="1" smtClean="0" sz="1484">
+                              <a:solidFill>
+                                <a:srgbClr val="000000"/>
+                              </a:solidFill>
+                              <a:latin typeface="Cambria Math" panose="02040503050406030204" pitchFamily="18" charset="0"/>
+                            </a:rPr>
+                          </m:ctrlPr>
+                        </m:sSupPr>
+                        <m:e>
+                          <m:r>
+                            <m:rPr>
+                              <m:sty m:val="p"/>
+                            </m:rPr>
+                            <a:rPr lang="en-US" i="0" smtClean="0" sz="1484">
+                              <a:solidFill>
+                                <a:srgbClr val="000000"/>
+                              </a:solidFill>
+                              <a:latin typeface="Cambria Math" panose="02040503050406030204" pitchFamily="18" charset="0"/>
+                            </a:rPr>
+                            <m:t xml:space="preserve">cos</m:t>
+                          </m:r>
+                        </m:e>
+                        <m:sup>
+                          <m:r>
+                            <a:rPr lang="en-US" i="1" smtClean="0" sz="1484">
+                              <a:solidFill>
+                                <a:srgbClr val="000000"/>
+                              </a:solidFill>
+                              <a:latin typeface="Cambria Math" panose="02040503050406030204" pitchFamily="18" charset="0"/>
+                            </a:rPr>
+                            <m:t xml:space="preserve">2</m:t>
+                          </m:r>
+                        </m:sup>
+                      </m:sSup>
+                      <m:r>
+                        <a:rPr lang="en-US" i="1" smtClean="0" sz="1484">
+                          <a:solidFill>
+                            <a:srgbClr val="000000"/>
+                          </a:solidFill>
+                          <a:latin typeface="Cambria Math" panose="02040503050406030204" pitchFamily="18" charset="0"/>
+                        </a:rPr>
+                        <m:t xml:space="preserve">(a)=1</m:t>
+                      </m:r>
+                    </m:oMath>
+                  </m:oMathPara>
+                </a14:m>
+                <a:endParaRPr lang="en-US" dirty="0"/>
+              </a:p>
+            </p:txBody>
+          </p:sp>
+        </mc:Choice>
+        <mc:Fallback>
+          <p:pic>
+            <p:nvPicPr>
+              <p:cNvPr id="86" name="Image 30" descr="/home/ahmed/Projects/ai_llm_slides/videos/deep-learning/002_transformers_part2/recreated_pptx/build/assets/db2.png">    </p:cNvPr>
+              <p:cNvPicPr>
+                <a:picLocks noChangeAspect="1"/>
+              </p:cNvPicPr>
+              <p:nvPr/>
+            </p:nvPicPr>
+            <p:blipFill>
+              <a:blip r:embed="rId31"/>
+              <a:stretch>
+                <a:fillRect/>
+              </a:stretch>
+            </p:blipFill>
+            <p:spPr>
+              <a:xfrm>
+                <a:off x="8776208" y="2223008"/>
+                <a:ext cx="1874520" cy="225552"/>
+              </a:xfrm>
+              <a:prstGeom prst="rect">
+                <a:avLst/>
+              </a:prstGeom>
+            </p:spPr>
+          </p:pic>
+        </mc:Fallback>
+      </mc:AlternateContent>
+      <mc:AlternateContent>
+        <mc:Choice xmlns:a14="http://schemas.microsoft.com/office/drawing/2010/main" Requires="a14">
+          <p:sp>
+            <p:nvSpPr>
+              <p:cNvPr id="87" name="Equation OMML" descr="[\,\mathrm{sin}(a)\,(\mathrm{cos}(b)-1)+\mathrm{cos}(a)\,\mathrm{sin}(b)\,]^{2}+\,[\,-\mathrm{sin}(a)\,\mathrm{sin}(b)+\mathrm{cos}(a)\,(\mathrm{cos}(b)-1)\,]^{2}"/>
+              <p:cNvSpPr txBox="1"/>
+              <p:nvPr/>
+            </p:nvSpPr>
+            <p:spPr>
+              <a:xfrm>
+                <a:off x="1067308" y="3785108"/>
+                <a:ext cx="8394192" cy="260604"/>
+              </a:xfrm>
+              <a:prstGeom prst="rect">
+                <a:avLst/>
+              </a:prstGeom>
+              <a:noFill/>
+            </p:spPr>
+            <p:txBody>
+              <a:bodyPr lIns="0" tIns="0" rIns="0" bIns="0" anchor="ctr">
+                <a:noAutofit/>
+              </a:bodyPr>
+              <a:lstStyle/>
+              <a:p>
+                <a:pPr algn="ctr">
+                  <a:buNone/>
+                </a:pPr>
+                <a14:m>
+                  <m:oMathPara xmlns:m="http://schemas.openxmlformats.org/officeDocument/2006/math" xmlns:a="http://schemas.openxmlformats.org/drawingml/2006/main">
+                    <m:oMathParaPr>
+                      <m:jc m:val="centerGroup"/>
+                    </m:oMathParaPr>
+                    <m:oMath xmlns:m="http://schemas.openxmlformats.org/officeDocument/2006/math">
+                      <m:r>
+                        <a:rPr lang="en-US" i="1" smtClean="0" sz="1749">
+                          <a:solidFill>
+                            <a:srgbClr val="000000"/>
+                          </a:solidFill>
+                          <a:latin typeface="Cambria Math" panose="02040503050406030204" pitchFamily="18" charset="0"/>
+                        </a:rPr>
+                        <m:t xml:space="preserve">[ </m:t>
+                      </m:r>
+                      <m:r>
+                        <m:rPr>
+                          <m:sty m:val="p"/>
+                        </m:rPr>
+                        <a:rPr lang="en-US" i="0" smtClean="0" sz="1749">
+                          <a:solidFill>
+                            <a:srgbClr val="000000"/>
+                          </a:solidFill>
+                          <a:latin typeface="Cambria Math" panose="02040503050406030204" pitchFamily="18" charset="0"/>
+                        </a:rPr>
+                        <m:t xml:space="preserve">sin</m:t>
+                      </m:r>
+                      <m:r>
+                        <a:rPr lang="en-US" i="1" smtClean="0" sz="1749">
+                          <a:solidFill>
+                            <a:srgbClr val="000000"/>
+                          </a:solidFill>
+                          <a:latin typeface="Cambria Math" panose="02040503050406030204" pitchFamily="18" charset="0"/>
+                        </a:rPr>
+                        <m:t xml:space="preserve">(a) (</m:t>
+                      </m:r>
+                      <m:r>
+                        <m:rPr>
+                          <m:sty m:val="p"/>
+                        </m:rPr>
+                        <a:rPr lang="en-US" i="0" smtClean="0" sz="1749">
+                          <a:solidFill>
+                            <a:srgbClr val="000000"/>
+                          </a:solidFill>
+                          <a:latin typeface="Cambria Math" panose="02040503050406030204" pitchFamily="18" charset="0"/>
+                        </a:rPr>
+                        <m:t xml:space="preserve">cos</m:t>
+                      </m:r>
+                      <m:r>
+                        <a:rPr lang="en-US" i="1" smtClean="0" sz="1749">
+                          <a:solidFill>
+                            <a:srgbClr val="000000"/>
+                          </a:solidFill>
+                          <a:latin typeface="Cambria Math" panose="02040503050406030204" pitchFamily="18" charset="0"/>
+                        </a:rPr>
+                        <m:t xml:space="preserve">(b)-1)+</m:t>
+                      </m:r>
+                      <m:r>
+                        <m:rPr>
+                          <m:sty m:val="p"/>
+                        </m:rPr>
+                        <a:rPr lang="en-US" i="0" smtClean="0" sz="1749">
+                          <a:solidFill>
+                            <a:srgbClr val="000000"/>
+                          </a:solidFill>
+                          <a:latin typeface="Cambria Math" panose="02040503050406030204" pitchFamily="18" charset="0"/>
+                        </a:rPr>
+                        <m:t xml:space="preserve">cos</m:t>
+                      </m:r>
+                      <m:r>
+                        <a:rPr lang="en-US" i="1" smtClean="0" sz="1749">
+                          <a:solidFill>
+                            <a:srgbClr val="000000"/>
+                          </a:solidFill>
+                          <a:latin typeface="Cambria Math" panose="02040503050406030204" pitchFamily="18" charset="0"/>
+                        </a:rPr>
+                        <m:t xml:space="preserve">(a) </m:t>
+                      </m:r>
+                      <m:r>
+                        <m:rPr>
+                          <m:sty m:val="p"/>
+                        </m:rPr>
+                        <a:rPr lang="en-US" i="0" smtClean="0" sz="1749">
+                          <a:solidFill>
+                            <a:srgbClr val="000000"/>
+                          </a:solidFill>
+                          <a:latin typeface="Cambria Math" panose="02040503050406030204" pitchFamily="18" charset="0"/>
+                        </a:rPr>
+                        <m:t xml:space="preserve">sin</m:t>
+                      </m:r>
+                      <m:r>
+                        <a:rPr lang="en-US" i="1" smtClean="0" sz="1749">
+                          <a:solidFill>
+                            <a:srgbClr val="000000"/>
+                          </a:solidFill>
+                          <a:latin typeface="Cambria Math" panose="02040503050406030204" pitchFamily="18" charset="0"/>
+                        </a:rPr>
+                        <m:t xml:space="preserve">(b) </m:t>
+                      </m:r>
+                      <m:sSup>
+                        <m:sSupPr>
+                          <m:ctrlPr>
+                            <a:rPr lang="en-US" i="1" smtClean="0" sz="1749">
+                              <a:solidFill>
+                                <a:srgbClr val="000000"/>
+                              </a:solidFill>
+                              <a:latin typeface="Cambria Math" panose="02040503050406030204" pitchFamily="18" charset="0"/>
+                            </a:rPr>
+                          </m:ctrlPr>
+                        </m:sSupPr>
+                        <m:e>
+                          <m:r>
+                            <a:rPr lang="en-US" i="1" smtClean="0" sz="1749">
+                              <a:solidFill>
+                                <a:srgbClr val="000000"/>
+                              </a:solidFill>
+                              <a:latin typeface="Cambria Math" panose="02040503050406030204" pitchFamily="18" charset="0"/>
+                            </a:rPr>
+                            <m:t xml:space="preserve">]</m:t>
+                          </m:r>
+                        </m:e>
+                        <m:sup>
+                          <m:r>
+                            <a:rPr lang="en-US" i="1" smtClean="0" sz="1749">
+                              <a:solidFill>
+                                <a:srgbClr val="000000"/>
+                              </a:solidFill>
+                              <a:latin typeface="Cambria Math" panose="02040503050406030204" pitchFamily="18" charset="0"/>
+                            </a:rPr>
+                            <m:t xml:space="preserve">2</m:t>
+                          </m:r>
+                        </m:sup>
+                      </m:sSup>
+                      <m:r>
+                        <a:rPr lang="en-US" i="1" smtClean="0" sz="1749">
+                          <a:solidFill>
+                            <a:srgbClr val="000000"/>
+                          </a:solidFill>
+                          <a:latin typeface="Cambria Math" panose="02040503050406030204" pitchFamily="18" charset="0"/>
+                        </a:rPr>
+                        <m:t xml:space="preserve">+ [ -</m:t>
+                      </m:r>
+                      <m:r>
+                        <m:rPr>
+                          <m:sty m:val="p"/>
+                        </m:rPr>
+                        <a:rPr lang="en-US" i="0" smtClean="0" sz="1749">
+                          <a:solidFill>
+                            <a:srgbClr val="000000"/>
+                          </a:solidFill>
+                          <a:latin typeface="Cambria Math" panose="02040503050406030204" pitchFamily="18" charset="0"/>
+                        </a:rPr>
+                        <m:t xml:space="preserve">sin</m:t>
+                      </m:r>
+                      <m:r>
+                        <a:rPr lang="en-US" i="1" smtClean="0" sz="1749">
+                          <a:solidFill>
+                            <a:srgbClr val="000000"/>
+                          </a:solidFill>
+                          <a:latin typeface="Cambria Math" panose="02040503050406030204" pitchFamily="18" charset="0"/>
+                        </a:rPr>
+                        <m:t xml:space="preserve">(a) </m:t>
+                      </m:r>
+                      <m:r>
+                        <m:rPr>
+                          <m:sty m:val="p"/>
+                        </m:rPr>
+                        <a:rPr lang="en-US" i="0" smtClean="0" sz="1749">
+                          <a:solidFill>
+                            <a:srgbClr val="000000"/>
+                          </a:solidFill>
+                          <a:latin typeface="Cambria Math" panose="02040503050406030204" pitchFamily="18" charset="0"/>
+                        </a:rPr>
+                        <m:t xml:space="preserve">sin</m:t>
+                      </m:r>
+                      <m:r>
+                        <a:rPr lang="en-US" i="1" smtClean="0" sz="1749">
+                          <a:solidFill>
+                            <a:srgbClr val="000000"/>
+                          </a:solidFill>
+                          <a:latin typeface="Cambria Math" panose="02040503050406030204" pitchFamily="18" charset="0"/>
+                        </a:rPr>
+                        <m:t xml:space="preserve">(b)+</m:t>
+                      </m:r>
+                      <m:r>
+                        <m:rPr>
+                          <m:sty m:val="p"/>
+                        </m:rPr>
+                        <a:rPr lang="en-US" i="0" smtClean="0" sz="1749">
+                          <a:solidFill>
+                            <a:srgbClr val="000000"/>
+                          </a:solidFill>
+                          <a:latin typeface="Cambria Math" panose="02040503050406030204" pitchFamily="18" charset="0"/>
+                        </a:rPr>
+                        <m:t xml:space="preserve">cos</m:t>
+                      </m:r>
+                      <m:r>
+                        <a:rPr lang="en-US" i="1" smtClean="0" sz="1749">
+                          <a:solidFill>
+                            <a:srgbClr val="000000"/>
+                          </a:solidFill>
+                          <a:latin typeface="Cambria Math" panose="02040503050406030204" pitchFamily="18" charset="0"/>
+                        </a:rPr>
+                        <m:t xml:space="preserve">(a) (</m:t>
+                      </m:r>
+                      <m:r>
+                        <m:rPr>
+                          <m:sty m:val="p"/>
+                        </m:rPr>
+                        <a:rPr lang="en-US" i="0" smtClean="0" sz="1749">
+                          <a:solidFill>
+                            <a:srgbClr val="000000"/>
+                          </a:solidFill>
+                          <a:latin typeface="Cambria Math" panose="02040503050406030204" pitchFamily="18" charset="0"/>
+                        </a:rPr>
+                        <m:t xml:space="preserve">cos</m:t>
+                      </m:r>
+                      <m:r>
+                        <a:rPr lang="en-US" i="1" smtClean="0" sz="1749">
+                          <a:solidFill>
+                            <a:srgbClr val="000000"/>
+                          </a:solidFill>
+                          <a:latin typeface="Cambria Math" panose="02040503050406030204" pitchFamily="18" charset="0"/>
+                        </a:rPr>
+                        <m:t xml:space="preserve">(b)-1) </m:t>
+                      </m:r>
+                      <m:sSup>
+                        <m:sSupPr>
+                          <m:ctrlPr>
+                            <a:rPr lang="en-US" i="1" smtClean="0" sz="1749">
+                              <a:solidFill>
+                                <a:srgbClr val="000000"/>
+                              </a:solidFill>
+                              <a:latin typeface="Cambria Math" panose="02040503050406030204" pitchFamily="18" charset="0"/>
+                            </a:rPr>
+                          </m:ctrlPr>
+                        </m:sSupPr>
+                        <m:e>
+                          <m:r>
+                            <a:rPr lang="en-US" i="1" smtClean="0" sz="1749">
+                              <a:solidFill>
+                                <a:srgbClr val="000000"/>
+                              </a:solidFill>
+                              <a:latin typeface="Cambria Math" panose="02040503050406030204" pitchFamily="18" charset="0"/>
+                            </a:rPr>
+                            <m:t xml:space="preserve">]</m:t>
+                          </m:r>
+                        </m:e>
+                        <m:sup>
+                          <m:r>
+                            <a:rPr lang="en-US" i="1" smtClean="0" sz="1749">
+                              <a:solidFill>
+                                <a:srgbClr val="000000"/>
+                              </a:solidFill>
+                              <a:latin typeface="Cambria Math" panose="02040503050406030204" pitchFamily="18" charset="0"/>
+                            </a:rPr>
+                            <m:t xml:space="preserve">2</m:t>
+                          </m:r>
+                        </m:sup>
+                      </m:sSup>
+                    </m:oMath>
+                  </m:oMathPara>
+                </a14:m>
+                <a:endParaRPr lang="en-US" dirty="0"/>
+              </a:p>
+            </p:txBody>
+          </p:sp>
+        </mc:Choice>
+        <mc:Fallback>
+          <p:pic>
+            <p:nvPicPr>
+              <p:cNvPr id="87" name="Image 31" descr="/home/ahmed/Projects/ai_llm_slides/videos/deep-learning/002_transformers_part2/recreated_pptx/build/assets/dR2.png">    </p:cNvPr>
+              <p:cNvPicPr>
+                <a:picLocks noChangeAspect="1"/>
+              </p:cNvPicPr>
+              <p:nvPr/>
+            </p:nvPicPr>
+            <p:blipFill>
+              <a:blip r:embed="rId32"/>
+              <a:stretch>
+                <a:fillRect/>
+              </a:stretch>
+            </p:blipFill>
+            <p:spPr>
+              <a:xfrm>
+                <a:off x="1067308" y="3785108"/>
+                <a:ext cx="8394192" cy="260604"/>
+              </a:xfrm>
+              <a:prstGeom prst="rect">
+                <a:avLst/>
+              </a:prstGeom>
+            </p:spPr>
+          </p:pic>
+        </mc:Fallback>
+      </mc:AlternateContent>
+      <mc:AlternateContent>
+        <mc:Choice xmlns:a14="http://schemas.microsoft.com/office/drawing/2010/main" Requires="a14">
+          <p:sp>
+            <p:nvSpPr>
+              <p:cNvPr id="88" name="Equation OMML" descr="[\,\mathrm{sin}(a)^{2}(\mathrm{cos}(b)-1)^{2}+\mathrm{cos}^{2}(a)\,\mathrm{sin}^{2}(b)+\,2\,\mathrm{sin}(a)\,\mathrm{cos}(a)\,\mathrm{sin}(b)\,(\mathrm{cos}(b)-1)\,]\,+"/>
+              <p:cNvSpPr txBox="1"/>
+              <p:nvPr/>
+            </p:nvSpPr>
+            <p:spPr>
+              <a:xfrm>
+                <a:off x="1105408" y="4280408"/>
+                <a:ext cx="7706868" cy="245364"/>
+              </a:xfrm>
+              <a:prstGeom prst="rect">
+                <a:avLst/>
+              </a:prstGeom>
+              <a:noFill/>
+            </p:spPr>
+            <p:txBody>
+              <a:bodyPr lIns="0" tIns="0" rIns="0" bIns="0" anchor="ctr">
+                <a:noAutofit/>
+              </a:bodyPr>
+              <a:lstStyle/>
+              <a:p>
+                <a:pPr algn="ctr">
+                  <a:buNone/>
+                </a:pPr>
+                <a14:m>
+                  <m:oMathPara xmlns:m="http://schemas.openxmlformats.org/officeDocument/2006/math" xmlns:a="http://schemas.openxmlformats.org/drawingml/2006/main">
+                    <m:oMathParaPr>
+                      <m:jc m:val="centerGroup"/>
+                    </m:oMathParaPr>
+                    <m:oMath xmlns:m="http://schemas.openxmlformats.org/officeDocument/2006/math">
+                      <m:r>
+                        <a:rPr lang="en-US" i="1" smtClean="0" sz="1633">
+                          <a:solidFill>
+                            <a:srgbClr val="000000"/>
+                          </a:solidFill>
+                          <a:latin typeface="Cambria Math" panose="02040503050406030204" pitchFamily="18" charset="0"/>
+                        </a:rPr>
+                        <m:t xml:space="preserve">[ </m:t>
+                      </m:r>
+                      <m:r>
+                        <m:rPr>
+                          <m:sty m:val="p"/>
+                        </m:rPr>
+                        <a:rPr lang="en-US" i="0" smtClean="0" sz="1633">
+                          <a:solidFill>
+                            <a:srgbClr val="000000"/>
+                          </a:solidFill>
+                          <a:latin typeface="Cambria Math" panose="02040503050406030204" pitchFamily="18" charset="0"/>
+                        </a:rPr>
+                        <m:t xml:space="preserve">sin</m:t>
+                      </m:r>
+                      <m:r>
+                        <a:rPr lang="en-US" i="1" smtClean="0" sz="1633">
+                          <a:solidFill>
+                            <a:srgbClr val="000000"/>
+                          </a:solidFill>
+                          <a:latin typeface="Cambria Math" panose="02040503050406030204" pitchFamily="18" charset="0"/>
+                        </a:rPr>
+                        <m:t xml:space="preserve">(a</m:t>
+                      </m:r>
+                      <m:sSup>
+                        <m:sSupPr>
+                          <m:ctrlPr>
+                            <a:rPr lang="en-US" i="1" smtClean="0" sz="1633">
+                              <a:solidFill>
+                                <a:srgbClr val="000000"/>
+                              </a:solidFill>
+                              <a:latin typeface="Cambria Math" panose="02040503050406030204" pitchFamily="18" charset="0"/>
+                            </a:rPr>
+                          </m:ctrlPr>
+                        </m:sSupPr>
+                        <m:e>
+                          <m:r>
+                            <a:rPr lang="en-US" i="1" smtClean="0" sz="1633">
+                              <a:solidFill>
+                                <a:srgbClr val="000000"/>
+                              </a:solidFill>
+                              <a:latin typeface="Cambria Math" panose="02040503050406030204" pitchFamily="18" charset="0"/>
+                            </a:rPr>
+                            <m:t xml:space="preserve">)</m:t>
+                          </m:r>
+                        </m:e>
+                        <m:sup>
+                          <m:r>
+                            <a:rPr lang="en-US" i="1" smtClean="0" sz="1633">
+                              <a:solidFill>
+                                <a:srgbClr val="000000"/>
+                              </a:solidFill>
+                              <a:latin typeface="Cambria Math" panose="02040503050406030204" pitchFamily="18" charset="0"/>
+                            </a:rPr>
+                            <m:t xml:space="preserve">2</m:t>
+                          </m:r>
+                        </m:sup>
+                      </m:sSup>
+                      <m:r>
+                        <a:rPr lang="en-US" i="1" smtClean="0" sz="1633">
+                          <a:solidFill>
+                            <a:srgbClr val="000000"/>
+                          </a:solidFill>
+                          <a:latin typeface="Cambria Math" panose="02040503050406030204" pitchFamily="18" charset="0"/>
+                        </a:rPr>
+                        <m:t xml:space="preserve">(</m:t>
+                      </m:r>
+                      <m:r>
+                        <m:rPr>
+                          <m:sty m:val="p"/>
+                        </m:rPr>
+                        <a:rPr lang="en-US" i="0" smtClean="0" sz="1633">
+                          <a:solidFill>
+                            <a:srgbClr val="000000"/>
+                          </a:solidFill>
+                          <a:latin typeface="Cambria Math" panose="02040503050406030204" pitchFamily="18" charset="0"/>
+                        </a:rPr>
+                        <m:t xml:space="preserve">cos</m:t>
+                      </m:r>
+                      <m:r>
+                        <a:rPr lang="en-US" i="1" smtClean="0" sz="1633">
+                          <a:solidFill>
+                            <a:srgbClr val="000000"/>
+                          </a:solidFill>
+                          <a:latin typeface="Cambria Math" panose="02040503050406030204" pitchFamily="18" charset="0"/>
+                        </a:rPr>
+                        <m:t xml:space="preserve">(b)-1</m:t>
+                      </m:r>
+                      <m:sSup>
+                        <m:sSupPr>
+                          <m:ctrlPr>
+                            <a:rPr lang="en-US" i="1" smtClean="0" sz="1633">
+                              <a:solidFill>
+                                <a:srgbClr val="000000"/>
+                              </a:solidFill>
+                              <a:latin typeface="Cambria Math" panose="02040503050406030204" pitchFamily="18" charset="0"/>
+                            </a:rPr>
+                          </m:ctrlPr>
+                        </m:sSupPr>
+                        <m:e>
+                          <m:r>
+                            <a:rPr lang="en-US" i="1" smtClean="0" sz="1633">
+                              <a:solidFill>
+                                <a:srgbClr val="000000"/>
+                              </a:solidFill>
+                              <a:latin typeface="Cambria Math" panose="02040503050406030204" pitchFamily="18" charset="0"/>
+                            </a:rPr>
+                            <m:t xml:space="preserve">)</m:t>
+                          </m:r>
+                        </m:e>
+                        <m:sup>
+                          <m:r>
+                            <a:rPr lang="en-US" i="1" smtClean="0" sz="1633">
+                              <a:solidFill>
+                                <a:srgbClr val="000000"/>
+                              </a:solidFill>
+                              <a:latin typeface="Cambria Math" panose="02040503050406030204" pitchFamily="18" charset="0"/>
+                            </a:rPr>
+                            <m:t xml:space="preserve">2</m:t>
+                          </m:r>
+                        </m:sup>
+                      </m:sSup>
+                      <m:r>
+                        <a:rPr lang="en-US" i="1" smtClean="0" sz="1633">
+                          <a:solidFill>
+                            <a:srgbClr val="000000"/>
+                          </a:solidFill>
+                          <a:latin typeface="Cambria Math" panose="02040503050406030204" pitchFamily="18" charset="0"/>
+                        </a:rPr>
+                        <m:t xml:space="preserve">+</m:t>
+                      </m:r>
+                      <m:sSup>
+                        <m:sSupPr>
+                          <m:ctrlPr>
+                            <a:rPr lang="en-US" i="1" smtClean="0" sz="1633">
+                              <a:solidFill>
+                                <a:srgbClr val="000000"/>
+                              </a:solidFill>
+                              <a:latin typeface="Cambria Math" panose="02040503050406030204" pitchFamily="18" charset="0"/>
+                            </a:rPr>
+                          </m:ctrlPr>
+                        </m:sSupPr>
+                        <m:e>
+                          <m:r>
+                            <m:rPr>
+                              <m:sty m:val="p"/>
+                            </m:rPr>
+                            <a:rPr lang="en-US" i="0" smtClean="0" sz="1633">
+                              <a:solidFill>
+                                <a:srgbClr val="000000"/>
+                              </a:solidFill>
+                              <a:latin typeface="Cambria Math" panose="02040503050406030204" pitchFamily="18" charset="0"/>
+                            </a:rPr>
+                            <m:t xml:space="preserve">cos</m:t>
+                          </m:r>
+                        </m:e>
+                        <m:sup>
+                          <m:r>
+                            <a:rPr lang="en-US" i="1" smtClean="0" sz="1633">
+                              <a:solidFill>
+                                <a:srgbClr val="000000"/>
+                              </a:solidFill>
+                              <a:latin typeface="Cambria Math" panose="02040503050406030204" pitchFamily="18" charset="0"/>
+                            </a:rPr>
+                            <m:t xml:space="preserve">2</m:t>
+                          </m:r>
+                        </m:sup>
+                      </m:sSup>
+                      <m:r>
+                        <a:rPr lang="en-US" i="1" smtClean="0" sz="1633">
+                          <a:solidFill>
+                            <a:srgbClr val="000000"/>
+                          </a:solidFill>
+                          <a:latin typeface="Cambria Math" panose="02040503050406030204" pitchFamily="18" charset="0"/>
+                        </a:rPr>
+                        <m:t xml:space="preserve">(a) </m:t>
+                      </m:r>
+                      <m:sSup>
+                        <m:sSupPr>
+                          <m:ctrlPr>
+                            <a:rPr lang="en-US" i="1" smtClean="0" sz="1633">
+                              <a:solidFill>
+                                <a:srgbClr val="000000"/>
+                              </a:solidFill>
+                              <a:latin typeface="Cambria Math" panose="02040503050406030204" pitchFamily="18" charset="0"/>
+                            </a:rPr>
+                          </m:ctrlPr>
+                        </m:sSupPr>
+                        <m:e>
+                          <m:r>
+                            <m:rPr>
+                              <m:sty m:val="p"/>
+                            </m:rPr>
+                            <a:rPr lang="en-US" i="0" smtClean="0" sz="1633">
+                              <a:solidFill>
+                                <a:srgbClr val="000000"/>
+                              </a:solidFill>
+                              <a:latin typeface="Cambria Math" panose="02040503050406030204" pitchFamily="18" charset="0"/>
+                            </a:rPr>
+                            <m:t xml:space="preserve">sin</m:t>
+                          </m:r>
+                        </m:e>
+                        <m:sup>
+                          <m:r>
+                            <a:rPr lang="en-US" i="1" smtClean="0" sz="1633">
+                              <a:solidFill>
+                                <a:srgbClr val="000000"/>
+                              </a:solidFill>
+                              <a:latin typeface="Cambria Math" panose="02040503050406030204" pitchFamily="18" charset="0"/>
+                            </a:rPr>
+                            <m:t xml:space="preserve">2</m:t>
+                          </m:r>
+                        </m:sup>
+                      </m:sSup>
+                      <m:r>
+                        <a:rPr lang="en-US" i="1" smtClean="0" sz="1633">
+                          <a:solidFill>
+                            <a:srgbClr val="000000"/>
+                          </a:solidFill>
+                          <a:latin typeface="Cambria Math" panose="02040503050406030204" pitchFamily="18" charset="0"/>
+                        </a:rPr>
+                        <m:t xml:space="preserve">(b)+ 2 </m:t>
+                      </m:r>
+                      <m:r>
+                        <m:rPr>
+                          <m:sty m:val="p"/>
+                        </m:rPr>
+                        <a:rPr lang="en-US" i="0" smtClean="0" sz="1633">
+                          <a:solidFill>
+                            <a:srgbClr val="000000"/>
+                          </a:solidFill>
+                          <a:latin typeface="Cambria Math" panose="02040503050406030204" pitchFamily="18" charset="0"/>
+                        </a:rPr>
+                        <m:t xml:space="preserve">sin</m:t>
+                      </m:r>
+                      <m:r>
+                        <a:rPr lang="en-US" i="1" smtClean="0" sz="1633">
+                          <a:solidFill>
+                            <a:srgbClr val="000000"/>
+                          </a:solidFill>
+                          <a:latin typeface="Cambria Math" panose="02040503050406030204" pitchFamily="18" charset="0"/>
+                        </a:rPr>
+                        <m:t xml:space="preserve">(a) </m:t>
+                      </m:r>
+                      <m:r>
+                        <m:rPr>
+                          <m:sty m:val="p"/>
+                        </m:rPr>
+                        <a:rPr lang="en-US" i="0" smtClean="0" sz="1633">
+                          <a:solidFill>
+                            <a:srgbClr val="000000"/>
+                          </a:solidFill>
+                          <a:latin typeface="Cambria Math" panose="02040503050406030204" pitchFamily="18" charset="0"/>
+                        </a:rPr>
+                        <m:t xml:space="preserve">cos</m:t>
+                      </m:r>
+                      <m:r>
+                        <a:rPr lang="en-US" i="1" smtClean="0" sz="1633">
+                          <a:solidFill>
+                            <a:srgbClr val="000000"/>
+                          </a:solidFill>
+                          <a:latin typeface="Cambria Math" panose="02040503050406030204" pitchFamily="18" charset="0"/>
+                        </a:rPr>
+                        <m:t xml:space="preserve">(a) </m:t>
+                      </m:r>
+                      <m:r>
+                        <m:rPr>
+                          <m:sty m:val="p"/>
+                        </m:rPr>
+                        <a:rPr lang="en-US" i="0" smtClean="0" sz="1633">
+                          <a:solidFill>
+                            <a:srgbClr val="000000"/>
+                          </a:solidFill>
+                          <a:latin typeface="Cambria Math" panose="02040503050406030204" pitchFamily="18" charset="0"/>
+                        </a:rPr>
+                        <m:t xml:space="preserve">sin</m:t>
+                      </m:r>
+                      <m:r>
+                        <a:rPr lang="en-US" i="1" smtClean="0" sz="1633">
+                          <a:solidFill>
+                            <a:srgbClr val="000000"/>
+                          </a:solidFill>
+                          <a:latin typeface="Cambria Math" panose="02040503050406030204" pitchFamily="18" charset="0"/>
+                        </a:rPr>
+                        <m:t xml:space="preserve">(b) (</m:t>
+                      </m:r>
+                      <m:r>
+                        <m:rPr>
+                          <m:sty m:val="p"/>
+                        </m:rPr>
+                        <a:rPr lang="en-US" i="0" smtClean="0" sz="1633">
+                          <a:solidFill>
+                            <a:srgbClr val="000000"/>
+                          </a:solidFill>
+                          <a:latin typeface="Cambria Math" panose="02040503050406030204" pitchFamily="18" charset="0"/>
+                        </a:rPr>
+                        <m:t xml:space="preserve">cos</m:t>
+                      </m:r>
+                      <m:r>
+                        <a:rPr lang="en-US" i="1" smtClean="0" sz="1633">
+                          <a:solidFill>
+                            <a:srgbClr val="000000"/>
+                          </a:solidFill>
+                          <a:latin typeface="Cambria Math" panose="02040503050406030204" pitchFamily="18" charset="0"/>
+                        </a:rPr>
+                        <m:t xml:space="preserve">(b)-1) ] +</m:t>
+                      </m:r>
+                    </m:oMath>
+                  </m:oMathPara>
+                </a14:m>
+                <a:endParaRPr lang="en-US" dirty="0"/>
+              </a:p>
+            </p:txBody>
+          </p:sp>
+        </mc:Choice>
+        <mc:Fallback>
+          <p:pic>
+            <p:nvPicPr>
+              <p:cNvPr id="88" name="Image 32" descr="/home/ahmed/Projects/ai_llm_slides/videos/deep-learning/002_transformers_part2/recreated_pptx/build/assets/dR3.png">    </p:cNvPr>
+              <p:cNvPicPr>
+                <a:picLocks noChangeAspect="1"/>
+              </p:cNvPicPr>
+              <p:nvPr/>
+            </p:nvPicPr>
+            <p:blipFill>
+              <a:blip r:embed="rId33"/>
+              <a:stretch>
+                <a:fillRect/>
+              </a:stretch>
+            </p:blipFill>
+            <p:spPr>
+              <a:xfrm>
+                <a:off x="1105408" y="4280408"/>
+                <a:ext cx="7706868" cy="245364"/>
+              </a:xfrm>
+              <a:prstGeom prst="rect">
+                <a:avLst/>
+              </a:prstGeom>
+            </p:spPr>
+          </p:pic>
+        </mc:Fallback>
+      </mc:AlternateContent>
+      <mc:AlternateContent>
+        <mc:Choice xmlns:a14="http://schemas.microsoft.com/office/drawing/2010/main" Requires="a14">
+          <p:sp>
+            <p:nvSpPr>
+              <p:cNvPr id="89" name="Equation OMML" descr="[\,\mathrm{sin}^{2}(a)\,\mathrm{sin}^{2}(b)+\mathrm{cos}^{2}(a)\,(\mathrm{cos}(b)-1)^{2}-\,2\,\mathrm{sin}(a)\,\mathrm{cos}(a)\,\mathrm{sin}(b)\,(\mathrm{cos}(b)-1)\,]"/>
+              <p:cNvSpPr txBox="1"/>
+              <p:nvPr/>
+            </p:nvSpPr>
+            <p:spPr>
+              <a:xfrm>
+                <a:off x="1105408" y="4572508"/>
+                <a:ext cx="7240524" cy="236220"/>
+              </a:xfrm>
+              <a:prstGeom prst="rect">
+                <a:avLst/>
+              </a:prstGeom>
+              <a:noFill/>
+            </p:spPr>
+            <p:txBody>
+              <a:bodyPr lIns="0" tIns="0" rIns="0" bIns="0" anchor="ctr">
+                <a:noAutofit/>
+              </a:bodyPr>
+              <a:lstStyle/>
+              <a:p>
+                <a:pPr algn="ctr">
+                  <a:buNone/>
+                </a:pPr>
+                <a14:m>
+                  <m:oMathPara xmlns:m="http://schemas.openxmlformats.org/officeDocument/2006/math" xmlns:a="http://schemas.openxmlformats.org/drawingml/2006/main">
+                    <m:oMathParaPr>
+                      <m:jc m:val="centerGroup"/>
+                    </m:oMathParaPr>
+                    <m:oMath xmlns:m="http://schemas.openxmlformats.org/officeDocument/2006/math">
+                      <m:r>
+                        <a:rPr lang="en-US" i="1" smtClean="0" sz="1576">
+                          <a:solidFill>
+                            <a:srgbClr val="000000"/>
+                          </a:solidFill>
+                          <a:latin typeface="Cambria Math" panose="02040503050406030204" pitchFamily="18" charset="0"/>
+                        </a:rPr>
+                        <m:t xml:space="preserve">[ </m:t>
+                      </m:r>
+                      <m:sSup>
+                        <m:sSupPr>
+                          <m:ctrlPr>
+                            <a:rPr lang="en-US" i="1" smtClean="0" sz="1576">
+                              <a:solidFill>
+                                <a:srgbClr val="000000"/>
+                              </a:solidFill>
+                              <a:latin typeface="Cambria Math" panose="02040503050406030204" pitchFamily="18" charset="0"/>
+                            </a:rPr>
+                          </m:ctrlPr>
+                        </m:sSupPr>
+                        <m:e>
+                          <m:r>
+                            <m:rPr>
+                              <m:sty m:val="p"/>
+                            </m:rPr>
+                            <a:rPr lang="en-US" i="0" smtClean="0" sz="1576">
+                              <a:solidFill>
+                                <a:srgbClr val="000000"/>
+                              </a:solidFill>
+                              <a:latin typeface="Cambria Math" panose="02040503050406030204" pitchFamily="18" charset="0"/>
+                            </a:rPr>
+                            <m:t xml:space="preserve">sin</m:t>
+                          </m:r>
+                        </m:e>
+                        <m:sup>
+                          <m:r>
+                            <a:rPr lang="en-US" i="1" smtClean="0" sz="1576">
+                              <a:solidFill>
+                                <a:srgbClr val="000000"/>
+                              </a:solidFill>
+                              <a:latin typeface="Cambria Math" panose="02040503050406030204" pitchFamily="18" charset="0"/>
+                            </a:rPr>
+                            <m:t xml:space="preserve">2</m:t>
+                          </m:r>
+                        </m:sup>
+                      </m:sSup>
+                      <m:r>
+                        <a:rPr lang="en-US" i="1" smtClean="0" sz="1576">
+                          <a:solidFill>
+                            <a:srgbClr val="000000"/>
+                          </a:solidFill>
+                          <a:latin typeface="Cambria Math" panose="02040503050406030204" pitchFamily="18" charset="0"/>
+                        </a:rPr>
+                        <m:t xml:space="preserve">(a) </m:t>
+                      </m:r>
+                      <m:sSup>
+                        <m:sSupPr>
+                          <m:ctrlPr>
+                            <a:rPr lang="en-US" i="1" smtClean="0" sz="1576">
+                              <a:solidFill>
+                                <a:srgbClr val="000000"/>
+                              </a:solidFill>
+                              <a:latin typeface="Cambria Math" panose="02040503050406030204" pitchFamily="18" charset="0"/>
+                            </a:rPr>
+                          </m:ctrlPr>
+                        </m:sSupPr>
+                        <m:e>
+                          <m:r>
+                            <m:rPr>
+                              <m:sty m:val="p"/>
+                            </m:rPr>
+                            <a:rPr lang="en-US" i="0" smtClean="0" sz="1576">
+                              <a:solidFill>
+                                <a:srgbClr val="000000"/>
+                              </a:solidFill>
+                              <a:latin typeface="Cambria Math" panose="02040503050406030204" pitchFamily="18" charset="0"/>
+                            </a:rPr>
+                            <m:t xml:space="preserve">sin</m:t>
+                          </m:r>
+                        </m:e>
+                        <m:sup>
+                          <m:r>
+                            <a:rPr lang="en-US" i="1" smtClean="0" sz="1576">
+                              <a:solidFill>
+                                <a:srgbClr val="000000"/>
+                              </a:solidFill>
+                              <a:latin typeface="Cambria Math" panose="02040503050406030204" pitchFamily="18" charset="0"/>
+                            </a:rPr>
+                            <m:t xml:space="preserve">2</m:t>
+                          </m:r>
+                        </m:sup>
+                      </m:sSup>
+                      <m:r>
+                        <a:rPr lang="en-US" i="1" smtClean="0" sz="1576">
+                          <a:solidFill>
+                            <a:srgbClr val="000000"/>
+                          </a:solidFill>
+                          <a:latin typeface="Cambria Math" panose="02040503050406030204" pitchFamily="18" charset="0"/>
+                        </a:rPr>
+                        <m:t xml:space="preserve">(b)+</m:t>
+                      </m:r>
+                      <m:sSup>
+                        <m:sSupPr>
+                          <m:ctrlPr>
+                            <a:rPr lang="en-US" i="1" smtClean="0" sz="1576">
+                              <a:solidFill>
+                                <a:srgbClr val="000000"/>
+                              </a:solidFill>
+                              <a:latin typeface="Cambria Math" panose="02040503050406030204" pitchFamily="18" charset="0"/>
+                            </a:rPr>
+                          </m:ctrlPr>
+                        </m:sSupPr>
+                        <m:e>
+                          <m:r>
+                            <m:rPr>
+                              <m:sty m:val="p"/>
+                            </m:rPr>
+                            <a:rPr lang="en-US" i="0" smtClean="0" sz="1576">
+                              <a:solidFill>
+                                <a:srgbClr val="000000"/>
+                              </a:solidFill>
+                              <a:latin typeface="Cambria Math" panose="02040503050406030204" pitchFamily="18" charset="0"/>
+                            </a:rPr>
+                            <m:t xml:space="preserve">cos</m:t>
+                          </m:r>
+                        </m:e>
+                        <m:sup>
+                          <m:r>
+                            <a:rPr lang="en-US" i="1" smtClean="0" sz="1576">
+                              <a:solidFill>
+                                <a:srgbClr val="000000"/>
+                              </a:solidFill>
+                              <a:latin typeface="Cambria Math" panose="02040503050406030204" pitchFamily="18" charset="0"/>
+                            </a:rPr>
+                            <m:t xml:space="preserve">2</m:t>
+                          </m:r>
+                        </m:sup>
+                      </m:sSup>
+                      <m:r>
+                        <a:rPr lang="en-US" i="1" smtClean="0" sz="1576">
+                          <a:solidFill>
+                            <a:srgbClr val="000000"/>
+                          </a:solidFill>
+                          <a:latin typeface="Cambria Math" panose="02040503050406030204" pitchFamily="18" charset="0"/>
+                        </a:rPr>
+                        <m:t xml:space="preserve">(a) (</m:t>
+                      </m:r>
+                      <m:r>
+                        <m:rPr>
+                          <m:sty m:val="p"/>
+                        </m:rPr>
+                        <a:rPr lang="en-US" i="0" smtClean="0" sz="1576">
+                          <a:solidFill>
+                            <a:srgbClr val="000000"/>
+                          </a:solidFill>
+                          <a:latin typeface="Cambria Math" panose="02040503050406030204" pitchFamily="18" charset="0"/>
+                        </a:rPr>
+                        <m:t xml:space="preserve">cos</m:t>
+                      </m:r>
+                      <m:r>
+                        <a:rPr lang="en-US" i="1" smtClean="0" sz="1576">
+                          <a:solidFill>
+                            <a:srgbClr val="000000"/>
+                          </a:solidFill>
+                          <a:latin typeface="Cambria Math" panose="02040503050406030204" pitchFamily="18" charset="0"/>
+                        </a:rPr>
+                        <m:t xml:space="preserve">(b)-1</m:t>
+                      </m:r>
+                      <m:sSup>
+                        <m:sSupPr>
+                          <m:ctrlPr>
+                            <a:rPr lang="en-US" i="1" smtClean="0" sz="1576">
+                              <a:solidFill>
+                                <a:srgbClr val="000000"/>
+                              </a:solidFill>
+                              <a:latin typeface="Cambria Math" panose="02040503050406030204" pitchFamily="18" charset="0"/>
+                            </a:rPr>
+                          </m:ctrlPr>
+                        </m:sSupPr>
+                        <m:e>
+                          <m:r>
+                            <a:rPr lang="en-US" i="1" smtClean="0" sz="1576">
+                              <a:solidFill>
+                                <a:srgbClr val="000000"/>
+                              </a:solidFill>
+                              <a:latin typeface="Cambria Math" panose="02040503050406030204" pitchFamily="18" charset="0"/>
+                            </a:rPr>
+                            <m:t xml:space="preserve">)</m:t>
+                          </m:r>
+                        </m:e>
+                        <m:sup>
+                          <m:r>
+                            <a:rPr lang="en-US" i="1" smtClean="0" sz="1576">
+                              <a:solidFill>
+                                <a:srgbClr val="000000"/>
+                              </a:solidFill>
+                              <a:latin typeface="Cambria Math" panose="02040503050406030204" pitchFamily="18" charset="0"/>
+                            </a:rPr>
+                            <m:t xml:space="preserve">2</m:t>
+                          </m:r>
+                        </m:sup>
+                      </m:sSup>
+                      <m:r>
+                        <a:rPr lang="en-US" i="1" smtClean="0" sz="1576">
+                          <a:solidFill>
+                            <a:srgbClr val="000000"/>
+                          </a:solidFill>
+                          <a:latin typeface="Cambria Math" panose="02040503050406030204" pitchFamily="18" charset="0"/>
+                        </a:rPr>
+                        <m:t xml:space="preserve">- 2 </m:t>
+                      </m:r>
+                      <m:r>
+                        <m:rPr>
+                          <m:sty m:val="p"/>
+                        </m:rPr>
+                        <a:rPr lang="en-US" i="0" smtClean="0" sz="1576">
+                          <a:solidFill>
+                            <a:srgbClr val="000000"/>
+                          </a:solidFill>
+                          <a:latin typeface="Cambria Math" panose="02040503050406030204" pitchFamily="18" charset="0"/>
+                        </a:rPr>
+                        <m:t xml:space="preserve">sin</m:t>
+                      </m:r>
+                      <m:r>
+                        <a:rPr lang="en-US" i="1" smtClean="0" sz="1576">
+                          <a:solidFill>
+                            <a:srgbClr val="000000"/>
+                          </a:solidFill>
+                          <a:latin typeface="Cambria Math" panose="02040503050406030204" pitchFamily="18" charset="0"/>
+                        </a:rPr>
+                        <m:t xml:space="preserve">(a) </m:t>
+                      </m:r>
+                      <m:r>
+                        <m:rPr>
+                          <m:sty m:val="p"/>
+                        </m:rPr>
+                        <a:rPr lang="en-US" i="0" smtClean="0" sz="1576">
+                          <a:solidFill>
+                            <a:srgbClr val="000000"/>
+                          </a:solidFill>
+                          <a:latin typeface="Cambria Math" panose="02040503050406030204" pitchFamily="18" charset="0"/>
+                        </a:rPr>
+                        <m:t xml:space="preserve">cos</m:t>
+                      </m:r>
+                      <m:r>
+                        <a:rPr lang="en-US" i="1" smtClean="0" sz="1576">
+                          <a:solidFill>
+                            <a:srgbClr val="000000"/>
+                          </a:solidFill>
+                          <a:latin typeface="Cambria Math" panose="02040503050406030204" pitchFamily="18" charset="0"/>
+                        </a:rPr>
+                        <m:t xml:space="preserve">(a) </m:t>
+                      </m:r>
+                      <m:r>
+                        <m:rPr>
+                          <m:sty m:val="p"/>
+                        </m:rPr>
+                        <a:rPr lang="en-US" i="0" smtClean="0" sz="1576">
+                          <a:solidFill>
+                            <a:srgbClr val="000000"/>
+                          </a:solidFill>
+                          <a:latin typeface="Cambria Math" panose="02040503050406030204" pitchFamily="18" charset="0"/>
+                        </a:rPr>
+                        <m:t xml:space="preserve">sin</m:t>
+                      </m:r>
+                      <m:r>
+                        <a:rPr lang="en-US" i="1" smtClean="0" sz="1576">
+                          <a:solidFill>
+                            <a:srgbClr val="000000"/>
+                          </a:solidFill>
+                          <a:latin typeface="Cambria Math" panose="02040503050406030204" pitchFamily="18" charset="0"/>
+                        </a:rPr>
+                        <m:t xml:space="preserve">(b) (</m:t>
+                      </m:r>
+                      <m:r>
+                        <m:rPr>
+                          <m:sty m:val="p"/>
+                        </m:rPr>
+                        <a:rPr lang="en-US" i="0" smtClean="0" sz="1576">
+                          <a:solidFill>
+                            <a:srgbClr val="000000"/>
+                          </a:solidFill>
+                          <a:latin typeface="Cambria Math" panose="02040503050406030204" pitchFamily="18" charset="0"/>
+                        </a:rPr>
+                        <m:t xml:space="preserve">cos</m:t>
+                      </m:r>
+                      <m:r>
+                        <a:rPr lang="en-US" i="1" smtClean="0" sz="1576">
+                          <a:solidFill>
+                            <a:srgbClr val="000000"/>
+                          </a:solidFill>
+                          <a:latin typeface="Cambria Math" panose="02040503050406030204" pitchFamily="18" charset="0"/>
+                        </a:rPr>
+                        <m:t xml:space="preserve">(b)-1) ]</m:t>
+                      </m:r>
+                    </m:oMath>
+                  </m:oMathPara>
+                </a14:m>
+                <a:endParaRPr lang="en-US" dirty="0"/>
+              </a:p>
+            </p:txBody>
+          </p:sp>
+        </mc:Choice>
+        <mc:Fallback>
+          <p:pic>
+            <p:nvPicPr>
+              <p:cNvPr id="89" name="Image 33" descr="/home/ahmed/Projects/ai_llm_slides/videos/deep-learning/002_transformers_part2/recreated_pptx/build/assets/dR4.png">    </p:cNvPr>
+              <p:cNvPicPr>
+                <a:picLocks noChangeAspect="1"/>
+              </p:cNvPicPr>
+              <p:nvPr/>
+            </p:nvPicPr>
+            <p:blipFill>
+              <a:blip r:embed="rId34"/>
+              <a:stretch>
+                <a:fillRect/>
+              </a:stretch>
+            </p:blipFill>
+            <p:spPr>
+              <a:xfrm>
+                <a:off x="1105408" y="4572508"/>
+                <a:ext cx="7240524" cy="236220"/>
+              </a:xfrm>
+              <a:prstGeom prst="rect">
+                <a:avLst/>
+              </a:prstGeom>
+            </p:spPr>
+          </p:pic>
+        </mc:Fallback>
+      </mc:AlternateContent>
+      <mc:AlternateContent>
+        <mc:Choice xmlns:a14="http://schemas.microsoft.com/office/drawing/2010/main" Requires="a14">
+          <p:sp>
+            <p:nvSpPr>
+              <p:cNvPr id="90" name="Equation OMML" descr="\mathrm{sin}(a)^{2}\,(\mathrm{cos}(b)-1)^{2}+\mathrm{cos}^{2}(a)\,\mathrm{sin}^{2}(b)+\mathrm{sin}^{2}(a)\,\mathrm{sin}^{2}(b)+\mathrm{cos}^{2}(a)\,(\mathrm{cos}(b)-1)^{2}"/>
+              <p:cNvSpPr txBox="1"/>
+              <p:nvPr/>
+            </p:nvSpPr>
+            <p:spPr>
+              <a:xfrm>
+                <a:off x="1118108" y="5029708"/>
+                <a:ext cx="7554468" cy="240792"/>
+              </a:xfrm>
+              <a:prstGeom prst="rect">
+                <a:avLst/>
+              </a:prstGeom>
+              <a:noFill/>
+            </p:spPr>
+            <p:txBody>
+              <a:bodyPr lIns="0" tIns="0" rIns="0" bIns="0" anchor="ctr">
+                <a:noAutofit/>
+              </a:bodyPr>
+              <a:lstStyle/>
+              <a:p>
+                <a:pPr algn="ctr">
+                  <a:buNone/>
+                </a:pPr>
+                <a14:m>
+                  <m:oMathPara xmlns:m="http://schemas.openxmlformats.org/officeDocument/2006/math" xmlns:a="http://schemas.openxmlformats.org/drawingml/2006/main">
+                    <m:oMathParaPr>
+                      <m:jc m:val="centerGroup"/>
+                    </m:oMathParaPr>
+                    <m:oMath xmlns:m="http://schemas.openxmlformats.org/officeDocument/2006/math">
+                      <m:r>
+                        <m:rPr>
+                          <m:sty m:val="p"/>
+                        </m:rPr>
+                        <a:rPr lang="en-US" i="0" smtClean="0" sz="1603">
+                          <a:solidFill>
+                            <a:srgbClr val="000000"/>
+                          </a:solidFill>
+                          <a:latin typeface="Cambria Math" panose="02040503050406030204" pitchFamily="18" charset="0"/>
+                        </a:rPr>
+                        <m:t xml:space="preserve">sin</m:t>
+                      </m:r>
+                      <m:r>
+                        <a:rPr lang="en-US" i="1" smtClean="0" sz="1603">
+                          <a:solidFill>
+                            <a:srgbClr val="000000"/>
+                          </a:solidFill>
+                          <a:latin typeface="Cambria Math" panose="02040503050406030204" pitchFamily="18" charset="0"/>
+                        </a:rPr>
+                        <m:t xml:space="preserve">(a</m:t>
+                      </m:r>
+                      <m:sSup>
+                        <m:sSupPr>
+                          <m:ctrlPr>
+                            <a:rPr lang="en-US" i="1" smtClean="0" sz="1603">
+                              <a:solidFill>
+                                <a:srgbClr val="000000"/>
+                              </a:solidFill>
+                              <a:latin typeface="Cambria Math" panose="02040503050406030204" pitchFamily="18" charset="0"/>
+                            </a:rPr>
+                          </m:ctrlPr>
+                        </m:sSupPr>
+                        <m:e>
+                          <m:r>
+                            <a:rPr lang="en-US" i="1" smtClean="0" sz="1603">
+                              <a:solidFill>
+                                <a:srgbClr val="000000"/>
+                              </a:solidFill>
+                              <a:latin typeface="Cambria Math" panose="02040503050406030204" pitchFamily="18" charset="0"/>
+                            </a:rPr>
+                            <m:t xml:space="preserve">)</m:t>
+                          </m:r>
+                        </m:e>
+                        <m:sup>
+                          <m:r>
+                            <a:rPr lang="en-US" i="1" smtClean="0" sz="1603">
+                              <a:solidFill>
+                                <a:srgbClr val="000000"/>
+                              </a:solidFill>
+                              <a:latin typeface="Cambria Math" panose="02040503050406030204" pitchFamily="18" charset="0"/>
+                            </a:rPr>
+                            <m:t xml:space="preserve">2</m:t>
+                          </m:r>
+                        </m:sup>
+                      </m:sSup>
+                      <m:r>
+                        <a:rPr lang="en-US" i="1" smtClean="0" sz="1603">
+                          <a:solidFill>
+                            <a:srgbClr val="000000"/>
+                          </a:solidFill>
+                          <a:latin typeface="Cambria Math" panose="02040503050406030204" pitchFamily="18" charset="0"/>
+                        </a:rPr>
+                        <m:t xml:space="preserve"> (</m:t>
+                      </m:r>
+                      <m:r>
+                        <m:rPr>
+                          <m:sty m:val="p"/>
+                        </m:rPr>
+                        <a:rPr lang="en-US" i="0" smtClean="0" sz="1603">
+                          <a:solidFill>
+                            <a:srgbClr val="000000"/>
+                          </a:solidFill>
+                          <a:latin typeface="Cambria Math" panose="02040503050406030204" pitchFamily="18" charset="0"/>
+                        </a:rPr>
+                        <m:t xml:space="preserve">cos</m:t>
+                      </m:r>
+                      <m:r>
+                        <a:rPr lang="en-US" i="1" smtClean="0" sz="1603">
+                          <a:solidFill>
+                            <a:srgbClr val="000000"/>
+                          </a:solidFill>
+                          <a:latin typeface="Cambria Math" panose="02040503050406030204" pitchFamily="18" charset="0"/>
+                        </a:rPr>
+                        <m:t xml:space="preserve">(b)-1</m:t>
+                      </m:r>
+                      <m:sSup>
+                        <m:sSupPr>
+                          <m:ctrlPr>
+                            <a:rPr lang="en-US" i="1" smtClean="0" sz="1603">
+                              <a:solidFill>
+                                <a:srgbClr val="000000"/>
+                              </a:solidFill>
+                              <a:latin typeface="Cambria Math" panose="02040503050406030204" pitchFamily="18" charset="0"/>
+                            </a:rPr>
+                          </m:ctrlPr>
+                        </m:sSupPr>
+                        <m:e>
+                          <m:r>
+                            <a:rPr lang="en-US" i="1" smtClean="0" sz="1603">
+                              <a:solidFill>
+                                <a:srgbClr val="000000"/>
+                              </a:solidFill>
+                              <a:latin typeface="Cambria Math" panose="02040503050406030204" pitchFamily="18" charset="0"/>
+                            </a:rPr>
+                            <m:t xml:space="preserve">)</m:t>
+                          </m:r>
+                        </m:e>
+                        <m:sup>
+                          <m:r>
+                            <a:rPr lang="en-US" i="1" smtClean="0" sz="1603">
+                              <a:solidFill>
+                                <a:srgbClr val="000000"/>
+                              </a:solidFill>
+                              <a:latin typeface="Cambria Math" panose="02040503050406030204" pitchFamily="18" charset="0"/>
+                            </a:rPr>
+                            <m:t xml:space="preserve">2</m:t>
+                          </m:r>
+                        </m:sup>
+                      </m:sSup>
+                      <m:r>
+                        <a:rPr lang="en-US" i="1" smtClean="0" sz="1603">
+                          <a:solidFill>
+                            <a:srgbClr val="000000"/>
+                          </a:solidFill>
+                          <a:latin typeface="Cambria Math" panose="02040503050406030204" pitchFamily="18" charset="0"/>
+                        </a:rPr>
+                        <m:t xml:space="preserve">+</m:t>
+                      </m:r>
+                      <m:sSup>
+                        <m:sSupPr>
+                          <m:ctrlPr>
+                            <a:rPr lang="en-US" i="1" smtClean="0" sz="1603">
+                              <a:solidFill>
+                                <a:srgbClr val="000000"/>
+                              </a:solidFill>
+                              <a:latin typeface="Cambria Math" panose="02040503050406030204" pitchFamily="18" charset="0"/>
+                            </a:rPr>
+                          </m:ctrlPr>
+                        </m:sSupPr>
+                        <m:e>
+                          <m:r>
+                            <m:rPr>
+                              <m:sty m:val="p"/>
+                            </m:rPr>
+                            <a:rPr lang="en-US" i="0" smtClean="0" sz="1603">
+                              <a:solidFill>
+                                <a:srgbClr val="000000"/>
+                              </a:solidFill>
+                              <a:latin typeface="Cambria Math" panose="02040503050406030204" pitchFamily="18" charset="0"/>
+                            </a:rPr>
+                            <m:t xml:space="preserve">cos</m:t>
+                          </m:r>
+                        </m:e>
+                        <m:sup>
+                          <m:r>
+                            <a:rPr lang="en-US" i="1" smtClean="0" sz="1603">
+                              <a:solidFill>
+                                <a:srgbClr val="000000"/>
+                              </a:solidFill>
+                              <a:latin typeface="Cambria Math" panose="02040503050406030204" pitchFamily="18" charset="0"/>
+                            </a:rPr>
+                            <m:t xml:space="preserve">2</m:t>
+                          </m:r>
+                        </m:sup>
+                      </m:sSup>
+                      <m:r>
+                        <a:rPr lang="en-US" i="1" smtClean="0" sz="1603">
+                          <a:solidFill>
+                            <a:srgbClr val="000000"/>
+                          </a:solidFill>
+                          <a:latin typeface="Cambria Math" panose="02040503050406030204" pitchFamily="18" charset="0"/>
+                        </a:rPr>
+                        <m:t xml:space="preserve">(a) </m:t>
+                      </m:r>
+                      <m:sSup>
+                        <m:sSupPr>
+                          <m:ctrlPr>
+                            <a:rPr lang="en-US" i="1" smtClean="0" sz="1603">
+                              <a:solidFill>
+                                <a:srgbClr val="000000"/>
+                              </a:solidFill>
+                              <a:latin typeface="Cambria Math" panose="02040503050406030204" pitchFamily="18" charset="0"/>
+                            </a:rPr>
+                          </m:ctrlPr>
+                        </m:sSupPr>
+                        <m:e>
+                          <m:r>
+                            <m:rPr>
+                              <m:sty m:val="p"/>
+                            </m:rPr>
+                            <a:rPr lang="en-US" i="0" smtClean="0" sz="1603">
+                              <a:solidFill>
+                                <a:srgbClr val="000000"/>
+                              </a:solidFill>
+                              <a:latin typeface="Cambria Math" panose="02040503050406030204" pitchFamily="18" charset="0"/>
+                            </a:rPr>
+                            <m:t xml:space="preserve">sin</m:t>
+                          </m:r>
+                        </m:e>
+                        <m:sup>
+                          <m:r>
+                            <a:rPr lang="en-US" i="1" smtClean="0" sz="1603">
+                              <a:solidFill>
+                                <a:srgbClr val="000000"/>
+                              </a:solidFill>
+                              <a:latin typeface="Cambria Math" panose="02040503050406030204" pitchFamily="18" charset="0"/>
+                            </a:rPr>
+                            <m:t xml:space="preserve">2</m:t>
+                          </m:r>
+                        </m:sup>
+                      </m:sSup>
+                      <m:r>
+                        <a:rPr lang="en-US" i="1" smtClean="0" sz="1603">
+                          <a:solidFill>
+                            <a:srgbClr val="000000"/>
+                          </a:solidFill>
+                          <a:latin typeface="Cambria Math" panose="02040503050406030204" pitchFamily="18" charset="0"/>
+                        </a:rPr>
+                        <m:t xml:space="preserve">(b)+</m:t>
+                      </m:r>
+                      <m:sSup>
+                        <m:sSupPr>
+                          <m:ctrlPr>
+                            <a:rPr lang="en-US" i="1" smtClean="0" sz="1603">
+                              <a:solidFill>
+                                <a:srgbClr val="000000"/>
+                              </a:solidFill>
+                              <a:latin typeface="Cambria Math" panose="02040503050406030204" pitchFamily="18" charset="0"/>
+                            </a:rPr>
+                          </m:ctrlPr>
+                        </m:sSupPr>
+                        <m:e>
+                          <m:r>
+                            <m:rPr>
+                              <m:sty m:val="p"/>
+                            </m:rPr>
+                            <a:rPr lang="en-US" i="0" smtClean="0" sz="1603">
+                              <a:solidFill>
+                                <a:srgbClr val="000000"/>
+                              </a:solidFill>
+                              <a:latin typeface="Cambria Math" panose="02040503050406030204" pitchFamily="18" charset="0"/>
+                            </a:rPr>
+                            <m:t xml:space="preserve">sin</m:t>
+                          </m:r>
+                        </m:e>
+                        <m:sup>
+                          <m:r>
+                            <a:rPr lang="en-US" i="1" smtClean="0" sz="1603">
+                              <a:solidFill>
+                                <a:srgbClr val="000000"/>
+                              </a:solidFill>
+                              <a:latin typeface="Cambria Math" panose="02040503050406030204" pitchFamily="18" charset="0"/>
+                            </a:rPr>
+                            <m:t xml:space="preserve">2</m:t>
+                          </m:r>
+                        </m:sup>
+                      </m:sSup>
+                      <m:r>
+                        <a:rPr lang="en-US" i="1" smtClean="0" sz="1603">
+                          <a:solidFill>
+                            <a:srgbClr val="000000"/>
+                          </a:solidFill>
+                          <a:latin typeface="Cambria Math" panose="02040503050406030204" pitchFamily="18" charset="0"/>
+                        </a:rPr>
+                        <m:t xml:space="preserve">(a) </m:t>
+                      </m:r>
+                      <m:sSup>
+                        <m:sSupPr>
+                          <m:ctrlPr>
+                            <a:rPr lang="en-US" i="1" smtClean="0" sz="1603">
+                              <a:solidFill>
+                                <a:srgbClr val="000000"/>
+                              </a:solidFill>
+                              <a:latin typeface="Cambria Math" panose="02040503050406030204" pitchFamily="18" charset="0"/>
+                            </a:rPr>
+                          </m:ctrlPr>
+                        </m:sSupPr>
+                        <m:e>
+                          <m:r>
+                            <m:rPr>
+                              <m:sty m:val="p"/>
+                            </m:rPr>
+                            <a:rPr lang="en-US" i="0" smtClean="0" sz="1603">
+                              <a:solidFill>
+                                <a:srgbClr val="000000"/>
+                              </a:solidFill>
+                              <a:latin typeface="Cambria Math" panose="02040503050406030204" pitchFamily="18" charset="0"/>
+                            </a:rPr>
+                            <m:t xml:space="preserve">sin</m:t>
+                          </m:r>
+                        </m:e>
+                        <m:sup>
+                          <m:r>
+                            <a:rPr lang="en-US" i="1" smtClean="0" sz="1603">
+                              <a:solidFill>
+                                <a:srgbClr val="000000"/>
+                              </a:solidFill>
+                              <a:latin typeface="Cambria Math" panose="02040503050406030204" pitchFamily="18" charset="0"/>
+                            </a:rPr>
+                            <m:t xml:space="preserve">2</m:t>
+                          </m:r>
+                        </m:sup>
+                      </m:sSup>
+                      <m:r>
+                        <a:rPr lang="en-US" i="1" smtClean="0" sz="1603">
+                          <a:solidFill>
+                            <a:srgbClr val="000000"/>
+                          </a:solidFill>
+                          <a:latin typeface="Cambria Math" panose="02040503050406030204" pitchFamily="18" charset="0"/>
+                        </a:rPr>
+                        <m:t xml:space="preserve">(b)+</m:t>
+                      </m:r>
+                      <m:sSup>
+                        <m:sSupPr>
+                          <m:ctrlPr>
+                            <a:rPr lang="en-US" i="1" smtClean="0" sz="1603">
+                              <a:solidFill>
+                                <a:srgbClr val="000000"/>
+                              </a:solidFill>
+                              <a:latin typeface="Cambria Math" panose="02040503050406030204" pitchFamily="18" charset="0"/>
+                            </a:rPr>
+                          </m:ctrlPr>
+                        </m:sSupPr>
+                        <m:e>
+                          <m:r>
+                            <m:rPr>
+                              <m:sty m:val="p"/>
+                            </m:rPr>
+                            <a:rPr lang="en-US" i="0" smtClean="0" sz="1603">
+                              <a:solidFill>
+                                <a:srgbClr val="000000"/>
+                              </a:solidFill>
+                              <a:latin typeface="Cambria Math" panose="02040503050406030204" pitchFamily="18" charset="0"/>
+                            </a:rPr>
+                            <m:t xml:space="preserve">cos</m:t>
+                          </m:r>
+                        </m:e>
+                        <m:sup>
+                          <m:r>
+                            <a:rPr lang="en-US" i="1" smtClean="0" sz="1603">
+                              <a:solidFill>
+                                <a:srgbClr val="000000"/>
+                              </a:solidFill>
+                              <a:latin typeface="Cambria Math" panose="02040503050406030204" pitchFamily="18" charset="0"/>
+                            </a:rPr>
+                            <m:t xml:space="preserve">2</m:t>
+                          </m:r>
+                        </m:sup>
+                      </m:sSup>
+                      <m:r>
+                        <a:rPr lang="en-US" i="1" smtClean="0" sz="1603">
+                          <a:solidFill>
+                            <a:srgbClr val="000000"/>
+                          </a:solidFill>
+                          <a:latin typeface="Cambria Math" panose="02040503050406030204" pitchFamily="18" charset="0"/>
+                        </a:rPr>
+                        <m:t xml:space="preserve">(a) (</m:t>
+                      </m:r>
+                      <m:r>
+                        <m:rPr>
+                          <m:sty m:val="p"/>
+                        </m:rPr>
+                        <a:rPr lang="en-US" i="0" smtClean="0" sz="1603">
+                          <a:solidFill>
+                            <a:srgbClr val="000000"/>
+                          </a:solidFill>
+                          <a:latin typeface="Cambria Math" panose="02040503050406030204" pitchFamily="18" charset="0"/>
+                        </a:rPr>
+                        <m:t xml:space="preserve">cos</m:t>
+                      </m:r>
+                      <m:r>
+                        <a:rPr lang="en-US" i="1" smtClean="0" sz="1603">
+                          <a:solidFill>
+                            <a:srgbClr val="000000"/>
+                          </a:solidFill>
+                          <a:latin typeface="Cambria Math" panose="02040503050406030204" pitchFamily="18" charset="0"/>
+                        </a:rPr>
+                        <m:t xml:space="preserve">(b)-1</m:t>
+                      </m:r>
+                      <m:sSup>
+                        <m:sSupPr>
+                          <m:ctrlPr>
+                            <a:rPr lang="en-US" i="1" smtClean="0" sz="1603">
+                              <a:solidFill>
+                                <a:srgbClr val="000000"/>
+                              </a:solidFill>
+                              <a:latin typeface="Cambria Math" panose="02040503050406030204" pitchFamily="18" charset="0"/>
+                            </a:rPr>
+                          </m:ctrlPr>
+                        </m:sSupPr>
+                        <m:e>
+                          <m:r>
+                            <a:rPr lang="en-US" i="1" smtClean="0" sz="1603">
+                              <a:solidFill>
+                                <a:srgbClr val="000000"/>
+                              </a:solidFill>
+                              <a:latin typeface="Cambria Math" panose="02040503050406030204" pitchFamily="18" charset="0"/>
+                            </a:rPr>
+                            <m:t xml:space="preserve">)</m:t>
+                          </m:r>
+                        </m:e>
+                        <m:sup>
+                          <m:r>
+                            <a:rPr lang="en-US" i="1" smtClean="0" sz="1603">
+                              <a:solidFill>
+                                <a:srgbClr val="000000"/>
+                              </a:solidFill>
+                              <a:latin typeface="Cambria Math" panose="02040503050406030204" pitchFamily="18" charset="0"/>
+                            </a:rPr>
+                            <m:t xml:space="preserve">2</m:t>
+                          </m:r>
+                        </m:sup>
+                      </m:sSup>
+                    </m:oMath>
+                  </m:oMathPara>
+                </a14:m>
+                <a:endParaRPr lang="en-US" dirty="0"/>
+              </a:p>
+            </p:txBody>
+          </p:sp>
+        </mc:Choice>
+        <mc:Fallback>
+          <p:pic>
+            <p:nvPicPr>
+              <p:cNvPr id="90" name="Image 34" descr="/home/ahmed/Projects/ai_llm_slides/videos/deep-learning/002_transformers_part2/recreated_pptx/build/assets/dR5.png">    </p:cNvPr>
+              <p:cNvPicPr>
+                <a:picLocks noChangeAspect="1"/>
+              </p:cNvPicPr>
+              <p:nvPr/>
+            </p:nvPicPr>
+            <p:blipFill>
+              <a:blip r:embed="rId35"/>
+              <a:stretch>
+                <a:fillRect/>
+              </a:stretch>
+            </p:blipFill>
+            <p:spPr>
+              <a:xfrm>
+                <a:off x="1118108" y="5029708"/>
+                <a:ext cx="7554468" cy="240792"/>
+              </a:xfrm>
+              <a:prstGeom prst="rect">
+                <a:avLst/>
+              </a:prstGeom>
+            </p:spPr>
+          </p:pic>
+        </mc:Fallback>
+      </mc:AlternateContent>
+      <mc:AlternateContent>
+        <mc:Choice xmlns:a14="http://schemas.microsoft.com/office/drawing/2010/main" Requires="a14">
+          <p:sp>
+            <p:nvSpPr>
+              <p:cNvPr id="91" name="Equation OMML" descr="[\,\mathrm{sin}(a)^{2}+\mathrm{cos}^{2}(a)\,]\,(\mathrm{cos}(b)-1)^{2}+\,[\,\mathrm{sin}(a)^{2}+\mathrm{cos}^{2}(a)\,]\,(\mathrm{sin}^{2}(b)\,)=(\mathrm{cos}(b)-1)^{2}+\mathrm{sin}^{2}(b)"/>
+              <p:cNvSpPr txBox="1"/>
+              <p:nvPr/>
+            </p:nvSpPr>
+            <p:spPr>
+              <a:xfrm>
+                <a:off x="1041908" y="5461508"/>
+                <a:ext cx="8269224" cy="230124"/>
+              </a:xfrm>
+              <a:prstGeom prst="rect">
+                <a:avLst/>
+              </a:prstGeom>
+              <a:noFill/>
+            </p:spPr>
+            <p:txBody>
+              <a:bodyPr lIns="0" tIns="0" rIns="0" bIns="0" anchor="ctr">
+                <a:noAutofit/>
+              </a:bodyPr>
+              <a:lstStyle/>
+              <a:p>
+                <a:pPr algn="ctr">
+                  <a:buNone/>
+                </a:pPr>
+                <a14:m>
+                  <m:oMathPara xmlns:m="http://schemas.openxmlformats.org/officeDocument/2006/math" xmlns:a="http://schemas.openxmlformats.org/drawingml/2006/main">
+                    <m:oMathParaPr>
+                      <m:jc m:val="centerGroup"/>
+                    </m:oMathParaPr>
+                    <m:oMath xmlns:m="http://schemas.openxmlformats.org/officeDocument/2006/math">
+                      <m:r>
+                        <a:rPr lang="en-US" i="1" smtClean="0" sz="1530">
+                          <a:solidFill>
+                            <a:srgbClr val="000000"/>
+                          </a:solidFill>
+                          <a:latin typeface="Cambria Math" panose="02040503050406030204" pitchFamily="18" charset="0"/>
+                        </a:rPr>
+                        <m:t xml:space="preserve">[ </m:t>
+                      </m:r>
+                      <m:r>
+                        <m:rPr>
+                          <m:sty m:val="p"/>
+                        </m:rPr>
+                        <a:rPr lang="en-US" i="0" smtClean="0" sz="1530">
+                          <a:solidFill>
+                            <a:srgbClr val="000000"/>
+                          </a:solidFill>
+                          <a:latin typeface="Cambria Math" panose="02040503050406030204" pitchFamily="18" charset="0"/>
+                        </a:rPr>
+                        <m:t xml:space="preserve">sin</m:t>
+                      </m:r>
+                      <m:r>
+                        <a:rPr lang="en-US" i="1" smtClean="0" sz="1530">
+                          <a:solidFill>
+                            <a:srgbClr val="000000"/>
+                          </a:solidFill>
+                          <a:latin typeface="Cambria Math" panose="02040503050406030204" pitchFamily="18" charset="0"/>
+                        </a:rPr>
+                        <m:t xml:space="preserve">(a</m:t>
+                      </m:r>
+                      <m:sSup>
+                        <m:sSupPr>
+                          <m:ctrlPr>
+                            <a:rPr lang="en-US" i="1" smtClean="0" sz="1530">
+                              <a:solidFill>
+                                <a:srgbClr val="000000"/>
+                              </a:solidFill>
+                              <a:latin typeface="Cambria Math" panose="02040503050406030204" pitchFamily="18" charset="0"/>
+                            </a:rPr>
+                          </m:ctrlPr>
+                        </m:sSupPr>
+                        <m:e>
+                          <m:r>
+                            <a:rPr lang="en-US" i="1" smtClean="0" sz="1530">
+                              <a:solidFill>
+                                <a:srgbClr val="000000"/>
+                              </a:solidFill>
+                              <a:latin typeface="Cambria Math" panose="02040503050406030204" pitchFamily="18" charset="0"/>
+                            </a:rPr>
+                            <m:t xml:space="preserve">)</m:t>
+                          </m:r>
+                        </m:e>
+                        <m:sup>
+                          <m:r>
+                            <a:rPr lang="en-US" i="1" smtClean="0" sz="1530">
+                              <a:solidFill>
+                                <a:srgbClr val="000000"/>
+                              </a:solidFill>
+                              <a:latin typeface="Cambria Math" panose="02040503050406030204" pitchFamily="18" charset="0"/>
+                            </a:rPr>
+                            <m:t xml:space="preserve">2</m:t>
+                          </m:r>
+                        </m:sup>
+                      </m:sSup>
+                      <m:r>
+                        <a:rPr lang="en-US" i="1" smtClean="0" sz="1530">
+                          <a:solidFill>
+                            <a:srgbClr val="000000"/>
+                          </a:solidFill>
+                          <a:latin typeface="Cambria Math" panose="02040503050406030204" pitchFamily="18" charset="0"/>
+                        </a:rPr>
+                        <m:t xml:space="preserve">+</m:t>
+                      </m:r>
+                      <m:sSup>
+                        <m:sSupPr>
+                          <m:ctrlPr>
+                            <a:rPr lang="en-US" i="1" smtClean="0" sz="1530">
+                              <a:solidFill>
+                                <a:srgbClr val="000000"/>
+                              </a:solidFill>
+                              <a:latin typeface="Cambria Math" panose="02040503050406030204" pitchFamily="18" charset="0"/>
+                            </a:rPr>
+                          </m:ctrlPr>
+                        </m:sSupPr>
+                        <m:e>
+                          <m:r>
+                            <m:rPr>
+                              <m:sty m:val="p"/>
+                            </m:rPr>
+                            <a:rPr lang="en-US" i="0" smtClean="0" sz="1530">
+                              <a:solidFill>
+                                <a:srgbClr val="000000"/>
+                              </a:solidFill>
+                              <a:latin typeface="Cambria Math" panose="02040503050406030204" pitchFamily="18" charset="0"/>
+                            </a:rPr>
+                            <m:t xml:space="preserve">cos</m:t>
+                          </m:r>
+                        </m:e>
+                        <m:sup>
+                          <m:r>
+                            <a:rPr lang="en-US" i="1" smtClean="0" sz="1530">
+                              <a:solidFill>
+                                <a:srgbClr val="000000"/>
+                              </a:solidFill>
+                              <a:latin typeface="Cambria Math" panose="02040503050406030204" pitchFamily="18" charset="0"/>
+                            </a:rPr>
+                            <m:t xml:space="preserve">2</m:t>
+                          </m:r>
+                        </m:sup>
+                      </m:sSup>
+                      <m:r>
+                        <a:rPr lang="en-US" i="1" smtClean="0" sz="1530">
+                          <a:solidFill>
+                            <a:srgbClr val="000000"/>
+                          </a:solidFill>
+                          <a:latin typeface="Cambria Math" panose="02040503050406030204" pitchFamily="18" charset="0"/>
+                        </a:rPr>
+                        <m:t xml:space="preserve">(a) ] (</m:t>
+                      </m:r>
+                      <m:r>
+                        <m:rPr>
+                          <m:sty m:val="p"/>
+                        </m:rPr>
+                        <a:rPr lang="en-US" i="0" smtClean="0" sz="1530">
+                          <a:solidFill>
+                            <a:srgbClr val="000000"/>
+                          </a:solidFill>
+                          <a:latin typeface="Cambria Math" panose="02040503050406030204" pitchFamily="18" charset="0"/>
+                        </a:rPr>
+                        <m:t xml:space="preserve">cos</m:t>
+                      </m:r>
+                      <m:r>
+                        <a:rPr lang="en-US" i="1" smtClean="0" sz="1530">
+                          <a:solidFill>
+                            <a:srgbClr val="000000"/>
+                          </a:solidFill>
+                          <a:latin typeface="Cambria Math" panose="02040503050406030204" pitchFamily="18" charset="0"/>
+                        </a:rPr>
+                        <m:t xml:space="preserve">(b)-1</m:t>
+                      </m:r>
+                      <m:sSup>
+                        <m:sSupPr>
+                          <m:ctrlPr>
+                            <a:rPr lang="en-US" i="1" smtClean="0" sz="1530">
+                              <a:solidFill>
+                                <a:srgbClr val="000000"/>
+                              </a:solidFill>
+                              <a:latin typeface="Cambria Math" panose="02040503050406030204" pitchFamily="18" charset="0"/>
+                            </a:rPr>
+                          </m:ctrlPr>
+                        </m:sSupPr>
+                        <m:e>
+                          <m:r>
+                            <a:rPr lang="en-US" i="1" smtClean="0" sz="1530">
+                              <a:solidFill>
+                                <a:srgbClr val="000000"/>
+                              </a:solidFill>
+                              <a:latin typeface="Cambria Math" panose="02040503050406030204" pitchFamily="18" charset="0"/>
+                            </a:rPr>
+                            <m:t xml:space="preserve">)</m:t>
+                          </m:r>
+                        </m:e>
+                        <m:sup>
+                          <m:r>
+                            <a:rPr lang="en-US" i="1" smtClean="0" sz="1530">
+                              <a:solidFill>
+                                <a:srgbClr val="000000"/>
+                              </a:solidFill>
+                              <a:latin typeface="Cambria Math" panose="02040503050406030204" pitchFamily="18" charset="0"/>
+                            </a:rPr>
+                            <m:t xml:space="preserve">2</m:t>
+                          </m:r>
+                        </m:sup>
+                      </m:sSup>
+                      <m:r>
+                        <a:rPr lang="en-US" i="1" smtClean="0" sz="1530">
+                          <a:solidFill>
+                            <a:srgbClr val="000000"/>
+                          </a:solidFill>
+                          <a:latin typeface="Cambria Math" panose="02040503050406030204" pitchFamily="18" charset="0"/>
+                        </a:rPr>
+                        <m:t xml:space="preserve">+ [ </m:t>
+                      </m:r>
+                      <m:r>
+                        <m:rPr>
+                          <m:sty m:val="p"/>
+                        </m:rPr>
+                        <a:rPr lang="en-US" i="0" smtClean="0" sz="1530">
+                          <a:solidFill>
+                            <a:srgbClr val="000000"/>
+                          </a:solidFill>
+                          <a:latin typeface="Cambria Math" panose="02040503050406030204" pitchFamily="18" charset="0"/>
+                        </a:rPr>
+                        <m:t xml:space="preserve">sin</m:t>
+                      </m:r>
+                      <m:r>
+                        <a:rPr lang="en-US" i="1" smtClean="0" sz="1530">
+                          <a:solidFill>
+                            <a:srgbClr val="000000"/>
+                          </a:solidFill>
+                          <a:latin typeface="Cambria Math" panose="02040503050406030204" pitchFamily="18" charset="0"/>
+                        </a:rPr>
+                        <m:t xml:space="preserve">(a</m:t>
+                      </m:r>
+                      <m:sSup>
+                        <m:sSupPr>
+                          <m:ctrlPr>
+                            <a:rPr lang="en-US" i="1" smtClean="0" sz="1530">
+                              <a:solidFill>
+                                <a:srgbClr val="000000"/>
+                              </a:solidFill>
+                              <a:latin typeface="Cambria Math" panose="02040503050406030204" pitchFamily="18" charset="0"/>
+                            </a:rPr>
+                          </m:ctrlPr>
+                        </m:sSupPr>
+                        <m:e>
+                          <m:r>
+                            <a:rPr lang="en-US" i="1" smtClean="0" sz="1530">
+                              <a:solidFill>
+                                <a:srgbClr val="000000"/>
+                              </a:solidFill>
+                              <a:latin typeface="Cambria Math" panose="02040503050406030204" pitchFamily="18" charset="0"/>
+                            </a:rPr>
+                            <m:t xml:space="preserve">)</m:t>
+                          </m:r>
+                        </m:e>
+                        <m:sup>
+                          <m:r>
+                            <a:rPr lang="en-US" i="1" smtClean="0" sz="1530">
+                              <a:solidFill>
+                                <a:srgbClr val="000000"/>
+                              </a:solidFill>
+                              <a:latin typeface="Cambria Math" panose="02040503050406030204" pitchFamily="18" charset="0"/>
+                            </a:rPr>
+                            <m:t xml:space="preserve">2</m:t>
+                          </m:r>
+                        </m:sup>
+                      </m:sSup>
+                      <m:r>
+                        <a:rPr lang="en-US" i="1" smtClean="0" sz="1530">
+                          <a:solidFill>
+                            <a:srgbClr val="000000"/>
+                          </a:solidFill>
+                          <a:latin typeface="Cambria Math" panose="02040503050406030204" pitchFamily="18" charset="0"/>
+                        </a:rPr>
+                        <m:t xml:space="preserve">+</m:t>
+                      </m:r>
+                      <m:sSup>
+                        <m:sSupPr>
+                          <m:ctrlPr>
+                            <a:rPr lang="en-US" i="1" smtClean="0" sz="1530">
+                              <a:solidFill>
+                                <a:srgbClr val="000000"/>
+                              </a:solidFill>
+                              <a:latin typeface="Cambria Math" panose="02040503050406030204" pitchFamily="18" charset="0"/>
+                            </a:rPr>
+                          </m:ctrlPr>
+                        </m:sSupPr>
+                        <m:e>
+                          <m:r>
+                            <m:rPr>
+                              <m:sty m:val="p"/>
+                            </m:rPr>
+                            <a:rPr lang="en-US" i="0" smtClean="0" sz="1530">
+                              <a:solidFill>
+                                <a:srgbClr val="000000"/>
+                              </a:solidFill>
+                              <a:latin typeface="Cambria Math" panose="02040503050406030204" pitchFamily="18" charset="0"/>
+                            </a:rPr>
+                            <m:t xml:space="preserve">cos</m:t>
+                          </m:r>
+                        </m:e>
+                        <m:sup>
+                          <m:r>
+                            <a:rPr lang="en-US" i="1" smtClean="0" sz="1530">
+                              <a:solidFill>
+                                <a:srgbClr val="000000"/>
+                              </a:solidFill>
+                              <a:latin typeface="Cambria Math" panose="02040503050406030204" pitchFamily="18" charset="0"/>
+                            </a:rPr>
+                            <m:t xml:space="preserve">2</m:t>
+                          </m:r>
+                        </m:sup>
+                      </m:sSup>
+                      <m:r>
+                        <a:rPr lang="en-US" i="1" smtClean="0" sz="1530">
+                          <a:solidFill>
+                            <a:srgbClr val="000000"/>
+                          </a:solidFill>
+                          <a:latin typeface="Cambria Math" panose="02040503050406030204" pitchFamily="18" charset="0"/>
+                        </a:rPr>
+                        <m:t xml:space="preserve">(a) ] (</m:t>
+                      </m:r>
+                      <m:sSup>
+                        <m:sSupPr>
+                          <m:ctrlPr>
+                            <a:rPr lang="en-US" i="1" smtClean="0" sz="1530">
+                              <a:solidFill>
+                                <a:srgbClr val="000000"/>
+                              </a:solidFill>
+                              <a:latin typeface="Cambria Math" panose="02040503050406030204" pitchFamily="18" charset="0"/>
+                            </a:rPr>
+                          </m:ctrlPr>
+                        </m:sSupPr>
+                        <m:e>
+                          <m:r>
+                            <m:rPr>
+                              <m:sty m:val="p"/>
+                            </m:rPr>
+                            <a:rPr lang="en-US" i="0" smtClean="0" sz="1530">
+                              <a:solidFill>
+                                <a:srgbClr val="000000"/>
+                              </a:solidFill>
+                              <a:latin typeface="Cambria Math" panose="02040503050406030204" pitchFamily="18" charset="0"/>
+                            </a:rPr>
+                            <m:t xml:space="preserve">sin</m:t>
+                          </m:r>
+                        </m:e>
+                        <m:sup>
+                          <m:r>
+                            <a:rPr lang="en-US" i="1" smtClean="0" sz="1530">
+                              <a:solidFill>
+                                <a:srgbClr val="000000"/>
+                              </a:solidFill>
+                              <a:latin typeface="Cambria Math" panose="02040503050406030204" pitchFamily="18" charset="0"/>
+                            </a:rPr>
+                            <m:t xml:space="preserve">2</m:t>
+                          </m:r>
+                        </m:sup>
+                      </m:sSup>
+                      <m:r>
+                        <a:rPr lang="en-US" i="1" smtClean="0" sz="1530">
+                          <a:solidFill>
+                            <a:srgbClr val="000000"/>
+                          </a:solidFill>
+                          <a:latin typeface="Cambria Math" panose="02040503050406030204" pitchFamily="18" charset="0"/>
+                        </a:rPr>
+                        <m:t xml:space="preserve">(b) )=(</m:t>
+                      </m:r>
+                      <m:r>
+                        <m:rPr>
+                          <m:sty m:val="p"/>
+                        </m:rPr>
+                        <a:rPr lang="en-US" i="0" smtClean="0" sz="1530">
+                          <a:solidFill>
+                            <a:srgbClr val="000000"/>
+                          </a:solidFill>
+                          <a:latin typeface="Cambria Math" panose="02040503050406030204" pitchFamily="18" charset="0"/>
+                        </a:rPr>
+                        <m:t xml:space="preserve">cos</m:t>
+                      </m:r>
+                      <m:r>
+                        <a:rPr lang="en-US" i="1" smtClean="0" sz="1530">
+                          <a:solidFill>
+                            <a:srgbClr val="000000"/>
+                          </a:solidFill>
+                          <a:latin typeface="Cambria Math" panose="02040503050406030204" pitchFamily="18" charset="0"/>
+                        </a:rPr>
+                        <m:t xml:space="preserve">(b)-1</m:t>
+                      </m:r>
+                      <m:sSup>
+                        <m:sSupPr>
+                          <m:ctrlPr>
+                            <a:rPr lang="en-US" i="1" smtClean="0" sz="1530">
+                              <a:solidFill>
+                                <a:srgbClr val="000000"/>
+                              </a:solidFill>
+                              <a:latin typeface="Cambria Math" panose="02040503050406030204" pitchFamily="18" charset="0"/>
+                            </a:rPr>
+                          </m:ctrlPr>
+                        </m:sSupPr>
+                        <m:e>
+                          <m:r>
+                            <a:rPr lang="en-US" i="1" smtClean="0" sz="1530">
+                              <a:solidFill>
+                                <a:srgbClr val="000000"/>
+                              </a:solidFill>
+                              <a:latin typeface="Cambria Math" panose="02040503050406030204" pitchFamily="18" charset="0"/>
+                            </a:rPr>
+                            <m:t xml:space="preserve">)</m:t>
+                          </m:r>
+                        </m:e>
+                        <m:sup>
+                          <m:r>
+                            <a:rPr lang="en-US" i="1" smtClean="0" sz="1530">
+                              <a:solidFill>
+                                <a:srgbClr val="000000"/>
+                              </a:solidFill>
+                              <a:latin typeface="Cambria Math" panose="02040503050406030204" pitchFamily="18" charset="0"/>
+                            </a:rPr>
+                            <m:t xml:space="preserve">2</m:t>
+                          </m:r>
+                        </m:sup>
+                      </m:sSup>
+                      <m:r>
+                        <a:rPr lang="en-US" i="1" smtClean="0" sz="1530">
+                          <a:solidFill>
+                            <a:srgbClr val="000000"/>
+                          </a:solidFill>
+                          <a:latin typeface="Cambria Math" panose="02040503050406030204" pitchFamily="18" charset="0"/>
+                        </a:rPr>
+                        <m:t xml:space="preserve">+</m:t>
+                      </m:r>
+                      <m:sSup>
+                        <m:sSupPr>
+                          <m:ctrlPr>
+                            <a:rPr lang="en-US" i="1" smtClean="0" sz="1530">
+                              <a:solidFill>
+                                <a:srgbClr val="000000"/>
+                              </a:solidFill>
+                              <a:latin typeface="Cambria Math" panose="02040503050406030204" pitchFamily="18" charset="0"/>
+                            </a:rPr>
+                          </m:ctrlPr>
+                        </m:sSupPr>
+                        <m:e>
+                          <m:r>
+                            <m:rPr>
+                              <m:sty m:val="p"/>
+                            </m:rPr>
+                            <a:rPr lang="en-US" i="0" smtClean="0" sz="1530">
+                              <a:solidFill>
+                                <a:srgbClr val="000000"/>
+                              </a:solidFill>
+                              <a:latin typeface="Cambria Math" panose="02040503050406030204" pitchFamily="18" charset="0"/>
+                            </a:rPr>
+                            <m:t xml:space="preserve">sin</m:t>
+                          </m:r>
+                        </m:e>
+                        <m:sup>
+                          <m:r>
+                            <a:rPr lang="en-US" i="1" smtClean="0" sz="1530">
+                              <a:solidFill>
+                                <a:srgbClr val="000000"/>
+                              </a:solidFill>
+                              <a:latin typeface="Cambria Math" panose="02040503050406030204" pitchFamily="18" charset="0"/>
+                            </a:rPr>
+                            <m:t xml:space="preserve">2</m:t>
+                          </m:r>
+                        </m:sup>
+                      </m:sSup>
+                      <m:r>
+                        <a:rPr lang="en-US" i="1" smtClean="0" sz="1530">
+                          <a:solidFill>
+                            <a:srgbClr val="000000"/>
+                          </a:solidFill>
+                          <a:latin typeface="Cambria Math" panose="02040503050406030204" pitchFamily="18" charset="0"/>
+                        </a:rPr>
+                        <m:t xml:space="preserve">(b)</m:t>
+                      </m:r>
+                    </m:oMath>
+                  </m:oMathPara>
+                </a14:m>
+                <a:endParaRPr lang="en-US" dirty="0"/>
+              </a:p>
+            </p:txBody>
+          </p:sp>
+        </mc:Choice>
+        <mc:Fallback>
+          <p:pic>
+            <p:nvPicPr>
+              <p:cNvPr id="91" name="Image 35" descr="/home/ahmed/Projects/ai_llm_slides/videos/deep-learning/002_transformers_part2/recreated_pptx/build/assets/dR6.png">    </p:cNvPr>
+              <p:cNvPicPr>
+                <a:picLocks noChangeAspect="1"/>
+              </p:cNvPicPr>
+              <p:nvPr/>
+            </p:nvPicPr>
+            <p:blipFill>
+              <a:blip r:embed="rId36"/>
+              <a:stretch>
+                <a:fillRect/>
+              </a:stretch>
+            </p:blipFill>
+            <p:spPr>
+              <a:xfrm>
+                <a:off x="1041908" y="5461508"/>
+                <a:ext cx="8269224" cy="230124"/>
+              </a:xfrm>
+              <a:prstGeom prst="rect">
+                <a:avLst/>
+              </a:prstGeom>
+            </p:spPr>
+          </p:pic>
+        </mc:Fallback>
+      </mc:AlternateContent>
+      <mc:AlternateContent>
+        <mc:Choice xmlns:a14="http://schemas.microsoft.com/office/drawing/2010/main" Requires="a14">
+          <p:sp>
+            <p:nvSpPr>
+              <p:cNvPr id="92" name="Equation OMML" descr="["/>
+              <p:cNvSpPr txBox="1"/>
+              <p:nvPr/>
+            </p:nvSpPr>
+            <p:spPr>
+              <a:xfrm>
+                <a:off x="1067308" y="3366008"/>
+                <a:ext cx="82296" cy="275844"/>
+              </a:xfrm>
+              <a:prstGeom prst="rect">
+                <a:avLst/>
+              </a:prstGeom>
+              <a:noFill/>
+            </p:spPr>
+            <p:txBody>
+              <a:bodyPr lIns="0" tIns="0" rIns="0" bIns="0" anchor="ctr">
+                <a:noAutofit/>
+              </a:bodyPr>
+              <a:lstStyle/>
+              <a:p>
+                <a:pPr algn="ctr">
+                  <a:buNone/>
+                </a:pPr>
+                <a14:m>
+                  <m:oMathPara xmlns:m="http://schemas.openxmlformats.org/officeDocument/2006/math" xmlns:a="http://schemas.openxmlformats.org/drawingml/2006/main">
+                    <m:oMathParaPr>
+                      <m:jc m:val="centerGroup"/>
+                    </m:oMathParaPr>
+                    <m:oMath xmlns:m="http://schemas.openxmlformats.org/officeDocument/2006/math">
+                      <m:r>
+                        <a:rPr lang="en-US" i="1" smtClean="0" sz="2220">
+                          <a:solidFill>
+                            <a:srgbClr val="0000CC"/>
+                          </a:solidFill>
+                          <a:latin typeface="Cambria Math" panose="02040503050406030204" pitchFamily="18" charset="0"/>
+                        </a:rPr>
+                        <m:t xml:space="preserve">[</m:t>
+                      </m:r>
+                    </m:oMath>
+                  </m:oMathPara>
+                </a14:m>
+                <a:endParaRPr lang="en-US" dirty="0"/>
+              </a:p>
+            </p:txBody>
+          </p:sp>
+        </mc:Choice>
+        <mc:Fallback>
+          <p:pic>
+            <p:nvPicPr>
+              <p:cNvPr id="92" name="Image 36" descr="/home/ahmed/Projects/ai_llm_slides/videos/deep-learning/002_transformers_part2/recreated_pptx/build/assets/r1_s01.png">    </p:cNvPr>
+              <p:cNvPicPr>
+                <a:picLocks noChangeAspect="1"/>
+              </p:cNvPicPr>
+              <p:nvPr/>
+            </p:nvPicPr>
+            <p:blipFill>
+              <a:blip r:embed="rId37"/>
+              <a:stretch>
+                <a:fillRect/>
+              </a:stretch>
+            </p:blipFill>
+            <p:spPr>
+              <a:xfrm>
+                <a:off x="1067308" y="3366008"/>
+                <a:ext cx="82296" cy="275844"/>
+              </a:xfrm>
+              <a:prstGeom prst="rect">
+                <a:avLst/>
+              </a:prstGeom>
+            </p:spPr>
+          </p:pic>
+        </mc:Fallback>
+      </mc:AlternateContent>
+      <mc:AlternateContent>
+        <mc:Choice xmlns:a14="http://schemas.microsoft.com/office/drawing/2010/main" Requires="a14">
+          <p:sp>
+            <p:nvSpPr>
+              <p:cNvPr id="93" name="Equation OMML" descr="\mathrm{sin}(a)"/>
+              <p:cNvSpPr txBox="1"/>
+              <p:nvPr/>
+            </p:nvSpPr>
+            <p:spPr>
+              <a:xfrm>
+                <a:off x="1207008" y="3378708"/>
+                <a:ext cx="533400" cy="193548"/>
+              </a:xfrm>
+              <a:prstGeom prst="rect">
+                <a:avLst/>
+              </a:prstGeom>
+              <a:noFill/>
+            </p:spPr>
+            <p:txBody>
+              <a:bodyPr lIns="0" tIns="0" rIns="0" bIns="0" anchor="ctr">
+                <a:noAutofit/>
+              </a:bodyPr>
+              <a:lstStyle/>
+              <a:p>
+                <a:pPr algn="ctr">
+                  <a:buNone/>
+                </a:pPr>
+                <a14:m>
+                  <m:oMathPara xmlns:m="http://schemas.openxmlformats.org/officeDocument/2006/math" xmlns:a="http://schemas.openxmlformats.org/drawingml/2006/main">
+                    <m:oMathParaPr>
+                      <m:jc m:val="centerGroup"/>
+                    </m:oMathParaPr>
+                    <m:oMath xmlns:m="http://schemas.openxmlformats.org/officeDocument/2006/math">
+                      <m:r>
+                        <m:rPr>
+                          <m:sty m:val="p"/>
+                        </m:rPr>
+                        <a:rPr lang="en-US" i="0" smtClean="0" sz="1495">
+                          <a:solidFill>
+                            <a:srgbClr val="C00000"/>
+                          </a:solidFill>
+                          <a:latin typeface="Cambria Math" panose="02040503050406030204" pitchFamily="18" charset="0"/>
+                        </a:rPr>
+                        <m:t xml:space="preserve">sin</m:t>
+                      </m:r>
+                      <m:r>
+                        <a:rPr lang="en-US" i="1" smtClean="0" sz="1495">
+                          <a:solidFill>
+                            <a:srgbClr val="C00000"/>
+                          </a:solidFill>
+                          <a:latin typeface="Cambria Math" panose="02040503050406030204" pitchFamily="18" charset="0"/>
+                        </a:rPr>
+                        <m:t xml:space="preserve">(a)</m:t>
+                      </m:r>
+                    </m:oMath>
+                  </m:oMathPara>
+                </a14:m>
+                <a:endParaRPr lang="en-US" dirty="0"/>
+              </a:p>
+            </p:txBody>
+          </p:sp>
+        </mc:Choice>
+        <mc:Fallback>
+          <p:pic>
+            <p:nvPicPr>
+              <p:cNvPr id="93" name="Image 37" descr="/home/ahmed/Projects/ai_llm_slides/videos/deep-learning/002_transformers_part2/recreated_pptx/build/assets/r1_s02.png">    </p:cNvPr>
+              <p:cNvPicPr>
+                <a:picLocks noChangeAspect="1"/>
+              </p:cNvPicPr>
+              <p:nvPr/>
+            </p:nvPicPr>
+            <p:blipFill>
+              <a:blip r:embed="rId38"/>
+              <a:stretch>
+                <a:fillRect/>
+              </a:stretch>
+            </p:blipFill>
+            <p:spPr>
+              <a:xfrm>
+                <a:off x="1207008" y="3378708"/>
+                <a:ext cx="533400" cy="193548"/>
+              </a:xfrm>
+              <a:prstGeom prst="rect">
+                <a:avLst/>
+              </a:prstGeom>
+            </p:spPr>
+          </p:pic>
+        </mc:Fallback>
+      </mc:AlternateContent>
+      <mc:AlternateContent>
+        <mc:Choice xmlns:a14="http://schemas.microsoft.com/office/drawing/2010/main" Requires="a14">
+          <p:sp>
+            <p:nvSpPr>
+              <p:cNvPr id="94" name="Equation OMML" descr="\mathrm{cos}(b)\,+"/>
+              <p:cNvSpPr txBox="1"/>
+              <p:nvPr/>
+            </p:nvSpPr>
+            <p:spPr>
+              <a:xfrm>
+                <a:off x="1816608" y="3378708"/>
+                <a:ext cx="781812" cy="187452"/>
+              </a:xfrm>
+              <a:prstGeom prst="rect">
+                <a:avLst/>
+              </a:prstGeom>
+              <a:noFill/>
+            </p:spPr>
+            <p:txBody>
+              <a:bodyPr lIns="0" tIns="0" rIns="0" bIns="0" anchor="ctr">
+                <a:noAutofit/>
+              </a:bodyPr>
+              <a:lstStyle/>
+              <a:p>
+                <a:pPr algn="ctr">
+                  <a:buNone/>
+                </a:pPr>
+                <a14:m>
+                  <m:oMathPara xmlns:m="http://schemas.openxmlformats.org/officeDocument/2006/math" xmlns:a="http://schemas.openxmlformats.org/drawingml/2006/main">
+                    <m:oMathParaPr>
+                      <m:jc m:val="centerGroup"/>
+                    </m:oMathParaPr>
+                    <m:oMath xmlns:m="http://schemas.openxmlformats.org/officeDocument/2006/math">
+                      <m:r>
+                        <m:rPr>
+                          <m:sty m:val="p"/>
+                        </m:rPr>
+                        <a:rPr lang="en-US" i="0" smtClean="0" sz="1445">
+                          <a:solidFill>
+                            <a:srgbClr val="0000CC"/>
+                          </a:solidFill>
+                          <a:latin typeface="Cambria Math" panose="02040503050406030204" pitchFamily="18" charset="0"/>
+                        </a:rPr>
+                        <m:t xml:space="preserve">cos</m:t>
+                      </m:r>
+                      <m:r>
+                        <a:rPr lang="en-US" i="1" smtClean="0" sz="1445">
+                          <a:solidFill>
+                            <a:srgbClr val="0000CC"/>
+                          </a:solidFill>
+                          <a:latin typeface="Cambria Math" panose="02040503050406030204" pitchFamily="18" charset="0"/>
+                        </a:rPr>
+                        <m:t xml:space="preserve">(b) +</m:t>
+                      </m:r>
+                    </m:oMath>
+                  </m:oMathPara>
+                </a14:m>
+                <a:endParaRPr lang="en-US" dirty="0"/>
+              </a:p>
+            </p:txBody>
+          </p:sp>
+        </mc:Choice>
+        <mc:Fallback>
+          <p:pic>
+            <p:nvPicPr>
+              <p:cNvPr id="94" name="Image 38" descr="/home/ahmed/Projects/ai_llm_slides/videos/deep-learning/002_transformers_part2/recreated_pptx/build/assets/r1_s03.png">    </p:cNvPr>
+              <p:cNvPicPr>
+                <a:picLocks noChangeAspect="1"/>
+              </p:cNvPicPr>
+              <p:nvPr/>
+            </p:nvPicPr>
+            <p:blipFill>
+              <a:blip r:embed="rId39"/>
+              <a:stretch>
+                <a:fillRect/>
+              </a:stretch>
+            </p:blipFill>
+            <p:spPr>
+              <a:xfrm>
+                <a:off x="1816608" y="3378708"/>
+                <a:ext cx="781812" cy="187452"/>
+              </a:xfrm>
+              <a:prstGeom prst="rect">
+                <a:avLst/>
+              </a:prstGeom>
+            </p:spPr>
+          </p:pic>
+        </mc:Fallback>
+      </mc:AlternateContent>
+      <mc:AlternateContent>
+        <mc:Choice xmlns:a14="http://schemas.microsoft.com/office/drawing/2010/main" Requires="a14">
+          <p:sp>
+            <p:nvSpPr>
+              <p:cNvPr id="95" name="Equation OMML" descr="\mathrm{cos}(a)"/>
+              <p:cNvSpPr txBox="1"/>
+              <p:nvPr/>
+            </p:nvSpPr>
+            <p:spPr>
+              <a:xfrm>
+                <a:off x="2680208" y="3378708"/>
+                <a:ext cx="579120" cy="193548"/>
+              </a:xfrm>
+              <a:prstGeom prst="rect">
+                <a:avLst/>
+              </a:prstGeom>
+              <a:noFill/>
+            </p:spPr>
+            <p:txBody>
+              <a:bodyPr lIns="0" tIns="0" rIns="0" bIns="0" anchor="ctr">
+                <a:noAutofit/>
+              </a:bodyPr>
+              <a:lstStyle/>
+              <a:p>
+                <a:pPr algn="ctr">
+                  <a:buNone/>
+                </a:pPr>
+                <a14:m>
+                  <m:oMathPara xmlns:m="http://schemas.openxmlformats.org/officeDocument/2006/math" xmlns:a="http://schemas.openxmlformats.org/drawingml/2006/main">
+                    <m:oMathParaPr>
+                      <m:jc m:val="centerGroup"/>
+                    </m:oMathParaPr>
+                    <m:oMath xmlns:m="http://schemas.openxmlformats.org/officeDocument/2006/math">
+                      <m:r>
+                        <m:rPr>
+                          <m:sty m:val="p"/>
+                        </m:rPr>
+                        <a:rPr lang="en-US" i="0" smtClean="0" sz="1489">
+                          <a:solidFill>
+                            <a:srgbClr val="C00000"/>
+                          </a:solidFill>
+                          <a:latin typeface="Cambria Math" panose="02040503050406030204" pitchFamily="18" charset="0"/>
+                        </a:rPr>
+                        <m:t xml:space="preserve">cos</m:t>
+                      </m:r>
+                      <m:r>
+                        <a:rPr lang="en-US" i="1" smtClean="0" sz="1489">
+                          <a:solidFill>
+                            <a:srgbClr val="C00000"/>
+                          </a:solidFill>
+                          <a:latin typeface="Cambria Math" panose="02040503050406030204" pitchFamily="18" charset="0"/>
+                        </a:rPr>
+                        <m:t xml:space="preserve">(a)</m:t>
+                      </m:r>
+                    </m:oMath>
+                  </m:oMathPara>
+                </a14:m>
+                <a:endParaRPr lang="en-US" dirty="0"/>
+              </a:p>
+            </p:txBody>
+          </p:sp>
+        </mc:Choice>
+        <mc:Fallback>
+          <p:pic>
+            <p:nvPicPr>
+              <p:cNvPr id="95" name="Image 39" descr="/home/ahmed/Projects/ai_llm_slides/videos/deep-learning/002_transformers_part2/recreated_pptx/build/assets/r1_s04.png">    </p:cNvPr>
+              <p:cNvPicPr>
+                <a:picLocks noChangeAspect="1"/>
+              </p:cNvPicPr>
+              <p:nvPr/>
+            </p:nvPicPr>
+            <p:blipFill>
+              <a:blip r:embed="rId40"/>
+              <a:stretch>
+                <a:fillRect/>
+              </a:stretch>
+            </p:blipFill>
+            <p:spPr>
+              <a:xfrm>
+                <a:off x="2680208" y="3378708"/>
+                <a:ext cx="579120" cy="193548"/>
+              </a:xfrm>
+              <a:prstGeom prst="rect">
+                <a:avLst/>
+              </a:prstGeom>
+            </p:spPr>
+          </p:pic>
+        </mc:Fallback>
+      </mc:AlternateContent>
+      <mc:AlternateContent>
+        <mc:Choice xmlns:a14="http://schemas.microsoft.com/office/drawing/2010/main" Requires="a14">
+          <p:sp>
+            <p:nvSpPr>
+              <p:cNvPr id="96" name="Equation OMML" descr="\mathrm{sin}(b)\,-"/>
+              <p:cNvSpPr txBox="1"/>
+              <p:nvPr/>
+            </p:nvSpPr>
+            <p:spPr>
+              <a:xfrm>
+                <a:off x="3340608" y="3378708"/>
+                <a:ext cx="694944" cy="178308"/>
+              </a:xfrm>
+              <a:prstGeom prst="rect">
+                <a:avLst/>
+              </a:prstGeom>
+              <a:noFill/>
+            </p:spPr>
+            <p:txBody>
+              <a:bodyPr lIns="0" tIns="0" rIns="0" bIns="0" anchor="ctr">
+                <a:noAutofit/>
+              </a:bodyPr>
+              <a:lstStyle/>
+              <a:p>
+                <a:pPr algn="ctr">
+                  <a:buNone/>
+                </a:pPr>
+                <a14:m>
+                  <m:oMathPara xmlns:m="http://schemas.openxmlformats.org/officeDocument/2006/math" xmlns:a="http://schemas.openxmlformats.org/drawingml/2006/main">
+                    <m:oMathParaPr>
+                      <m:jc m:val="centerGroup"/>
+                    </m:oMathParaPr>
+                    <m:oMath xmlns:m="http://schemas.openxmlformats.org/officeDocument/2006/math">
+                      <m:r>
+                        <m:rPr>
+                          <m:sty m:val="p"/>
+                        </m:rPr>
+                        <a:rPr lang="en-US" i="0" smtClean="0" sz="1361">
+                          <a:solidFill>
+                            <a:srgbClr val="0000CC"/>
+                          </a:solidFill>
+                          <a:latin typeface="Cambria Math" panose="02040503050406030204" pitchFamily="18" charset="0"/>
+                        </a:rPr>
+                        <m:t xml:space="preserve">sin</m:t>
+                      </m:r>
+                      <m:r>
+                        <a:rPr lang="en-US" i="1" smtClean="0" sz="1361">
+                          <a:solidFill>
+                            <a:srgbClr val="0000CC"/>
+                          </a:solidFill>
+                          <a:latin typeface="Cambria Math" panose="02040503050406030204" pitchFamily="18" charset="0"/>
+                        </a:rPr>
+                        <m:t xml:space="preserve">(b) -</m:t>
+                      </m:r>
+                    </m:oMath>
+                  </m:oMathPara>
+                </a14:m>
+                <a:endParaRPr lang="en-US" dirty="0"/>
+              </a:p>
+            </p:txBody>
+          </p:sp>
+        </mc:Choice>
+        <mc:Fallback>
+          <p:pic>
+            <p:nvPicPr>
+              <p:cNvPr id="96" name="Image 40" descr="/home/ahmed/Projects/ai_llm_slides/videos/deep-learning/002_transformers_part2/recreated_pptx/build/assets/r1_s05.png">    </p:cNvPr>
+              <p:cNvPicPr>
+                <a:picLocks noChangeAspect="1"/>
+              </p:cNvPicPr>
+              <p:nvPr/>
+            </p:nvPicPr>
+            <p:blipFill>
+              <a:blip r:embed="rId41"/>
+              <a:stretch>
+                <a:fillRect/>
+              </a:stretch>
+            </p:blipFill>
+            <p:spPr>
+              <a:xfrm>
+                <a:off x="3340608" y="3378708"/>
+                <a:ext cx="694944" cy="178308"/>
+              </a:xfrm>
+              <a:prstGeom prst="rect">
+                <a:avLst/>
+              </a:prstGeom>
+            </p:spPr>
+          </p:pic>
+        </mc:Fallback>
+      </mc:AlternateContent>
+      <mc:AlternateContent>
+        <mc:Choice xmlns:a14="http://schemas.microsoft.com/office/drawing/2010/main" Requires="a14">
+          <p:sp>
+            <p:nvSpPr>
+              <p:cNvPr id="97" name="Equation OMML" descr="\mathrm{sin}(a)"/>
+              <p:cNvSpPr txBox="1"/>
+              <p:nvPr/>
+            </p:nvSpPr>
+            <p:spPr>
+              <a:xfrm>
+                <a:off x="4115308" y="3378708"/>
+                <a:ext cx="557784" cy="202692"/>
+              </a:xfrm>
+              <a:prstGeom prst="rect">
+                <a:avLst/>
+              </a:prstGeom>
+              <a:noFill/>
+            </p:spPr>
+            <p:txBody>
+              <a:bodyPr lIns="0" tIns="0" rIns="0" bIns="0" anchor="ctr">
+                <a:noAutofit/>
+              </a:bodyPr>
+              <a:lstStyle/>
+              <a:p>
+                <a:pPr algn="ctr">
+                  <a:buNone/>
+                </a:pPr>
+                <a14:m>
+                  <m:oMathPara xmlns:m="http://schemas.openxmlformats.org/officeDocument/2006/math" xmlns:a="http://schemas.openxmlformats.org/drawingml/2006/main">
+                    <m:oMathParaPr>
+                      <m:jc m:val="centerGroup"/>
+                    </m:oMathParaPr>
+                    <m:oMath xmlns:m="http://schemas.openxmlformats.org/officeDocument/2006/math">
+                      <m:r>
+                        <m:rPr>
+                          <m:sty m:val="p"/>
+                        </m:rPr>
+                        <a:rPr lang="en-US" i="0" smtClean="0" sz="1568">
+                          <a:solidFill>
+                            <a:srgbClr val="C00000"/>
+                          </a:solidFill>
+                          <a:latin typeface="Cambria Math" panose="02040503050406030204" pitchFamily="18" charset="0"/>
+                        </a:rPr>
+                        <m:t xml:space="preserve">sin</m:t>
+                      </m:r>
+                      <m:r>
+                        <a:rPr lang="en-US" i="1" smtClean="0" sz="1568">
+                          <a:solidFill>
+                            <a:srgbClr val="C00000"/>
+                          </a:solidFill>
+                          <a:latin typeface="Cambria Math" panose="02040503050406030204" pitchFamily="18" charset="0"/>
+                        </a:rPr>
+                        <m:t xml:space="preserve">(a)</m:t>
+                      </m:r>
+                    </m:oMath>
+                  </m:oMathPara>
+                </a14:m>
+                <a:endParaRPr lang="en-US" dirty="0"/>
+              </a:p>
+            </p:txBody>
+          </p:sp>
+        </mc:Choice>
+        <mc:Fallback>
+          <p:pic>
+            <p:nvPicPr>
+              <p:cNvPr id="97" name="Image 41" descr="/home/ahmed/Projects/ai_llm_slides/videos/deep-learning/002_transformers_part2/recreated_pptx/build/assets/r1_s06.png">    </p:cNvPr>
+              <p:cNvPicPr>
+                <a:picLocks noChangeAspect="1"/>
+              </p:cNvPicPr>
+              <p:nvPr/>
+            </p:nvPicPr>
+            <p:blipFill>
+              <a:blip r:embed="rId42"/>
+              <a:stretch>
+                <a:fillRect/>
+              </a:stretch>
+            </p:blipFill>
+            <p:spPr>
+              <a:xfrm>
+                <a:off x="4115308" y="3378708"/>
+                <a:ext cx="557784" cy="202692"/>
+              </a:xfrm>
+              <a:prstGeom prst="rect">
+                <a:avLst/>
+              </a:prstGeom>
+            </p:spPr>
+          </p:pic>
+        </mc:Fallback>
+      </mc:AlternateContent>
+      <mc:AlternateContent>
+        <mc:Choice xmlns:a14="http://schemas.microsoft.com/office/drawing/2010/main" Requires="a14">
+          <p:sp>
+            <p:nvSpPr>
+              <p:cNvPr id="98" name="Equation OMML" descr="]^{2}\,+\,[\,-"/>
+              <p:cNvSpPr txBox="1"/>
+              <p:nvPr/>
+            </p:nvSpPr>
+            <p:spPr>
+              <a:xfrm>
+                <a:off x="4737608" y="3378708"/>
+                <a:ext cx="888492" cy="268224"/>
+              </a:xfrm>
+              <a:prstGeom prst="rect">
+                <a:avLst/>
+              </a:prstGeom>
+              <a:noFill/>
+            </p:spPr>
+            <p:txBody>
+              <a:bodyPr lIns="0" tIns="0" rIns="0" bIns="0" anchor="ctr">
+                <a:noAutofit/>
+              </a:bodyPr>
+              <a:lstStyle/>
+              <a:p>
+                <a:pPr algn="ctr">
+                  <a:buNone/>
+                </a:pPr>
+                <a14:m>
+                  <m:oMathPara xmlns:m="http://schemas.openxmlformats.org/officeDocument/2006/math" xmlns:a="http://schemas.openxmlformats.org/drawingml/2006/main">
+                    <m:oMathParaPr>
+                      <m:jc m:val="centerGroup"/>
+                    </m:oMathParaPr>
+                    <m:oMath xmlns:m="http://schemas.openxmlformats.org/officeDocument/2006/math">
+                      <m:sSup>
+                        <m:sSupPr>
+                          <m:ctrlPr>
+                            <a:rPr lang="en-US" i="1" smtClean="0" sz="1790">
+                              <a:solidFill>
+                                <a:srgbClr val="0000CC"/>
+                              </a:solidFill>
+                              <a:latin typeface="Cambria Math" panose="02040503050406030204" pitchFamily="18" charset="0"/>
+                            </a:rPr>
+                          </m:ctrlPr>
+                        </m:sSupPr>
+                        <m:e>
+                          <m:r>
+                            <a:rPr lang="en-US" i="1" smtClean="0" sz="1790">
+                              <a:solidFill>
+                                <a:srgbClr val="0000CC"/>
+                              </a:solidFill>
+                              <a:latin typeface="Cambria Math" panose="02040503050406030204" pitchFamily="18" charset="0"/>
+                            </a:rPr>
+                            <m:t xml:space="preserve">]</m:t>
+                          </m:r>
+                        </m:e>
+                        <m:sup>
+                          <m:r>
+                            <a:rPr lang="en-US" i="1" smtClean="0" sz="1790">
+                              <a:solidFill>
+                                <a:srgbClr val="0000CC"/>
+                              </a:solidFill>
+                              <a:latin typeface="Cambria Math" panose="02040503050406030204" pitchFamily="18" charset="0"/>
+                            </a:rPr>
+                            <m:t xml:space="preserve">2</m:t>
+                          </m:r>
+                        </m:sup>
+                      </m:sSup>
+                      <m:r>
+                        <a:rPr lang="en-US" i="1" smtClean="0" sz="1790">
+                          <a:solidFill>
+                            <a:srgbClr val="0000CC"/>
+                          </a:solidFill>
+                          <a:latin typeface="Cambria Math" panose="02040503050406030204" pitchFamily="18" charset="0"/>
+                        </a:rPr>
+                        <m:t xml:space="preserve"> + [ -</m:t>
+                      </m:r>
+                    </m:oMath>
+                  </m:oMathPara>
+                </a14:m>
+                <a:endParaRPr lang="en-US" dirty="0"/>
+              </a:p>
+            </p:txBody>
+          </p:sp>
+        </mc:Choice>
+        <mc:Fallback>
+          <p:pic>
+            <p:nvPicPr>
+              <p:cNvPr id="98" name="Image 42" descr="/home/ahmed/Projects/ai_llm_slides/videos/deep-learning/002_transformers_part2/recreated_pptx/build/assets/r1_s07.png">    </p:cNvPr>
+              <p:cNvPicPr>
+                <a:picLocks noChangeAspect="1"/>
+              </p:cNvPicPr>
+              <p:nvPr/>
+            </p:nvPicPr>
+            <p:blipFill>
+              <a:blip r:embed="rId43"/>
+              <a:stretch>
+                <a:fillRect/>
+              </a:stretch>
+            </p:blipFill>
+            <p:spPr>
+              <a:xfrm>
+                <a:off x="4737608" y="3378708"/>
+                <a:ext cx="888492" cy="268224"/>
+              </a:xfrm>
+              <a:prstGeom prst="rect">
+                <a:avLst/>
+              </a:prstGeom>
+            </p:spPr>
+          </p:pic>
+        </mc:Fallback>
+      </mc:AlternateContent>
+      <mc:AlternateContent>
+        <mc:Choice xmlns:a14="http://schemas.microsoft.com/office/drawing/2010/main" Requires="a14">
+          <p:sp>
+            <p:nvSpPr>
+              <p:cNvPr id="99" name="Equation OMML" descr="\mathrm{sin}(a)"/>
+              <p:cNvSpPr txBox="1"/>
+              <p:nvPr/>
+            </p:nvSpPr>
+            <p:spPr>
+              <a:xfrm>
+                <a:off x="5639308" y="3378708"/>
+                <a:ext cx="533400" cy="193548"/>
+              </a:xfrm>
+              <a:prstGeom prst="rect">
+                <a:avLst/>
+              </a:prstGeom>
+              <a:noFill/>
+            </p:spPr>
+            <p:txBody>
+              <a:bodyPr lIns="0" tIns="0" rIns="0" bIns="0" anchor="ctr">
+                <a:noAutofit/>
+              </a:bodyPr>
+              <a:lstStyle/>
+              <a:p>
+                <a:pPr algn="ctr">
+                  <a:buNone/>
+                </a:pPr>
+                <a14:m>
+                  <m:oMathPara xmlns:m="http://schemas.openxmlformats.org/officeDocument/2006/math" xmlns:a="http://schemas.openxmlformats.org/drawingml/2006/main">
+                    <m:oMathParaPr>
+                      <m:jc m:val="centerGroup"/>
+                    </m:oMathParaPr>
+                    <m:oMath xmlns:m="http://schemas.openxmlformats.org/officeDocument/2006/math">
+                      <m:r>
+                        <m:rPr>
+                          <m:sty m:val="p"/>
+                        </m:rPr>
+                        <a:rPr lang="en-US" i="0" smtClean="0" sz="1495">
+                          <a:solidFill>
+                            <a:srgbClr val="C00000"/>
+                          </a:solidFill>
+                          <a:latin typeface="Cambria Math" panose="02040503050406030204" pitchFamily="18" charset="0"/>
+                        </a:rPr>
+                        <m:t xml:space="preserve">sin</m:t>
+                      </m:r>
+                      <m:r>
+                        <a:rPr lang="en-US" i="1" smtClean="0" sz="1495">
+                          <a:solidFill>
+                            <a:srgbClr val="C00000"/>
+                          </a:solidFill>
+                          <a:latin typeface="Cambria Math" panose="02040503050406030204" pitchFamily="18" charset="0"/>
+                        </a:rPr>
+                        <m:t xml:space="preserve">(a)</m:t>
+                      </m:r>
+                    </m:oMath>
+                  </m:oMathPara>
+                </a14:m>
+                <a:endParaRPr lang="en-US" dirty="0"/>
+              </a:p>
+            </p:txBody>
+          </p:sp>
+        </mc:Choice>
+        <mc:Fallback>
+          <p:pic>
+            <p:nvPicPr>
+              <p:cNvPr id="99" name="Image 43" descr="/home/ahmed/Projects/ai_llm_slides/videos/deep-learning/002_transformers_part2/recreated_pptx/build/assets/r1_s08.png">    </p:cNvPr>
+              <p:cNvPicPr>
+                <a:picLocks noChangeAspect="1"/>
+              </p:cNvPicPr>
+              <p:nvPr/>
+            </p:nvPicPr>
+            <p:blipFill>
+              <a:blip r:embed="rId44"/>
+              <a:stretch>
+                <a:fillRect/>
+              </a:stretch>
+            </p:blipFill>
+            <p:spPr>
+              <a:xfrm>
+                <a:off x="5639308" y="3378708"/>
+                <a:ext cx="533400" cy="193548"/>
+              </a:xfrm>
+              <a:prstGeom prst="rect">
+                <a:avLst/>
+              </a:prstGeom>
+            </p:spPr>
+          </p:pic>
+        </mc:Fallback>
+      </mc:AlternateContent>
+      <mc:AlternateContent>
+        <mc:Choice xmlns:a14="http://schemas.microsoft.com/office/drawing/2010/main" Requires="a14">
+          <p:sp>
+            <p:nvSpPr>
+              <p:cNvPr id="100" name="Equation OMML" descr="\mathrm{sin}(b)\,+"/>
+              <p:cNvSpPr txBox="1"/>
+              <p:nvPr/>
+            </p:nvSpPr>
+            <p:spPr>
+              <a:xfrm>
+                <a:off x="6248908" y="3378708"/>
+                <a:ext cx="743712" cy="190500"/>
+              </a:xfrm>
+              <a:prstGeom prst="rect">
+                <a:avLst/>
+              </a:prstGeom>
+              <a:noFill/>
+            </p:spPr>
+            <p:txBody>
+              <a:bodyPr lIns="0" tIns="0" rIns="0" bIns="0" anchor="ctr">
+                <a:noAutofit/>
+              </a:bodyPr>
+              <a:lstStyle/>
+              <a:p>
+                <a:pPr algn="ctr">
+                  <a:buNone/>
+                </a:pPr>
+                <a14:m>
+                  <m:oMathPara xmlns:m="http://schemas.openxmlformats.org/officeDocument/2006/math" xmlns:a="http://schemas.openxmlformats.org/drawingml/2006/main">
+                    <m:oMathParaPr>
+                      <m:jc m:val="centerGroup"/>
+                    </m:oMathParaPr>
+                    <m:oMath xmlns:m="http://schemas.openxmlformats.org/officeDocument/2006/math">
+                      <m:r>
+                        <m:rPr>
+                          <m:sty m:val="p"/>
+                        </m:rPr>
+                        <a:rPr lang="en-US" i="0" smtClean="0" sz="1460">
+                          <a:solidFill>
+                            <a:srgbClr val="0000CC"/>
+                          </a:solidFill>
+                          <a:latin typeface="Cambria Math" panose="02040503050406030204" pitchFamily="18" charset="0"/>
+                        </a:rPr>
+                        <m:t xml:space="preserve">sin</m:t>
+                      </m:r>
+                      <m:r>
+                        <a:rPr lang="en-US" i="1" smtClean="0" sz="1460">
+                          <a:solidFill>
+                            <a:srgbClr val="0000CC"/>
+                          </a:solidFill>
+                          <a:latin typeface="Cambria Math" panose="02040503050406030204" pitchFamily="18" charset="0"/>
+                        </a:rPr>
+                        <m:t xml:space="preserve">(b) +</m:t>
+                      </m:r>
+                    </m:oMath>
+                  </m:oMathPara>
+                </a14:m>
+                <a:endParaRPr lang="en-US" dirty="0"/>
+              </a:p>
+            </p:txBody>
+          </p:sp>
+        </mc:Choice>
+        <mc:Fallback>
+          <p:pic>
+            <p:nvPicPr>
+              <p:cNvPr id="100" name="Image 44" descr="/home/ahmed/Projects/ai_llm_slides/videos/deep-learning/002_transformers_part2/recreated_pptx/build/assets/r1_s09.png">    </p:cNvPr>
+              <p:cNvPicPr>
+                <a:picLocks noChangeAspect="1"/>
+              </p:cNvPicPr>
+              <p:nvPr/>
+            </p:nvPicPr>
+            <p:blipFill>
+              <a:blip r:embed="rId45"/>
+              <a:stretch>
+                <a:fillRect/>
+              </a:stretch>
+            </p:blipFill>
+            <p:spPr>
+              <a:xfrm>
+                <a:off x="6248908" y="3378708"/>
+                <a:ext cx="743712" cy="190500"/>
+              </a:xfrm>
+              <a:prstGeom prst="rect">
+                <a:avLst/>
+              </a:prstGeom>
+            </p:spPr>
+          </p:pic>
+        </mc:Fallback>
+      </mc:AlternateContent>
+      <mc:AlternateContent>
+        <mc:Choice xmlns:a14="http://schemas.microsoft.com/office/drawing/2010/main" Requires="a14">
+          <p:sp>
+            <p:nvSpPr>
+              <p:cNvPr id="101" name="Equation OMML" descr="\mathrm{cos}(a)"/>
+              <p:cNvSpPr txBox="1"/>
+              <p:nvPr/>
+            </p:nvSpPr>
+            <p:spPr>
+              <a:xfrm>
+                <a:off x="7087108" y="3378708"/>
+                <a:ext cx="566928" cy="188976"/>
+              </a:xfrm>
+              <a:prstGeom prst="rect">
+                <a:avLst/>
+              </a:prstGeom>
+              <a:noFill/>
+            </p:spPr>
+            <p:txBody>
+              <a:bodyPr lIns="0" tIns="0" rIns="0" bIns="0" anchor="ctr">
+                <a:noAutofit/>
+              </a:bodyPr>
+              <a:lstStyle/>
+              <a:p>
+                <a:pPr algn="ctr">
+                  <a:buNone/>
+                </a:pPr>
+                <a14:m>
+                  <m:oMathPara xmlns:m="http://schemas.openxmlformats.org/officeDocument/2006/math" xmlns:a="http://schemas.openxmlformats.org/drawingml/2006/main">
+                    <m:oMathParaPr>
+                      <m:jc m:val="centerGroup"/>
+                    </m:oMathParaPr>
+                    <m:oMath xmlns:m="http://schemas.openxmlformats.org/officeDocument/2006/math">
+                      <m:r>
+                        <m:rPr>
+                          <m:sty m:val="p"/>
+                        </m:rPr>
+                        <a:rPr lang="en-US" i="0" smtClean="0" sz="1456">
+                          <a:solidFill>
+                            <a:srgbClr val="C00000"/>
+                          </a:solidFill>
+                          <a:latin typeface="Cambria Math" panose="02040503050406030204" pitchFamily="18" charset="0"/>
+                        </a:rPr>
+                        <m:t xml:space="preserve">cos</m:t>
+                      </m:r>
+                      <m:r>
+                        <a:rPr lang="en-US" i="1" smtClean="0" sz="1456">
+                          <a:solidFill>
+                            <a:srgbClr val="C00000"/>
+                          </a:solidFill>
+                          <a:latin typeface="Cambria Math" panose="02040503050406030204" pitchFamily="18" charset="0"/>
+                        </a:rPr>
+                        <m:t xml:space="preserve">(a)</m:t>
+                      </m:r>
+                    </m:oMath>
+                  </m:oMathPara>
+                </a14:m>
+                <a:endParaRPr lang="en-US" dirty="0"/>
+              </a:p>
+            </p:txBody>
+          </p:sp>
+        </mc:Choice>
+        <mc:Fallback>
+          <p:pic>
+            <p:nvPicPr>
+              <p:cNvPr id="101" name="Image 45" descr="/home/ahmed/Projects/ai_llm_slides/videos/deep-learning/002_transformers_part2/recreated_pptx/build/assets/r1_s10.png">    </p:cNvPr>
+              <p:cNvPicPr>
+                <a:picLocks noChangeAspect="1"/>
+              </p:cNvPicPr>
+              <p:nvPr/>
+            </p:nvPicPr>
+            <p:blipFill>
+              <a:blip r:embed="rId46"/>
+              <a:stretch>
+                <a:fillRect/>
+              </a:stretch>
+            </p:blipFill>
+            <p:spPr>
+              <a:xfrm>
+                <a:off x="7087108" y="3378708"/>
+                <a:ext cx="566928" cy="188976"/>
+              </a:xfrm>
+              <a:prstGeom prst="rect">
+                <a:avLst/>
+              </a:prstGeom>
+            </p:spPr>
+          </p:pic>
+        </mc:Fallback>
+      </mc:AlternateContent>
+      <mc:AlternateContent>
+        <mc:Choice xmlns:a14="http://schemas.microsoft.com/office/drawing/2010/main" Requires="a14">
+          <p:sp>
+            <p:nvSpPr>
+              <p:cNvPr id="102" name="Equation OMML" descr="\mathrm{cos}(b)\,-"/>
+              <p:cNvSpPr txBox="1"/>
+              <p:nvPr/>
+            </p:nvSpPr>
+            <p:spPr>
+              <a:xfrm>
+                <a:off x="7734808" y="3378708"/>
+                <a:ext cx="733044" cy="178308"/>
+              </a:xfrm>
+              <a:prstGeom prst="rect">
+                <a:avLst/>
+              </a:prstGeom>
+              <a:noFill/>
+            </p:spPr>
+            <p:txBody>
+              <a:bodyPr lIns="0" tIns="0" rIns="0" bIns="0" anchor="ctr">
+                <a:noAutofit/>
+              </a:bodyPr>
+              <a:lstStyle/>
+              <a:p>
+                <a:pPr algn="ctr">
+                  <a:buNone/>
+                </a:pPr>
+                <a14:m>
+                  <m:oMathPara xmlns:m="http://schemas.openxmlformats.org/officeDocument/2006/math" xmlns:a="http://schemas.openxmlformats.org/drawingml/2006/main">
+                    <m:oMathParaPr>
+                      <m:jc m:val="centerGroup"/>
+                    </m:oMathParaPr>
+                    <m:oMath xmlns:m="http://schemas.openxmlformats.org/officeDocument/2006/math">
+                      <m:r>
+                        <m:rPr>
+                          <m:sty m:val="p"/>
+                        </m:rPr>
+                        <a:rPr lang="en-US" i="0" smtClean="0" sz="1352">
+                          <a:solidFill>
+                            <a:srgbClr val="0000CC"/>
+                          </a:solidFill>
+                          <a:latin typeface="Cambria Math" panose="02040503050406030204" pitchFamily="18" charset="0"/>
+                        </a:rPr>
+                        <m:t xml:space="preserve">cos</m:t>
+                      </m:r>
+                      <m:r>
+                        <a:rPr lang="en-US" i="1" smtClean="0" sz="1352">
+                          <a:solidFill>
+                            <a:srgbClr val="0000CC"/>
+                          </a:solidFill>
+                          <a:latin typeface="Cambria Math" panose="02040503050406030204" pitchFamily="18" charset="0"/>
+                        </a:rPr>
+                        <m:t xml:space="preserve">(b) -</m:t>
+                      </m:r>
+                    </m:oMath>
+                  </m:oMathPara>
+                </a14:m>
+                <a:endParaRPr lang="en-US" dirty="0"/>
+              </a:p>
+            </p:txBody>
+          </p:sp>
+        </mc:Choice>
+        <mc:Fallback>
+          <p:pic>
+            <p:nvPicPr>
+              <p:cNvPr id="102" name="Image 46" descr="/home/ahmed/Projects/ai_llm_slides/videos/deep-learning/002_transformers_part2/recreated_pptx/build/assets/r1_s11.png">    </p:cNvPr>
+              <p:cNvPicPr>
+                <a:picLocks noChangeAspect="1"/>
+              </p:cNvPicPr>
+              <p:nvPr/>
+            </p:nvPicPr>
+            <p:blipFill>
+              <a:blip r:embed="rId47"/>
+              <a:stretch>
+                <a:fillRect/>
+              </a:stretch>
+            </p:blipFill>
+            <p:spPr>
+              <a:xfrm>
+                <a:off x="7734808" y="3378708"/>
+                <a:ext cx="733044" cy="178308"/>
+              </a:xfrm>
+              <a:prstGeom prst="rect">
+                <a:avLst/>
+              </a:prstGeom>
+            </p:spPr>
+          </p:pic>
+        </mc:Fallback>
+      </mc:AlternateContent>
+      <mc:AlternateContent>
+        <mc:Choice xmlns:a14="http://schemas.microsoft.com/office/drawing/2010/main" Requires="a14">
+          <p:sp>
+            <p:nvSpPr>
+              <p:cNvPr id="103" name="Equation OMML" descr="\mathrm{cos}(a)"/>
+              <p:cNvSpPr txBox="1"/>
+              <p:nvPr/>
+            </p:nvSpPr>
+            <p:spPr>
+              <a:xfrm>
+                <a:off x="8547608" y="3378708"/>
+                <a:ext cx="589788" cy="196596"/>
+              </a:xfrm>
+              <a:prstGeom prst="rect">
+                <a:avLst/>
+              </a:prstGeom>
+              <a:noFill/>
+            </p:spPr>
+            <p:txBody>
+              <a:bodyPr lIns="0" tIns="0" rIns="0" bIns="0" anchor="ctr">
+                <a:noAutofit/>
+              </a:bodyPr>
+              <a:lstStyle/>
+              <a:p>
+                <a:pPr algn="ctr">
+                  <a:buNone/>
+                </a:pPr>
+                <a14:m>
+                  <m:oMathPara xmlns:m="http://schemas.openxmlformats.org/officeDocument/2006/math" xmlns:a="http://schemas.openxmlformats.org/drawingml/2006/main">
+                    <m:oMathParaPr>
+                      <m:jc m:val="centerGroup"/>
+                    </m:oMathParaPr>
+                    <m:oMath xmlns:m="http://schemas.openxmlformats.org/officeDocument/2006/math">
+                      <m:r>
+                        <m:rPr>
+                          <m:sty m:val="p"/>
+                        </m:rPr>
+                        <a:rPr lang="en-US" i="0" smtClean="0" sz="1521">
+                          <a:solidFill>
+                            <a:srgbClr val="C00000"/>
+                          </a:solidFill>
+                          <a:latin typeface="Cambria Math" panose="02040503050406030204" pitchFamily="18" charset="0"/>
+                        </a:rPr>
+                        <m:t xml:space="preserve">cos</m:t>
+                      </m:r>
+                      <m:r>
+                        <a:rPr lang="en-US" i="1" smtClean="0" sz="1521">
+                          <a:solidFill>
+                            <a:srgbClr val="C00000"/>
+                          </a:solidFill>
+                          <a:latin typeface="Cambria Math" panose="02040503050406030204" pitchFamily="18" charset="0"/>
+                        </a:rPr>
+                        <m:t xml:space="preserve">(a)</m:t>
+                      </m:r>
+                    </m:oMath>
+                  </m:oMathPara>
+                </a14:m>
+                <a:endParaRPr lang="en-US" dirty="0"/>
+              </a:p>
+            </p:txBody>
+          </p:sp>
+        </mc:Choice>
+        <mc:Fallback>
+          <p:pic>
+            <p:nvPicPr>
+              <p:cNvPr id="103" name="Image 47" descr="/home/ahmed/Projects/ai_llm_slides/videos/deep-learning/002_transformers_part2/recreated_pptx/build/assets/r1_s12.png">    </p:cNvPr>
+              <p:cNvPicPr>
+                <a:picLocks noChangeAspect="1"/>
+              </p:cNvPicPr>
+              <p:nvPr/>
+            </p:nvPicPr>
+            <p:blipFill>
+              <a:blip r:embed="rId48"/>
+              <a:stretch>
+                <a:fillRect/>
+              </a:stretch>
+            </p:blipFill>
+            <p:spPr>
+              <a:xfrm>
+                <a:off x="8547608" y="3378708"/>
+                <a:ext cx="589788" cy="196596"/>
+              </a:xfrm>
+              <a:prstGeom prst="rect">
+                <a:avLst/>
+              </a:prstGeom>
+            </p:spPr>
+          </p:pic>
+        </mc:Fallback>
+      </mc:AlternateContent>
+      <mc:AlternateContent>
+        <mc:Choice xmlns:a14="http://schemas.microsoft.com/office/drawing/2010/main" Requires="a14">
+          <p:sp>
+            <p:nvSpPr>
+              <p:cNvPr id="104" name="Equation OMML" descr="]^{2}"/>
+              <p:cNvSpPr txBox="1"/>
+              <p:nvPr/>
+            </p:nvSpPr>
+            <p:spPr>
+              <a:xfrm>
+                <a:off x="9169908" y="3378708"/>
+                <a:ext cx="179832" cy="272796"/>
+              </a:xfrm>
+              <a:prstGeom prst="rect">
+                <a:avLst/>
+              </a:prstGeom>
+              <a:noFill/>
+            </p:spPr>
+            <p:txBody>
+              <a:bodyPr lIns="0" tIns="0" rIns="0" bIns="0" anchor="ctr">
+                <a:noAutofit/>
+              </a:bodyPr>
+              <a:lstStyle/>
+              <a:p>
+                <a:pPr algn="ctr">
+                  <a:buNone/>
+                </a:pPr>
+                <a14:m>
+                  <m:oMathPara xmlns:m="http://schemas.openxmlformats.org/officeDocument/2006/math" xmlns:a="http://schemas.openxmlformats.org/drawingml/2006/main">
+                    <m:oMathParaPr>
+                      <m:jc m:val="centerGroup"/>
+                    </m:oMathParaPr>
+                    <m:oMath xmlns:m="http://schemas.openxmlformats.org/officeDocument/2006/math">
+                      <m:sSup>
+                        <m:sSupPr>
+                          <m:ctrlPr>
+                            <a:rPr lang="en-US" i="1" smtClean="0" sz="1820">
+                              <a:solidFill>
+                                <a:srgbClr val="0000CC"/>
+                              </a:solidFill>
+                              <a:latin typeface="Cambria Math" panose="02040503050406030204" pitchFamily="18" charset="0"/>
+                            </a:rPr>
+                          </m:ctrlPr>
+                        </m:sSupPr>
+                        <m:e>
+                          <m:r>
+                            <a:rPr lang="en-US" i="1" smtClean="0" sz="1820">
+                              <a:solidFill>
+                                <a:srgbClr val="0000CC"/>
+                              </a:solidFill>
+                              <a:latin typeface="Cambria Math" panose="02040503050406030204" pitchFamily="18" charset="0"/>
+                            </a:rPr>
+                            <m:t xml:space="preserve">]</m:t>
+                          </m:r>
+                        </m:e>
+                        <m:sup>
+                          <m:r>
+                            <a:rPr lang="en-US" i="1" smtClean="0" sz="1820">
+                              <a:solidFill>
+                                <a:srgbClr val="0000CC"/>
+                              </a:solidFill>
+                              <a:latin typeface="Cambria Math" panose="02040503050406030204" pitchFamily="18" charset="0"/>
+                            </a:rPr>
+                            <m:t xml:space="preserve">2</m:t>
+                          </m:r>
+                        </m:sup>
+                      </m:sSup>
+                    </m:oMath>
+                  </m:oMathPara>
+                </a14:m>
+                <a:endParaRPr lang="en-US" dirty="0"/>
+              </a:p>
+            </p:txBody>
+          </p:sp>
+        </mc:Choice>
+        <mc:Fallback>
+          <p:pic>
+            <p:nvPicPr>
+              <p:cNvPr id="104" name="Image 48" descr="/home/ahmed/Projects/ai_llm_slides/videos/deep-learning/002_transformers_part2/recreated_pptx/build/assets/r1_s13.png">    </p:cNvPr>
+              <p:cNvPicPr>
+                <a:picLocks noChangeAspect="1"/>
+              </p:cNvPicPr>
+              <p:nvPr/>
+            </p:nvPicPr>
+            <p:blipFill>
+              <a:blip r:embed="rId49"/>
+              <a:stretch>
+                <a:fillRect/>
+              </a:stretch>
+            </p:blipFill>
+            <p:spPr>
+              <a:xfrm>
+                <a:off x="9169908" y="3378708"/>
+                <a:ext cx="179832" cy="272796"/>
+              </a:xfrm>
+              <a:prstGeom prst="rect">
+                <a:avLst/>
+              </a:prstGeom>
+            </p:spPr>
+          </p:pic>
+        </mc:Fallback>
+      </mc:AlternateContent>
+      <mc:AlternateContent>
+        <mc:Choice xmlns:a14="http://schemas.microsoft.com/office/drawing/2010/main" Requires="a14">
+          <p:sp>
+            <p:nvSpPr>
+              <p:cNvPr id="105" name="Equation OMML" descr="\mathrm{cos}^{2}(b)"/>
+              <p:cNvSpPr txBox="1"/>
+              <p:nvPr/>
+            </p:nvSpPr>
+            <p:spPr>
+              <a:xfrm>
+                <a:off x="965708" y="5994908"/>
+                <a:ext cx="679704" cy="228600"/>
+              </a:xfrm>
+              <a:prstGeom prst="rect">
+                <a:avLst/>
+              </a:prstGeom>
+              <a:noFill/>
+            </p:spPr>
+            <p:txBody>
+              <a:bodyPr lIns="0" tIns="0" rIns="0" bIns="0" anchor="ctr">
+                <a:noAutofit/>
+              </a:bodyPr>
+              <a:lstStyle/>
+              <a:p>
+                <a:pPr algn="ctr">
+                  <a:buNone/>
+                </a:pPr>
+                <a14:m>
+                  <m:oMathPara xmlns:m="http://schemas.openxmlformats.org/officeDocument/2006/math" xmlns:a="http://schemas.openxmlformats.org/drawingml/2006/main">
+                    <m:oMathParaPr>
+                      <m:jc m:val="centerGroup"/>
+                    </m:oMathParaPr>
+                    <m:oMath xmlns:m="http://schemas.openxmlformats.org/officeDocument/2006/math">
+                      <m:sSup>
+                        <m:sSupPr>
+                          <m:ctrlPr>
+                            <a:rPr lang="en-US" i="1" smtClean="0" sz="1500">
+                              <a:solidFill>
+                                <a:srgbClr val="000000"/>
+                              </a:solidFill>
+                              <a:latin typeface="Cambria Math" panose="02040503050406030204" pitchFamily="18" charset="0"/>
+                            </a:rPr>
+                          </m:ctrlPr>
+                        </m:sSupPr>
+                        <m:e>
+                          <m:r>
+                            <m:rPr>
+                              <m:sty m:val="p"/>
+                            </m:rPr>
+                            <a:rPr lang="en-US" i="0" smtClean="0" sz="1500">
+                              <a:solidFill>
+                                <a:srgbClr val="000000"/>
+                              </a:solidFill>
+                              <a:latin typeface="Cambria Math" panose="02040503050406030204" pitchFamily="18" charset="0"/>
+                            </a:rPr>
+                            <m:t xml:space="preserve">cos</m:t>
+                          </m:r>
+                        </m:e>
+                        <m:sup>
+                          <m:r>
+                            <a:rPr lang="en-US" i="1" smtClean="0" sz="1500">
+                              <a:solidFill>
+                                <a:srgbClr val="000000"/>
+                              </a:solidFill>
+                              <a:latin typeface="Cambria Math" panose="02040503050406030204" pitchFamily="18" charset="0"/>
+                            </a:rPr>
+                            <m:t xml:space="preserve">2</m:t>
+                          </m:r>
+                        </m:sup>
+                      </m:sSup>
+                      <m:r>
+                        <a:rPr lang="en-US" i="1" smtClean="0" sz="1500">
+                          <a:solidFill>
+                            <a:srgbClr val="000000"/>
+                          </a:solidFill>
+                          <a:latin typeface="Cambria Math" panose="02040503050406030204" pitchFamily="18" charset="0"/>
+                        </a:rPr>
+                        <m:t xml:space="preserve">(b)</m:t>
+                      </m:r>
+                    </m:oMath>
+                  </m:oMathPara>
+                </a14:m>
+                <a:endParaRPr lang="en-US" dirty="0"/>
+              </a:p>
+            </p:txBody>
+          </p:sp>
+        </mc:Choice>
+        <mc:Fallback>
+          <p:pic>
+            <p:nvPicPr>
+              <p:cNvPr id="105" name="Image 49" descr="/home/ahmed/Projects/ai_llm_slides/videos/deep-learning/002_transformers_part2/recreated_pptx/build/assets/dR7_s1.png">    </p:cNvPr>
+              <p:cNvPicPr>
+                <a:picLocks noChangeAspect="1"/>
+              </p:cNvPicPr>
+              <p:nvPr/>
+            </p:nvPicPr>
+            <p:blipFill>
+              <a:blip r:embed="rId50"/>
+              <a:stretch>
+                <a:fillRect/>
+              </a:stretch>
+            </p:blipFill>
+            <p:spPr>
+              <a:xfrm>
+                <a:off x="965708" y="5994908"/>
+                <a:ext cx="679704" cy="228600"/>
+              </a:xfrm>
+              <a:prstGeom prst="rect">
+                <a:avLst/>
+              </a:prstGeom>
+            </p:spPr>
+          </p:pic>
+        </mc:Fallback>
+      </mc:AlternateContent>
+      <mc:AlternateContent>
+        <mc:Choice xmlns:a14="http://schemas.microsoft.com/office/drawing/2010/main" Requires="a14">
+          <p:sp>
+            <p:nvSpPr>
+              <p:cNvPr id="106" name="Equation OMML" descr="-2\,\mathrm{cos}(b)\,+1\,+"/>
+              <p:cNvSpPr txBox="1"/>
+              <p:nvPr/>
+            </p:nvSpPr>
+            <p:spPr>
+              <a:xfrm>
+                <a:off x="1715008" y="5994908"/>
+                <a:ext cx="1507236" cy="195072"/>
+              </a:xfrm>
+              <a:prstGeom prst="rect">
+                <a:avLst/>
+              </a:prstGeom>
+              <a:noFill/>
+            </p:spPr>
+            <p:txBody>
+              <a:bodyPr lIns="0" tIns="0" rIns="0" bIns="0" anchor="ctr">
+                <a:noAutofit/>
+              </a:bodyPr>
+              <a:lstStyle/>
+              <a:p>
+                <a:pPr algn="ctr">
+                  <a:buNone/>
+                </a:pPr>
+                <a14:m>
+                  <m:oMathPara xmlns:m="http://schemas.openxmlformats.org/officeDocument/2006/math" xmlns:a="http://schemas.openxmlformats.org/drawingml/2006/main">
+                    <m:oMathParaPr>
+                      <m:jc m:val="centerGroup"/>
+                    </m:oMathParaPr>
+                    <m:oMath xmlns:m="http://schemas.openxmlformats.org/officeDocument/2006/math">
+                      <m:r>
+                        <a:rPr lang="en-US" i="1" smtClean="0" sz="1506">
+                          <a:solidFill>
+                            <a:srgbClr val="000000"/>
+                          </a:solidFill>
+                          <a:latin typeface="Cambria Math" panose="02040503050406030204" pitchFamily="18" charset="0"/>
+                        </a:rPr>
+                        <m:t xml:space="preserve">-2 </m:t>
+                      </m:r>
+                      <m:r>
+                        <m:rPr>
+                          <m:sty m:val="p"/>
+                        </m:rPr>
+                        <a:rPr lang="en-US" i="0" smtClean="0" sz="1506">
+                          <a:solidFill>
+                            <a:srgbClr val="000000"/>
+                          </a:solidFill>
+                          <a:latin typeface="Cambria Math" panose="02040503050406030204" pitchFamily="18" charset="0"/>
+                        </a:rPr>
+                        <m:t xml:space="preserve">cos</m:t>
+                      </m:r>
+                      <m:r>
+                        <a:rPr lang="en-US" i="1" smtClean="0" sz="1506">
+                          <a:solidFill>
+                            <a:srgbClr val="000000"/>
+                          </a:solidFill>
+                          <a:latin typeface="Cambria Math" panose="02040503050406030204" pitchFamily="18" charset="0"/>
+                        </a:rPr>
+                        <m:t xml:space="preserve">(b) +1 +</m:t>
+                      </m:r>
+                    </m:oMath>
+                  </m:oMathPara>
+                </a14:m>
+                <a:endParaRPr lang="en-US" dirty="0"/>
+              </a:p>
+            </p:txBody>
+          </p:sp>
+        </mc:Choice>
+        <mc:Fallback>
+          <p:pic>
+            <p:nvPicPr>
+              <p:cNvPr id="106" name="Image 50" descr="/home/ahmed/Projects/ai_llm_slides/videos/deep-learning/002_transformers_part2/recreated_pptx/build/assets/dR7_s2.png">    </p:cNvPr>
+              <p:cNvPicPr>
+                <a:picLocks noChangeAspect="1"/>
+              </p:cNvPicPr>
+              <p:nvPr/>
+            </p:nvPicPr>
+            <p:blipFill>
+              <a:blip r:embed="rId51"/>
+              <a:stretch>
+                <a:fillRect/>
+              </a:stretch>
+            </p:blipFill>
+            <p:spPr>
+              <a:xfrm>
+                <a:off x="1715008" y="5994908"/>
+                <a:ext cx="1507236" cy="195072"/>
+              </a:xfrm>
+              <a:prstGeom prst="rect">
+                <a:avLst/>
+              </a:prstGeom>
+            </p:spPr>
+          </p:pic>
+        </mc:Fallback>
+      </mc:AlternateContent>
+      <mc:AlternateContent>
+        <mc:Choice xmlns:a14="http://schemas.microsoft.com/office/drawing/2010/main" Requires="a14">
+          <p:sp>
+            <p:nvSpPr>
+              <p:cNvPr id="107" name="Equation OMML" descr="\mathrm{sin}^{2}(b)"/>
+              <p:cNvSpPr txBox="1"/>
+              <p:nvPr/>
+            </p:nvSpPr>
+            <p:spPr>
+              <a:xfrm>
+                <a:off x="3162808" y="5994908"/>
+                <a:ext cx="640080" cy="231648"/>
+              </a:xfrm>
+              <a:prstGeom prst="rect">
+                <a:avLst/>
+              </a:prstGeom>
+              <a:noFill/>
+            </p:spPr>
+            <p:txBody>
+              <a:bodyPr lIns="0" tIns="0" rIns="0" bIns="0" anchor="ctr">
+                <a:noAutofit/>
+              </a:bodyPr>
+              <a:lstStyle/>
+              <a:p>
+                <a:pPr algn="ctr">
+                  <a:buNone/>
+                </a:pPr>
+                <a14:m>
+                  <m:oMathPara xmlns:m="http://schemas.openxmlformats.org/officeDocument/2006/math" xmlns:a="http://schemas.openxmlformats.org/drawingml/2006/main">
+                    <m:oMathParaPr>
+                      <m:jc m:val="centerGroup"/>
+                    </m:oMathParaPr>
+                    <m:oMath xmlns:m="http://schemas.openxmlformats.org/officeDocument/2006/math">
+                      <m:sSup>
+                        <m:sSupPr>
+                          <m:ctrlPr>
+                            <a:rPr lang="en-US" i="1" smtClean="0" sz="1522">
+                              <a:solidFill>
+                                <a:srgbClr val="000000"/>
+                              </a:solidFill>
+                              <a:latin typeface="Cambria Math" panose="02040503050406030204" pitchFamily="18" charset="0"/>
+                            </a:rPr>
+                          </m:ctrlPr>
+                        </m:sSupPr>
+                        <m:e>
+                          <m:r>
+                            <m:rPr>
+                              <m:sty m:val="p"/>
+                            </m:rPr>
+                            <a:rPr lang="en-US" i="0" smtClean="0" sz="1522">
+                              <a:solidFill>
+                                <a:srgbClr val="000000"/>
+                              </a:solidFill>
+                              <a:latin typeface="Cambria Math" panose="02040503050406030204" pitchFamily="18" charset="0"/>
+                            </a:rPr>
+                            <m:t xml:space="preserve">sin</m:t>
+                          </m:r>
+                        </m:e>
+                        <m:sup>
+                          <m:r>
+                            <a:rPr lang="en-US" i="1" smtClean="0" sz="1522">
+                              <a:solidFill>
+                                <a:srgbClr val="000000"/>
+                              </a:solidFill>
+                              <a:latin typeface="Cambria Math" panose="02040503050406030204" pitchFamily="18" charset="0"/>
+                            </a:rPr>
+                            <m:t xml:space="preserve">2</m:t>
+                          </m:r>
+                        </m:sup>
+                      </m:sSup>
+                      <m:r>
+                        <a:rPr lang="en-US" i="1" smtClean="0" sz="1522">
+                          <a:solidFill>
+                            <a:srgbClr val="000000"/>
+                          </a:solidFill>
+                          <a:latin typeface="Cambria Math" panose="02040503050406030204" pitchFamily="18" charset="0"/>
+                        </a:rPr>
+                        <m:t xml:space="preserve">(b)</m:t>
+                      </m:r>
+                    </m:oMath>
+                  </m:oMathPara>
+                </a14:m>
+                <a:endParaRPr lang="en-US" dirty="0"/>
+              </a:p>
+            </p:txBody>
+          </p:sp>
+        </mc:Choice>
+        <mc:Fallback>
+          <p:pic>
+            <p:nvPicPr>
+              <p:cNvPr id="107" name="Image 51" descr="/home/ahmed/Projects/ai_llm_slides/videos/deep-learning/002_transformers_part2/recreated_pptx/build/assets/dR7_s3.png">    </p:cNvPr>
+              <p:cNvPicPr>
+                <a:picLocks noChangeAspect="1"/>
+              </p:cNvPicPr>
+              <p:nvPr/>
+            </p:nvPicPr>
+            <p:blipFill>
+              <a:blip r:embed="rId52"/>
+              <a:stretch>
+                <a:fillRect/>
+              </a:stretch>
+            </p:blipFill>
+            <p:spPr>
+              <a:xfrm>
+                <a:off x="3162808" y="5994908"/>
+                <a:ext cx="640080" cy="231648"/>
+              </a:xfrm>
+              <a:prstGeom prst="rect">
+                <a:avLst/>
+              </a:prstGeom>
+            </p:spPr>
+          </p:pic>
+        </mc:Fallback>
+      </mc:AlternateContent>
+      <mc:AlternateContent>
+        <mc:Choice xmlns:a14="http://schemas.microsoft.com/office/drawing/2010/main" Requires="a14">
+          <p:sp>
+            <p:nvSpPr>
+              <p:cNvPr id="108" name="Equation OMML" descr="=\,2\,-2\,\mathrm{cos}(b)\,=\,2(1-\mathrm{cos}(b)\,)"/>
+              <p:cNvSpPr txBox="1"/>
+              <p:nvPr/>
+            </p:nvSpPr>
+            <p:spPr>
+              <a:xfrm>
+                <a:off x="3874008" y="5994908"/>
+                <a:ext cx="2674620" cy="181356"/>
+              </a:xfrm>
+              <a:prstGeom prst="rect">
+                <a:avLst/>
+              </a:prstGeom>
+              <a:noFill/>
+            </p:spPr>
+            <p:txBody>
+              <a:bodyPr lIns="0" tIns="0" rIns="0" bIns="0" anchor="ctr">
+                <a:noAutofit/>
+              </a:bodyPr>
+              <a:lstStyle/>
+              <a:p>
+                <a:pPr algn="ctr">
+                  <a:buNone/>
+                </a:pPr>
+                <a14:m>
+                  <m:oMathPara xmlns:m="http://schemas.openxmlformats.org/officeDocument/2006/math" xmlns:a="http://schemas.openxmlformats.org/drawingml/2006/main">
+                    <m:oMathParaPr>
+                      <m:jc m:val="centerGroup"/>
+                    </m:oMathParaPr>
+                    <m:oMath xmlns:m="http://schemas.openxmlformats.org/officeDocument/2006/math">
+                      <m:r>
+                        <a:rPr lang="en-US" i="1" smtClean="0" sz="1390">
+                          <a:solidFill>
+                            <a:srgbClr val="000000"/>
+                          </a:solidFill>
+                          <a:latin typeface="Cambria Math" panose="02040503050406030204" pitchFamily="18" charset="0"/>
+                        </a:rPr>
+                        <m:t xml:space="preserve">= 2 -2 </m:t>
+                      </m:r>
+                      <m:r>
+                        <m:rPr>
+                          <m:sty m:val="p"/>
+                        </m:rPr>
+                        <a:rPr lang="en-US" i="0" smtClean="0" sz="1390">
+                          <a:solidFill>
+                            <a:srgbClr val="000000"/>
+                          </a:solidFill>
+                          <a:latin typeface="Cambria Math" panose="02040503050406030204" pitchFamily="18" charset="0"/>
+                        </a:rPr>
+                        <m:t xml:space="preserve">cos</m:t>
+                      </m:r>
+                      <m:r>
+                        <a:rPr lang="en-US" i="1" smtClean="0" sz="1390">
+                          <a:solidFill>
+                            <a:srgbClr val="000000"/>
+                          </a:solidFill>
+                          <a:latin typeface="Cambria Math" panose="02040503050406030204" pitchFamily="18" charset="0"/>
+                        </a:rPr>
+                        <m:t xml:space="preserve">(b) = 2(1-</m:t>
+                      </m:r>
+                      <m:r>
+                        <m:rPr>
+                          <m:sty m:val="p"/>
+                        </m:rPr>
+                        <a:rPr lang="en-US" i="0" smtClean="0" sz="1390">
+                          <a:solidFill>
+                            <a:srgbClr val="000000"/>
+                          </a:solidFill>
+                          <a:latin typeface="Cambria Math" panose="02040503050406030204" pitchFamily="18" charset="0"/>
+                        </a:rPr>
+                        <m:t xml:space="preserve">cos</m:t>
+                      </m:r>
+                      <m:r>
+                        <a:rPr lang="en-US" i="1" smtClean="0" sz="1390">
+                          <a:solidFill>
+                            <a:srgbClr val="000000"/>
+                          </a:solidFill>
+                          <a:latin typeface="Cambria Math" panose="02040503050406030204" pitchFamily="18" charset="0"/>
+                        </a:rPr>
+                        <m:t xml:space="preserve">(b) )</m:t>
+                      </m:r>
+                    </m:oMath>
+                  </m:oMathPara>
+                </a14:m>
+                <a:endParaRPr lang="en-US" dirty="0"/>
+              </a:p>
+            </p:txBody>
+          </p:sp>
+        </mc:Choice>
+        <mc:Fallback>
+          <p:pic>
+            <p:nvPicPr>
+              <p:cNvPr id="108" name="Image 52" descr="/home/ahmed/Projects/ai_llm_slides/videos/deep-learning/002_transformers_part2/recreated_pptx/build/assets/dR7_s4.png">    </p:cNvPr>
+              <p:cNvPicPr>
+                <a:picLocks noChangeAspect="1"/>
+              </p:cNvPicPr>
+              <p:nvPr/>
+            </p:nvPicPr>
+            <p:blipFill>
+              <a:blip r:embed="rId53"/>
+              <a:stretch>
+                <a:fillRect/>
+              </a:stretch>
+            </p:blipFill>
+            <p:spPr>
+              <a:xfrm>
+                <a:off x="3874008" y="5994908"/>
+                <a:ext cx="2674620" cy="181356"/>
+              </a:xfrm>
+              <a:prstGeom prst="rect">
+                <a:avLst/>
+              </a:prstGeom>
+            </p:spPr>
+          </p:pic>
+        </mc:Fallback>
+      </mc:AlternateContent>
+      <mc:AlternateContent>
+        <mc:Choice xmlns:a14="http://schemas.microsoft.com/office/drawing/2010/main" Requires="a14">
+          <p:sp>
+            <p:nvSpPr>
+              <p:cNvPr id="109" name="Equation OMML" descr="="/>
+              <p:cNvSpPr txBox="1"/>
+              <p:nvPr/>
+            </p:nvSpPr>
+            <p:spPr>
+              <a:xfrm>
+                <a:off x="9728708" y="3429508"/>
+                <a:ext cx="150876" cy="82296"/>
+              </a:xfrm>
+              <a:prstGeom prst="rect">
+                <a:avLst/>
+              </a:prstGeom>
+              <a:noFill/>
+            </p:spPr>
+            <p:txBody>
+              <a:bodyPr lIns="0" tIns="0" rIns="0" bIns="0" anchor="ctr">
+                <a:noAutofit/>
+              </a:bodyPr>
+              <a:lstStyle/>
+              <a:p>
+                <a:pPr algn="ctr">
+                  <a:buNone/>
+                </a:pPr>
+                <a14:m>
+                  <m:oMathPara xmlns:m="http://schemas.openxmlformats.org/officeDocument/2006/math" xmlns:a="http://schemas.openxmlformats.org/drawingml/2006/main">
+                    <m:oMathParaPr>
+                      <m:jc m:val="centerGroup"/>
+                    </m:oMathParaPr>
+                    <m:oMath xmlns:m="http://schemas.openxmlformats.org/officeDocument/2006/math">
+                      <m:r>
+                        <a:rPr lang="en-US" i="1" smtClean="0" sz="1600">
+                          <a:solidFill>
+                            <a:srgbClr val="0000CC"/>
+                          </a:solidFill>
+                          <a:latin typeface="Cambria Math" panose="02040503050406030204" pitchFamily="18" charset="0"/>
+                        </a:rPr>
+                        <m:t xml:space="preserve">=</m:t>
+                      </m:r>
+                    </m:oMath>
+                  </m:oMathPara>
+                </a14:m>
+                <a:endParaRPr lang="en-US" dirty="0"/>
+              </a:p>
+            </p:txBody>
+          </p:sp>
+        </mc:Choice>
+        <mc:Fallback>
+          <p:pic>
+            <p:nvPicPr>
+              <p:cNvPr id="109" name="Image 53" descr="/home/ahmed/Projects/ai_llm_slides/videos/deep-learning/002_transformers_part2/recreated_pptx/build/assets/dEq.png">    </p:cNvPr>
+              <p:cNvPicPr>
+                <a:picLocks noChangeAspect="1"/>
+              </p:cNvPicPr>
+              <p:nvPr/>
+            </p:nvPicPr>
+            <p:blipFill>
+              <a:blip r:embed="rId54"/>
+              <a:stretch>
+                <a:fillRect/>
+              </a:stretch>
+            </p:blipFill>
+            <p:spPr>
+              <a:xfrm>
+                <a:off x="9728708" y="3429508"/>
+                <a:ext cx="150876" cy="82296"/>
+              </a:xfrm>
+              <a:prstGeom prst="rect">
+                <a:avLst/>
+              </a:prstGeom>
+            </p:spPr>
+          </p:pic>
+        </mc:Fallback>
+      </mc:AlternateContent>
+      <mc:AlternateContent>
+        <mc:Choice xmlns:a14="http://schemas.microsoft.com/office/drawing/2010/main" Requires="a14">
+          <p:sp>
+            <p:nvSpPr>
+              <p:cNvPr id="110" name="Equation OMML" descr="="/>
+              <p:cNvSpPr txBox="1"/>
+              <p:nvPr/>
+            </p:nvSpPr>
+            <p:spPr>
+              <a:xfrm>
+                <a:off x="9741408" y="3861308"/>
+                <a:ext cx="150876" cy="82296"/>
+              </a:xfrm>
+              <a:prstGeom prst="rect">
+                <a:avLst/>
+              </a:prstGeom>
+              <a:noFill/>
+            </p:spPr>
+            <p:txBody>
+              <a:bodyPr lIns="0" tIns="0" rIns="0" bIns="0" anchor="ctr">
+                <a:noAutofit/>
+              </a:bodyPr>
+              <a:lstStyle/>
+              <a:p>
+                <a:pPr algn="ctr">
+                  <a:buNone/>
+                </a:pPr>
+                <a14:m>
+                  <m:oMathPara xmlns:m="http://schemas.openxmlformats.org/officeDocument/2006/math" xmlns:a="http://schemas.openxmlformats.org/drawingml/2006/main">
+                    <m:oMathParaPr>
+                      <m:jc m:val="centerGroup"/>
+                    </m:oMathParaPr>
+                    <m:oMath xmlns:m="http://schemas.openxmlformats.org/officeDocument/2006/math">
+                      <m:r>
+                        <a:rPr lang="en-US" i="1" smtClean="0" sz="1600">
+                          <a:solidFill>
+                            <a:srgbClr val="0000CC"/>
+                          </a:solidFill>
+                          <a:latin typeface="Cambria Math" panose="02040503050406030204" pitchFamily="18" charset="0"/>
+                        </a:rPr>
+                        <m:t xml:space="preserve">=</m:t>
+                      </m:r>
+                    </m:oMath>
+                  </m:oMathPara>
+                </a14:m>
+                <a:endParaRPr lang="en-US" dirty="0"/>
+              </a:p>
+            </p:txBody>
+          </p:sp>
+        </mc:Choice>
+        <mc:Fallback>
+          <p:pic>
+            <p:nvPicPr>
+              <p:cNvPr id="110" name="Image 54" descr="/home/ahmed/Projects/ai_llm_slides/videos/deep-learning/002_transformers_part2/recreated_pptx/build/assets/dEq.png">    </p:cNvPr>
+              <p:cNvPicPr>
+                <a:picLocks noChangeAspect="1"/>
+              </p:cNvPicPr>
+              <p:nvPr/>
+            </p:nvPicPr>
+            <p:blipFill>
+              <a:blip r:embed="rId55"/>
+              <a:stretch>
+                <a:fillRect/>
+              </a:stretch>
+            </p:blipFill>
+            <p:spPr>
+              <a:xfrm>
+                <a:off x="9741408" y="3861308"/>
+                <a:ext cx="150876" cy="82296"/>
+              </a:xfrm>
+              <a:prstGeom prst="rect">
+                <a:avLst/>
+              </a:prstGeom>
+            </p:spPr>
+          </p:pic>
+        </mc:Fallback>
+      </mc:AlternateContent>
+      <mc:AlternateContent>
+        <mc:Choice xmlns:a14="http://schemas.microsoft.com/office/drawing/2010/main" Requires="a14">
+          <p:sp>
+            <p:nvSpPr>
+              <p:cNvPr id="111" name="Equation OMML" descr="="/>
+              <p:cNvSpPr txBox="1"/>
+              <p:nvPr/>
+            </p:nvSpPr>
+            <p:spPr>
+              <a:xfrm>
+                <a:off x="9792208" y="4636008"/>
+                <a:ext cx="150876" cy="82296"/>
+              </a:xfrm>
+              <a:prstGeom prst="rect">
+                <a:avLst/>
+              </a:prstGeom>
+              <a:noFill/>
+            </p:spPr>
+            <p:txBody>
+              <a:bodyPr lIns="0" tIns="0" rIns="0" bIns="0" anchor="ctr">
+                <a:noAutofit/>
+              </a:bodyPr>
+              <a:lstStyle/>
+              <a:p>
+                <a:pPr algn="ctr">
+                  <a:buNone/>
+                </a:pPr>
+                <a14:m>
+                  <m:oMathPara xmlns:m="http://schemas.openxmlformats.org/officeDocument/2006/math" xmlns:a="http://schemas.openxmlformats.org/drawingml/2006/main">
+                    <m:oMathParaPr>
+                      <m:jc m:val="centerGroup"/>
+                    </m:oMathParaPr>
+                    <m:oMath xmlns:m="http://schemas.openxmlformats.org/officeDocument/2006/math">
+                      <m:r>
+                        <a:rPr lang="en-US" i="1" smtClean="0" sz="1600">
+                          <a:solidFill>
+                            <a:srgbClr val="0000CC"/>
+                          </a:solidFill>
+                          <a:latin typeface="Cambria Math" panose="02040503050406030204" pitchFamily="18" charset="0"/>
+                        </a:rPr>
+                        <m:t xml:space="preserve">=</m:t>
+                      </m:r>
+                    </m:oMath>
+                  </m:oMathPara>
+                </a14:m>
+                <a:endParaRPr lang="en-US" dirty="0"/>
+              </a:p>
+            </p:txBody>
+          </p:sp>
+        </mc:Choice>
+        <mc:Fallback>
+          <p:pic>
+            <p:nvPicPr>
+              <p:cNvPr id="111" name="Image 55" descr="/home/ahmed/Projects/ai_llm_slides/videos/deep-learning/002_transformers_part2/recreated_pptx/build/assets/dEq.png">    </p:cNvPr>
+              <p:cNvPicPr>
+                <a:picLocks noChangeAspect="1"/>
+              </p:cNvPicPr>
+              <p:nvPr/>
+            </p:nvPicPr>
+            <p:blipFill>
+              <a:blip r:embed="rId56"/>
+              <a:stretch>
+                <a:fillRect/>
+              </a:stretch>
+            </p:blipFill>
+            <p:spPr>
+              <a:xfrm>
+                <a:off x="9792208" y="4636008"/>
+                <a:ext cx="150876" cy="82296"/>
+              </a:xfrm>
+              <a:prstGeom prst="rect">
+                <a:avLst/>
+              </a:prstGeom>
+            </p:spPr>
+          </p:pic>
+        </mc:Fallback>
+      </mc:AlternateContent>
+      <mc:AlternateContent>
+        <mc:Choice xmlns:a14="http://schemas.microsoft.com/office/drawing/2010/main" Requires="a14">
+          <p:sp>
+            <p:nvSpPr>
+              <p:cNvPr id="112" name="Equation OMML" descr="="/>
+              <p:cNvSpPr txBox="1"/>
+              <p:nvPr/>
+            </p:nvSpPr>
+            <p:spPr>
+              <a:xfrm>
+                <a:off x="9817608" y="5105908"/>
+                <a:ext cx="150876" cy="82296"/>
+              </a:xfrm>
+              <a:prstGeom prst="rect">
+                <a:avLst/>
+              </a:prstGeom>
+              <a:noFill/>
+            </p:spPr>
+            <p:txBody>
+              <a:bodyPr lIns="0" tIns="0" rIns="0" bIns="0" anchor="ctr">
+                <a:noAutofit/>
+              </a:bodyPr>
+              <a:lstStyle/>
+              <a:p>
+                <a:pPr algn="ctr">
+                  <a:buNone/>
+                </a:pPr>
+                <a14:m>
+                  <m:oMathPara xmlns:m="http://schemas.openxmlformats.org/officeDocument/2006/math" xmlns:a="http://schemas.openxmlformats.org/drawingml/2006/main">
+                    <m:oMathParaPr>
+                      <m:jc m:val="centerGroup"/>
+                    </m:oMathParaPr>
+                    <m:oMath xmlns:m="http://schemas.openxmlformats.org/officeDocument/2006/math">
+                      <m:r>
+                        <a:rPr lang="en-US" i="1" smtClean="0" sz="1600">
+                          <a:solidFill>
+                            <a:srgbClr val="0000CC"/>
+                          </a:solidFill>
+                          <a:latin typeface="Cambria Math" panose="02040503050406030204" pitchFamily="18" charset="0"/>
+                        </a:rPr>
+                        <m:t xml:space="preserve">=</m:t>
+                      </m:r>
+                    </m:oMath>
+                  </m:oMathPara>
+                </a14:m>
+                <a:endParaRPr lang="en-US" dirty="0"/>
+              </a:p>
+            </p:txBody>
+          </p:sp>
+        </mc:Choice>
+        <mc:Fallback>
+          <p:pic>
+            <p:nvPicPr>
+              <p:cNvPr id="112" name="Image 56" descr="/home/ahmed/Projects/ai_llm_slides/videos/deep-learning/002_transformers_part2/recreated_pptx/build/assets/dEq.png">    </p:cNvPr>
+              <p:cNvPicPr>
+                <a:picLocks noChangeAspect="1"/>
+              </p:cNvPicPr>
+              <p:nvPr/>
+            </p:nvPicPr>
+            <p:blipFill>
+              <a:blip r:embed="rId57"/>
+              <a:stretch>
+                <a:fillRect/>
+              </a:stretch>
+            </p:blipFill>
+            <p:spPr>
+              <a:xfrm>
+                <a:off x="9817608" y="5105908"/>
+                <a:ext cx="150876" cy="82296"/>
+              </a:xfrm>
+              <a:prstGeom prst="rect">
+                <a:avLst/>
+              </a:prstGeom>
+            </p:spPr>
+          </p:pic>
+        </mc:Fallback>
+      </mc:AlternateContent>
+      <mc:AlternateContent>
+        <mc:Choice xmlns:a14="http://schemas.microsoft.com/office/drawing/2010/main" Requires="a14">
+          <p:sp>
+            <p:nvSpPr>
+              <p:cNvPr id="113" name="Equation OMML" descr="="/>
+              <p:cNvSpPr txBox="1"/>
+              <p:nvPr/>
+            </p:nvSpPr>
+            <p:spPr>
+              <a:xfrm>
+                <a:off x="9830308" y="5537708"/>
+                <a:ext cx="150876" cy="82296"/>
+              </a:xfrm>
+              <a:prstGeom prst="rect">
+                <a:avLst/>
+              </a:prstGeom>
+              <a:noFill/>
+            </p:spPr>
+            <p:txBody>
+              <a:bodyPr lIns="0" tIns="0" rIns="0" bIns="0" anchor="ctr">
+                <a:noAutofit/>
+              </a:bodyPr>
+              <a:lstStyle/>
+              <a:p>
+                <a:pPr algn="ctr">
+                  <a:buNone/>
+                </a:pPr>
+                <a14:m>
+                  <m:oMathPara xmlns:m="http://schemas.openxmlformats.org/officeDocument/2006/math" xmlns:a="http://schemas.openxmlformats.org/drawingml/2006/main">
+                    <m:oMathParaPr>
+                      <m:jc m:val="centerGroup"/>
+                    </m:oMathParaPr>
+                    <m:oMath xmlns:m="http://schemas.openxmlformats.org/officeDocument/2006/math">
+                      <m:r>
+                        <a:rPr lang="en-US" i="1" smtClean="0" sz="1600">
+                          <a:solidFill>
+                            <a:srgbClr val="0000CC"/>
+                          </a:solidFill>
+                          <a:latin typeface="Cambria Math" panose="02040503050406030204" pitchFamily="18" charset="0"/>
+                        </a:rPr>
+                        <m:t xml:space="preserve">=</m:t>
+                      </m:r>
+                    </m:oMath>
+                  </m:oMathPara>
+                </a14:m>
+                <a:endParaRPr lang="en-US" dirty="0"/>
+              </a:p>
+            </p:txBody>
+          </p:sp>
+        </mc:Choice>
+        <mc:Fallback>
+          <p:pic>
+            <p:nvPicPr>
+              <p:cNvPr id="113" name="Image 57" descr="/home/ahmed/Projects/ai_llm_slides/videos/deep-learning/002_transformers_part2/recreated_pptx/build/assets/dEq.png">    </p:cNvPr>
+              <p:cNvPicPr>
+                <a:picLocks noChangeAspect="1"/>
+              </p:cNvPicPr>
+              <p:nvPr/>
+            </p:nvPicPr>
+            <p:blipFill>
+              <a:blip r:embed="rId58"/>
+              <a:stretch>
+                <a:fillRect/>
+              </a:stretch>
+            </p:blipFill>
+            <p:spPr>
+              <a:xfrm>
+                <a:off x="9830308" y="5537708"/>
+                <a:ext cx="150876" cy="82296"/>
+              </a:xfrm>
+              <a:prstGeom prst="rect">
+                <a:avLst/>
+              </a:prstGeom>
+            </p:spPr>
+          </p:pic>
+        </mc:Fallback>
+      </mc:AlternateContent>
       <p:sp>
         <p:nvSpPr>
           <p:cNvPr id="114" name="Shape 54"/>
@@ -3754,30 +9173,116 @@
           </a:ln>
         </p:spPr>
       </p:sp>
-      <p:pic>
-        <p:nvPicPr>
-          <p:cNvPr id="115" name="Image 58" descr="/home/ahmed/Projects/ai_llm_slides/videos/deep-learning/002_transformers_part2/recreated_pptx/build/assets/callout.png">    </p:cNvPr>
-          <p:cNvPicPr>
-            <a:picLocks noChangeAspect="1"/>
-          </p:cNvPicPr>
-          <p:nvPr/>
-        </p:nvPicPr>
-        <p:blipFill>
-          <a:blip r:embed="rId59"/>
-          <a:stretch>
-            <a:fillRect/>
-          </a:stretch>
-        </p:blipFill>
-        <p:spPr>
-          <a:xfrm>
-            <a:off x="7404608" y="6045708"/>
-            <a:ext cx="1706880" cy="201168"/>
-          </a:xfrm>
-          <a:prstGeom prst="rect">
-            <a:avLst/>
-          </a:prstGeom>
-        </p:spPr>
-      </p:pic>
+      <mc:AlternateContent>
+        <mc:Choice xmlns:a14="http://schemas.microsoft.com/office/drawing/2010/main" Requires="a14">
+          <p:sp>
+            <p:nvSpPr>
+              <p:cNvPr id="115" name="Equation OMML" descr="\mathbf{=2}\,(\mathbf{1-cos}(\omega\delta))"/>
+              <p:cNvSpPr txBox="1"/>
+              <p:nvPr/>
+            </p:nvSpPr>
+            <p:spPr>
+              <a:xfrm>
+                <a:off x="7404608" y="6045708"/>
+                <a:ext cx="1706880" cy="201168"/>
+              </a:xfrm>
+              <a:prstGeom prst="rect">
+                <a:avLst/>
+              </a:prstGeom>
+              <a:noFill/>
+            </p:spPr>
+            <p:txBody>
+              <a:bodyPr lIns="0" tIns="0" rIns="0" bIns="0" anchor="ctr">
+                <a:noAutofit/>
+              </a:bodyPr>
+              <a:lstStyle/>
+              <a:p>
+                <a:pPr algn="ctr">
+                  <a:buNone/>
+                </a:pPr>
+                <a14:m>
+                  <m:oMathPara xmlns:m="http://schemas.openxmlformats.org/officeDocument/2006/math" xmlns:a="http://schemas.openxmlformats.org/drawingml/2006/main">
+                    <m:oMathParaPr>
+                      <m:jc m:val="centerGroup"/>
+                    </m:oMathParaPr>
+                    <m:oMath xmlns:m="http://schemas.openxmlformats.org/officeDocument/2006/math">
+                      <m:r>
+                        <m:rPr>
+                          <m:sty m:val="b"/>
+                        </m:rPr>
+                        <a:rPr lang="en-US" i="0" smtClean="0" sz="1559" b="1">
+                          <a:solidFill>
+                            <a:srgbClr val="0A0A66"/>
+                          </a:solidFill>
+                          <a:latin typeface="Cambria Math" panose="02040503050406030204" pitchFamily="18" charset="0"/>
+                        </a:rPr>
+                        <m:t xml:space="preserve">=2</m:t>
+                      </m:r>
+                      <m:r>
+                        <a:rPr lang="en-US" i="1" smtClean="0" sz="1559">
+                          <a:solidFill>
+                            <a:srgbClr val="0A0A66"/>
+                          </a:solidFill>
+                          <a:latin typeface="Cambria Math" panose="02040503050406030204" pitchFamily="18" charset="0"/>
+                        </a:rPr>
+                        <m:t xml:space="preserve"> (</m:t>
+                      </m:r>
+                      <m:r>
+                        <m:rPr>
+                          <m:sty m:val="b"/>
+                        </m:rPr>
+                        <a:rPr lang="en-US" i="0" smtClean="0" sz="1559" b="1">
+                          <a:solidFill>
+                            <a:srgbClr val="0A0A66"/>
+                          </a:solidFill>
+                          <a:latin typeface="Cambria Math" panose="02040503050406030204" pitchFamily="18" charset="0"/>
+                        </a:rPr>
+                        <m:t xml:space="preserve">1-cos</m:t>
+                      </m:r>
+                      <m:r>
+                        <a:rPr lang="en-US" i="1" smtClean="0" sz="1559">
+                          <a:solidFill>
+                            <a:srgbClr val="0A0A66"/>
+                          </a:solidFill>
+                          <a:latin typeface="Cambria Math" panose="02040503050406030204" pitchFamily="18" charset="0"/>
+                        </a:rPr>
+                        <m:t xml:space="preserve">(ωδ))</m:t>
+                      </m:r>
+                    </m:oMath>
+                  </m:oMathPara>
+                </a14:m>
+                <a:endParaRPr lang="en-US" dirty="0"/>
+              </a:p>
+            </p:txBody>
+          </p:sp>
+        </mc:Choice>
+        <mc:Fallback>
+          <p:pic>
+            <p:nvPicPr>
+              <p:cNvPr id="115" name="Image 58" descr="/home/ahmed/Projects/ai_llm_slides/videos/deep-learning/002_transformers_part2/recreated_pptx/build/assets/callout.png">    </p:cNvPr>
+              <p:cNvPicPr>
+                <a:picLocks noChangeAspect="1"/>
+              </p:cNvPicPr>
+              <p:nvPr/>
+            </p:nvPicPr>
+            <p:blipFill>
+              <a:blip r:embed="rId59"/>
+              <a:stretch>
+                <a:fillRect/>
+              </a:stretch>
+            </p:blipFill>
+            <p:spPr>
+              <a:xfrm>
+                <a:off x="7404608" y="6045708"/>
+                <a:ext cx="1706880" cy="201168"/>
+              </a:xfrm>
+              <a:prstGeom prst="rect">
+                <a:avLst/>
+              </a:prstGeom>
+            </p:spPr>
+          </p:pic>
+        </mc:Fallback>
+      </mc:AlternateContent>
       <p:sp>
         <p:nvSpPr>
           <p:cNvPr id="116" name="Text 55"/>
